--- a/docs/soutenance.pptx
+++ b/docs/soutenance.pptx
@@ -5399,7 +5399,7 @@
                 </a:solidFill>
                 <a:latin typeface="Consolas"/>
               </a:rPr>
-              <a:t>GET/POST /</a:t>
+              <a:t>+ admin.py</a:t>
             </a:r>
           </a:p>
           <a:p>
@@ -5443,7 +5443,7 @@
                 </a:solidFill>
                 <a:latin typeface="Consolas"/>
               </a:rPr>
-              <a:t>    ├── document.py   </a:t>
+              <a:t>    ├── ingestion/document.py     </a:t>
             </a:r>
             <a:r>
               <a:rPr sz="1162" b="0" i="0">
@@ -5474,7 +5474,7 @@
                 </a:solidFill>
                 <a:latin typeface="Consolas"/>
               </a:rPr>
-              <a:t>    ├── </a:t>
+              <a:t>    ├── ingestion/</a:t>
             </a:r>
             <a:r>
               <a:rPr sz="1162" b="0" i="0">
@@ -5669,7 +5669,7 @@
                 </a:solidFill>
                 <a:latin typeface="Consolas"/>
               </a:rPr>
-              <a:t>données par langue</a:t>
+              <a:t>listes lues en base</a:t>
             </a:r>
           </a:p>
           <a:p>
@@ -5861,7 +5861,7 @@
                 </a:solidFill>
                 <a:latin typeface="Segoe UI"/>
               </a:rPr>
-              <a:t>Le décorateur @enregistrer range une instance de la règle dans _registre au moment de l’import. fr.py et en.py remplissent le même registre : le moteur, lui, ne connaît aucune langue.</a:t>
+              <a:t>La liste REGLES énumère en clair une instance de chaque règle : ce que le moteur exécute se lit d’un coup d’œil, sans décorateur ni import caché. Le moteur, lui, ne connaît aucune langue.</a:t>
             </a:r>
           </a:p>
         </p:txBody>
@@ -5973,7 +5973,7 @@
                 </a:solidFill>
                 <a:latin typeface="Segoe UI"/>
               </a:rPr>
-              <a:t>Chaque règle déclare langues = ("fr",). run(document) écarte celles qui ne répondent pas, exécute les autres, puis trie les signalements par position — le surlignage exige un texte parcouru de gauche à droite.</a:t>
+              <a:t>Chaque règle sait si elle s’applique : par sa donnée, ou par langues = ("fr",). run(document) écarte les autres, exécute le reste, puis trie les signalements par position — le surlignage parcourt le texte de gauche à droite.</a:t>
             </a:r>
           </a:p>
         </p:txBody>
@@ -6090,7 +6090,7 @@
                 </a:solidFill>
                 <a:latin typeface="Consolas"/>
               </a:rPr>
-              <a:t> _registre:</a:t>
+              <a:t> REGLES:</a:t>
             </a:r>
           </a:p>
           <a:p>

--- a/docs/soutenance.pptx
+++ b/docs/soutenance.pptx
@@ -5,7 +5,7 @@
     <p:sldMasterId id="2147483648" r:id="rId1"/>
   </p:sldMasterIdLst>
   <p:notesMasterIdLst>
-    <p:notesMasterId r:id="rId23"/>
+    <p:notesMasterId r:id="rId24"/>
   </p:notesMasterIdLst>
   <p:sldIdLst>
     <p:sldId id="256" r:id="rId2"/>
@@ -13,22 +13,23 @@
     <p:sldId id="258" r:id="rId4"/>
     <p:sldId id="259" r:id="rId5"/>
     <p:sldId id="260" r:id="rId6"/>
-    <p:sldId id="278" r:id="rId29"/>
-    <p:sldId id="261" r:id="rId7"/>
-    <p:sldId id="277" r:id="rId28"/>
-    <p:sldId id="263" r:id="rId9"/>
-    <p:sldId id="264" r:id="rId10"/>
-    <p:sldId id="265" r:id="rId11"/>
-    <p:sldId id="266" r:id="rId12"/>
-    <p:sldId id="267" r:id="rId13"/>
-    <p:sldId id="268" r:id="rId14"/>
-    <p:sldId id="269" r:id="rId15"/>
-    <p:sldId id="270" r:id="rId16"/>
+    <p:sldId id="278" r:id="rId7"/>
+    <p:sldId id="261" r:id="rId8"/>
+    <p:sldId id="277" r:id="rId9"/>
+    <p:sldId id="263" r:id="rId10"/>
+    <p:sldId id="264" r:id="rId11"/>
+    <p:sldId id="265" r:id="rId12"/>
+    <p:sldId id="266" r:id="rId13"/>
+    <p:sldId id="267" r:id="rId14"/>
+    <p:sldId id="268" r:id="rId15"/>
+    <p:sldId id="269" r:id="rId16"/>
+    <p:sldId id="270" r:id="rId17"/>
     <p:sldId id="272" r:id="rId18"/>
     <p:sldId id="273" r:id="rId19"/>
     <p:sldId id="274" r:id="rId20"/>
-    <p:sldId id="262" r:id="rId8"/>
-    <p:sldId id="276" r:id="rId22"/>
+    <p:sldId id="262" r:id="rId21"/>
+    <p:sldId id="279" r:id="rId22"/>
+    <p:sldId id="276" r:id="rId23"/>
   </p:sldIdLst>
   <p:sldSz cx="12192000" cy="6858000"/>
   <p:notesSz cx="6858000" cy="9144000"/>
@@ -386,7 +387,12 @@
           <a:lstStyle/>
           <a:p>
             <a:r>
-              <a:t>Lire l’arbre de haut en bas : Flask (routes, gabarits) en haut, le métier dans services/. Trois frontières : spaCy n’est importé que dans linguistics.py ; le SQL ne vit que dans repositories.py ; les règles reçoivent un Document, jamais Flask. Les règles sont rangées par langue dans des fichiers séparés, mais vivent toutes dans le même registre : c’est le moteur qui trie à l’exécution. Une langue non couverte ne lève rien, aucun KeyError possible.</a:t>
+              <a:t>Montrer que chaque étape a une seule responsabilité. Le cadre au-dessus : tout ce qui est dedans est caché derrière un seul appel.</a:t>
+            </a:r>
+          </a:p>
+          <a:p>
+            <a:r>
+              <a:t>Si question sur la sécurité : surligner() échappe le HTML segment par segment avant d’insérer les balises mark.</a:t>
             </a:r>
           </a:p>
         </p:txBody>
@@ -456,12 +462,7 @@
           <a:lstStyle/>
           <a:p>
             <a:r>
-              <a:t>Exemple réel : dans le texte de démonstration, le passif « est publiée » occupe les caractères 321 à 332. Chaque couche transporte sa position par addition, elle ne la recherche jamais.</a:t>
-            </a:r>
-          </a:p>
-          <a:p>
-            <a:r>
-              <a:t>Vérifié par test sur chaque paragraphe, phrase, token et signalement.</a:t>
+              <a:t>Lire l’arbre de haut en bas : Flask (routes, gabarits) en haut, le métier dans services/. Trois frontières : spaCy n’est importé que dans linguistics.py ; le SQL ne vit que dans repositories.py ; les règles reçoivent un Document, jamais Flask. Les règles sont rangées par langue dans des fichiers séparés, mais vivent toutes dans le même registre : c’est le moteur qui trie à l’exécution. Une langue non couverte ne lève rien, aucun KeyError possible.</a:t>
             </a:r>
           </a:p>
         </p:txBody>
@@ -531,12 +532,12 @@
           <a:lstStyle/>
           <a:p>
             <a:r>
-              <a:t>Sept lignes, mais c’est ce qui rend tout le reste mesurable : sans texte de référence unique, aucune position n’est fiable.</a:t>
-            </a:r>
-          </a:p>
-          <a:p>
-            <a:r>
-              <a:t>Le tableau de droite donne les trois arguments à sortir si on demande « pourquoi normaliser ». Le plus parlant est l’apostrophe : sans elle, un lexique doit lister chaque mot deux fois.</a:t>
+              <a:t>Exemple réel : dans le texte de démonstration, le passif « est publiée » occupe les caractères 321 à 332. Chaque couche transporte sa position par addition, elle ne la recherche jamais.</a:t>
+            </a:r>
+          </a:p>
+          <a:p>
+            <a:r>
+              <a:t>Vérifié par test sur chaque paragraphe, phrase, token et signalement.</a:t>
             </a:r>
           </a:p>
         </p:txBody>
@@ -606,7 +607,12 @@
           <a:lstStyle/>
           <a:p>
             <a:r>
-              <a:t>Trois lignes suffisent à dire l’essentiel : on découpe en paragraphes, pysbd découpe chaque paragraphe en phrases, et la position de la phrase est la somme des deux. Exemple réel, texte de démonstration : le deuxième paragraphe commence au caractère 285, sa deuxième phrase 49 caractères plus loin, donc à 334. Pourquoi pysbd et pas un découpage sur le point : « M. Dupont », « etc. », « 3,14 ». clean=False : on veut ses positions, pas sa réécriture. Le segmenteur est créé une seule fois, au chargement du module.</a:t>
+              <a:t>Sept lignes, mais c’est ce qui rend tout le reste mesurable : sans texte de référence unique, aucune position n’est fiable.</a:t>
+            </a:r>
+          </a:p>
+          <a:p>
+            <a:r>
+              <a:t>Le tableau de droite donne les trois arguments à sortir si on demande « pourquoi normaliser ». Le plus parlant est l’apostrophe : sans elle, un lexique doit lister chaque mot deux fois.</a:t>
             </a:r>
           </a:p>
         </p:txBody>
@@ -676,7 +682,7 @@
           <a:lstStyle/>
           <a:p>
             <a:r>
-              <a:t>Même idée qu’à la diapo précédente, un niveau plus bas : le paramètre offset. La fonction ne cherche jamais le mot dans le texte, elle additionne la position de la phrase et celle du mot dans la phrase. Exemple réel : la phrase « Afin d’assurer le suivi, une notice est publiée. » commence à 285 ; « est » est 36 caractères plus loin, donc à 321 — c’est le 321 de la règle d’or. Si on demande si spaCy ne tokenise pas déjà : si, pour lui-même. Sa sortie devient Sentence.analyse ; Sentence.tokens reste produit ici. « La décision a été prise. » fait 5 mots pour la règle de longueur et 6 tokens pour spaCy.</a:t>
+              <a:t>Trois lignes suffisent à dire l’essentiel : on découpe en paragraphes, pysbd découpe chaque paragraphe en phrases, et la position de la phrase est la somme des deux. Exemple réel, texte de démonstration : le deuxième paragraphe commence au caractère 285, sa deuxième phrase 49 caractères plus loin, donc à 334. Pourquoi pysbd et pas un découpage sur le point : « M. Dupont », « etc. », « 3,14 ». clean=False : on veut ses positions, pas sa réécriture. Le segmenteur est créé une seule fois, au chargement du module.</a:t>
             </a:r>
           </a:p>
         </p:txBody>
@@ -746,6 +752,76 @@
           <a:lstStyle/>
           <a:p>
             <a:r>
+              <a:t>Même idée qu’à la diapo précédente, un niveau plus bas : le paramètre offset. La fonction ne cherche jamais le mot dans le texte, elle additionne la position de la phrase et celle du mot dans la phrase. Exemple réel : la phrase « Afin d’assurer le suivi, une notice est publiée. » commence à 285 ; « est » est 36 caractères plus loin, donc à 321 — c’est le 321 de la règle d’or. Si on demande si spaCy ne tokenise pas déjà : si, pour lui-même. Sa sortie devient Sentence.analyse ; Sentence.tokens reste produit ici. « La décision a été prise. » fait 5 mots pour la règle de longueur et 6 tokens pour spaCy.</a:t>
+            </a:r>
+          </a:p>
+        </p:txBody>
+      </p:sp>
+      <p:sp>
+        <p:nvSpPr>
+          <p:cNvPr id="4" name="Slide Number Placeholder 3"/>
+          <p:cNvSpPr>
+            <a:spLocks noGrp="1"/>
+          </p:cNvSpPr>
+          <p:nvPr>
+            <p:ph type="sldNum" sz="quarter" idx="5"/>
+          </p:nvPr>
+        </p:nvSpPr>
+        <p:spPr/>
+      </p:sp>
+    </p:spTree>
+  </p:cSld>
+  <p:clrMapOvr>
+    <a:masterClrMapping/>
+  </p:clrMapOvr>
+</p:notes>
+</file>
+
+<file path=ppt/notesSlides/notesSlide16.xml><?xml version="1.0" encoding="utf-8"?>
+<p:notes xmlns:a="http://schemas.openxmlformats.org/drawingml/2006/main" xmlns:r="http://schemas.openxmlformats.org/officeDocument/2006/relationships" xmlns:p="http://schemas.openxmlformats.org/presentationml/2006/main">
+  <p:cSld>
+    <p:spTree>
+      <p:nvGrpSpPr>
+        <p:cNvPr id="1" name=""/>
+        <p:cNvGrpSpPr/>
+        <p:nvPr/>
+      </p:nvGrpSpPr>
+      <p:grpSpPr>
+        <a:xfrm>
+          <a:off x="0" y="0"/>
+          <a:ext cx="0" cy="0"/>
+          <a:chOff x="0" y="0"/>
+          <a:chExt cx="0" cy="0"/>
+        </a:xfrm>
+      </p:grpSpPr>
+      <p:sp>
+        <p:nvSpPr>
+          <p:cNvPr id="2" name="Slide Image Placeholder 1"/>
+          <p:cNvSpPr>
+            <a:spLocks noGrp="1" noRot="1" noChangeAspect="1"/>
+          </p:cNvSpPr>
+          <p:nvPr>
+            <p:ph type="sldImg" idx="2"/>
+          </p:nvPr>
+        </p:nvSpPr>
+        <p:spPr/>
+      </p:sp>
+      <p:sp>
+        <p:nvSpPr>
+          <p:cNvPr id="3" name="Notes Placeholder 2"/>
+          <p:cNvSpPr>
+            <a:spLocks noGrp="1"/>
+          </p:cNvSpPr>
+          <p:nvPr>
+            <p:ph type="body" sz="quarter" idx="3"/>
+          </p:nvPr>
+        </p:nvSpPr>
+        <p:spPr/>
+        <p:txBody>
+          <a:bodyPr/>
+          <a:lstStyle/>
+          <a:p>
+            <a:r>
               <a:t>C’est la feature choisie parce qu’une expression régulière ne peut pas la faire. Une regex signale les quatre phrases ; une seule est un passif.</a:t>
             </a:r>
           </a:p>
@@ -1071,6 +1147,76 @@
 </p:notes>
 </file>
 
+<file path=ppt/notesSlides/notesSlide20.xml><?xml version="1.0" encoding="utf-8"?>
+<p:notes xmlns:a="http://schemas.openxmlformats.org/drawingml/2006/main" xmlns:r="http://schemas.openxmlformats.org/officeDocument/2006/relationships" xmlns:p="http://schemas.openxmlformats.org/presentationml/2006/main">
+  <p:cSld>
+    <p:spTree>
+      <p:nvGrpSpPr>
+        <p:cNvPr id="1" name=""/>
+        <p:cNvGrpSpPr/>
+        <p:nvPr/>
+      </p:nvGrpSpPr>
+      <p:grpSpPr>
+        <a:xfrm>
+          <a:off x="0" y="0"/>
+          <a:ext cx="0" cy="0"/>
+          <a:chOff x="0" y="0"/>
+          <a:chExt cx="0" cy="0"/>
+        </a:xfrm>
+      </p:grpSpPr>
+      <p:sp>
+        <p:nvSpPr>
+          <p:cNvPr id="2" name="Slide Image Placeholder 1"/>
+          <p:cNvSpPr>
+            <a:spLocks noGrp="1" noRot="1" noChangeAspect="1"/>
+          </p:cNvSpPr>
+          <p:nvPr>
+            <p:ph type="sldImg" idx="2"/>
+          </p:nvPr>
+        </p:nvSpPr>
+        <p:spPr/>
+      </p:sp>
+      <p:sp>
+        <p:nvSpPr>
+          <p:cNvPr id="3" name="Notes Placeholder 2"/>
+          <p:cNvSpPr>
+            <a:spLocks noGrp="1"/>
+          </p:cNvSpPr>
+          <p:nvPr>
+            <p:ph type="body" sz="quarter" idx="3"/>
+          </p:nvPr>
+        </p:nvSpPr>
+        <p:spPr/>
+        <p:txBody>
+          <a:bodyPr/>
+          <a:lstStyle/>
+          <a:p>
+            <a:r>
+              <a:t>Le plan a tenu : gel des fonctionnalités prononcé le mercredi 23, deux jours avant la date prévue ; depuis, uniquement des tests, de la documentation et la répétition. Tout ce qui est dans « Fait » a été montré en démonstration. Ordre de sacrifice, si la question tombe : conteneurisation, export, anglais, administration, règles supplémentaires. Jamais sacrifié : la chaîne, les trois règles, le surlignage, le passif, les tests. Les refus argumentés montrent qu’une réflexion a précédé le code.</a:t>
+            </a:r>
+          </a:p>
+        </p:txBody>
+      </p:sp>
+      <p:sp>
+        <p:nvSpPr>
+          <p:cNvPr id="4" name="Slide Number Placeholder 3"/>
+          <p:cNvSpPr>
+            <a:spLocks noGrp="1"/>
+          </p:cNvSpPr>
+          <p:nvPr>
+            <p:ph type="sldNum" sz="quarter" idx="5"/>
+          </p:nvPr>
+        </p:nvSpPr>
+        <p:spPr/>
+      </p:sp>
+    </p:spTree>
+  </p:cSld>
+  <p:clrMapOvr>
+    <a:masterClrMapping/>
+  </p:clrMapOvr>
+</p:notes>
+</file>
+
 <file path=ppt/notesSlides/notesSlide21.xml><?xml version="1.0" encoding="utf-8"?>
 <p:notes xmlns:a="http://schemas.openxmlformats.org/drawingml/2006/main" xmlns:r="http://schemas.openxmlformats.org/officeDocument/2006/relationships" xmlns:p="http://schemas.openxmlformats.org/presentationml/2006/main">
   <p:cSld>
@@ -1095,10 +1241,24 @@
             <a:spLocks noGrp="1" noRot="1" noChangeAspect="1"/>
           </p:cNvSpPr>
           <p:nvPr>
-            <p:ph type="sldImg" idx="2"/>
+            <p:ph type="sldImg"/>
           </p:nvPr>
         </p:nvSpPr>
-        <p:spPr/>
+        <p:spPr>
+          <a:xfrm>
+            <a:off x="685800" y="1143000"/>
+            <a:ext cx="5486400" cy="3086100"/>
+          </a:xfrm>
+          <a:prstGeom prst="rect">
+            <a:avLst/>
+          </a:prstGeom>
+          <a:noFill/>
+          <a:ln w="12700">
+            <a:solidFill>
+              <a:prstClr val="black"/>
+            </a:solidFill>
+          </a:ln>
+        </p:spPr>
       </p:sp>
       <p:sp>
         <p:nvSpPr>
@@ -1107,33 +1267,32 @@
             <a:spLocks noGrp="1"/>
           </p:cNvSpPr>
           <p:nvPr>
-            <p:ph type="body" sz="quarter" idx="3"/>
+            <p:ph type="body" idx="1"/>
           </p:nvPr>
         </p:nvSpPr>
-        <p:spPr/>
+        <p:spPr>
+          <a:xfrm>
+            <a:off x="685800" y="4400550"/>
+            <a:ext cx="5486400" cy="3600450"/>
+          </a:xfrm>
+          <a:prstGeom prst="rect">
+            <a:avLst/>
+          </a:prstGeom>
+        </p:spPr>
         <p:txBody>
           <a:bodyPr/>
           <a:lstStyle/>
           <a:p>
-            <a:r>
-              <a:t>Revenir à la phrase du début. La version réécrite applique deux principes : un mot simple (P5) et un agent nommé (P8). C’est exactement ce que l’outil aide à voir.</a:t>
-            </a:r>
-          </a:p>
-        </p:txBody>
-      </p:sp>
-      <p:sp>
-        <p:nvSpPr>
-          <p:cNvPr id="4" name="Slide Number Placeholder 3"/>
-          <p:cNvSpPr>
-            <a:spLocks noGrp="1"/>
-          </p:cNvSpPr>
-          <p:nvPr>
-            <p:ph type="sldNum" sz="quarter" idx="5"/>
-          </p:nvPr>
-        </p:nvSpPr>
-        <p:spPr/>
+            <a:endParaRPr lang="en-BE"/>
+          </a:p>
+        </p:txBody>
       </p:sp>
     </p:spTree>
+    <p:extLst>
+      <p:ext uri="{BB962C8B-B14F-4D97-AF65-F5344CB8AC3E}">
+        <p14:creationId xmlns:p14="http://schemas.microsoft.com/office/powerpoint/2010/main" val="626043014"/>
+      </p:ext>
+    </p:extLst>
   </p:cSld>
   <p:clrMapOvr>
     <a:masterClrMapping/>
@@ -1142,7 +1301,7 @@
 </file>
 
 <file path=ppt/notesSlides/notesSlide22.xml><?xml version="1.0" encoding="utf-8"?>
-<p:notes xmlns:a="http://schemas.openxmlformats.org/drawingml/2006/main" xmlns:p="http://schemas.openxmlformats.org/presentationml/2006/main" xmlns:r="http://schemas.openxmlformats.org/officeDocument/2006/relationships">
+<p:notes xmlns:a="http://schemas.openxmlformats.org/drawingml/2006/main" xmlns:r="http://schemas.openxmlformats.org/officeDocument/2006/relationships" xmlns:p="http://schemas.openxmlformats.org/presentationml/2006/main">
   <p:cSld>
     <p:spTree>
       <p:nvGrpSpPr>
@@ -1160,6 +1319,18 @@
       </p:grpSpPr>
       <p:sp>
         <p:nvSpPr>
+          <p:cNvPr id="2" name="Slide Image Placeholder 1"/>
+          <p:cNvSpPr>
+            <a:spLocks noGrp="1" noRot="1" noChangeAspect="1"/>
+          </p:cNvSpPr>
+          <p:nvPr>
+            <p:ph type="sldImg" idx="2"/>
+          </p:nvPr>
+        </p:nvSpPr>
+        <p:spPr/>
+      </p:sp>
+      <p:sp>
+        <p:nvSpPr>
           <p:cNvPr id="3" name="Notes Placeholder 2"/>
           <p:cNvSpPr>
             <a:spLocks noGrp="1"/>
@@ -1174,56 +1345,22 @@
           <a:lstStyle/>
           <a:p>
             <a:r>
-              <a:t>Démonstration du parcours complet, environ cinq minutes. Avant la soutenance : flask run, puis une première analyse pour charger spaCy (environ deux secondes). Étape 1 : coller les deux paragraphes ; la première phrase (44 mots) porte à la fois la règle de longueur et des connecteurs, sans balises imbriquées ; « une notice est publiée » est un passif sans agent. Étape 3 : « À cet égard » n’est pas signalé, on l’ajoute dans Listes de mots, on relance, il l’est — sans redémarrage, les règles relisent la base. Étape 4 : la base ne contient aucun HTML, seulement le texte normalisé et les empans. Étape 5 : les quatre fichiers d’exemples/ donnent les mêmes signalements ; le .pdf reçoit un message dédié. Plan B : cette capture, et la suite de tests lancée en direct.</a:t>
-            </a:r>
-          </a:p>
-        </p:txBody>
-      </p:sp>
-    </p:spTree>
-  </p:cSld>
-  <p:clrMapOvr>
-    <a:masterClrMapping/>
-  </p:clrMapOvr>
-</p:notes>
-</file>
-
-<file path=ppt/notesSlides/notesSlide23.xml><?xml version="1.0" encoding="utf-8"?>
-<p:notes xmlns:a="http://schemas.openxmlformats.org/drawingml/2006/main" xmlns:p="http://schemas.openxmlformats.org/presentationml/2006/main" xmlns:r="http://schemas.openxmlformats.org/officeDocument/2006/relationships">
-  <p:cSld>
-    <p:spTree>
-      <p:nvGrpSpPr>
-        <p:cNvPr id="1" name=""/>
-        <p:cNvGrpSpPr/>
-        <p:nvPr/>
-      </p:nvGrpSpPr>
-      <p:grpSpPr>
-        <a:xfrm>
-          <a:off x="0" y="0"/>
-          <a:ext cx="0" cy="0"/>
-          <a:chOff x="0" y="0"/>
-          <a:chExt cx="0" cy="0"/>
-        </a:xfrm>
-      </p:grpSpPr>
-      <p:sp>
-        <p:nvSpPr>
-          <p:cNvPr id="3" name="Notes Placeholder 2"/>
+              <a:t>Revenir à la phrase du début. La version réécrite applique deux principes : un mot simple (P5) et un agent nommé (P8). C’est exactement ce que l’outil aide à voir.</a:t>
+            </a:r>
+          </a:p>
+        </p:txBody>
+      </p:sp>
+      <p:sp>
+        <p:nvSpPr>
+          <p:cNvPr id="4" name="Slide Number Placeholder 3"/>
           <p:cNvSpPr>
             <a:spLocks noGrp="1"/>
           </p:cNvSpPr>
           <p:nvPr>
-            <p:ph type="body" sz="quarter" idx="3"/>
+            <p:ph type="sldNum" sz="quarter" idx="5"/>
           </p:nvPr>
         </p:nvSpPr>
         <p:spPr/>
-        <p:txBody>
-          <a:bodyPr/>
-          <a:lstStyle/>
-          <a:p>
-            <a:r>
-              <a:t>Point à faire valoir : l’outil ne prétend pas tout vérifier. Cinq principes relèvent du jugement humain — réfléchir, penser au lecteur, structurer, être concret, relire. Deux autres sont des pistes : ils laissent une trace dans le texte, donc une règle pourrait les détecter avec le même moteur.</a:t>
-            </a:r>
-          </a:p>
-        </p:txBody>
       </p:sp>
     </p:spTree>
   </p:cSld>
@@ -1467,18 +1604,6 @@
       </p:grpSpPr>
       <p:sp>
         <p:nvSpPr>
-          <p:cNvPr id="2" name="Slide Image Placeholder 1"/>
-          <p:cNvSpPr>
-            <a:spLocks noGrp="1" noRot="1" noChangeAspect="1"/>
-          </p:cNvSpPr>
-          <p:nvPr>
-            <p:ph type="sldImg" idx="2"/>
-          </p:nvPr>
-        </p:nvSpPr>
-        <p:spPr/>
-      </p:sp>
-      <p:sp>
-        <p:nvSpPr>
           <p:cNvPr id="3" name="Notes Placeholder 2"/>
           <p:cNvSpPr>
             <a:spLocks noGrp="1"/>
@@ -1493,22 +1618,10 @@
           <a:lstStyle/>
           <a:p>
             <a:r>
-              <a:t>Répond à « À qui est-ce destiné ? » et « Quel est l’objectif principal ? ». L’absence de score est une décision assumée, pas un manque : la défendre en une phrase.</a:t>
-            </a:r>
-          </a:p>
-        </p:txBody>
-      </p:sp>
-      <p:sp>
-        <p:nvSpPr>
-          <p:cNvPr id="4" name="Slide Number Placeholder 3"/>
-          <p:cNvSpPr>
-            <a:spLocks noGrp="1"/>
-          </p:cNvSpPr>
-          <p:nvPr>
-            <p:ph type="sldNum" sz="quarter" idx="5"/>
-          </p:nvPr>
-        </p:nvSpPr>
-        <p:spPr/>
+              <a:t>Point à faire valoir : l’outil ne prétend pas tout vérifier. Cinq principes relèvent du jugement humain — réfléchir, penser au lecteur, structurer, être concret, relire. Deux autres sont des pistes : ils laissent une trace dans le texte, donc une règle pourrait les détecter avec le même moteur.</a:t>
+            </a:r>
+          </a:p>
+        </p:txBody>
       </p:sp>
     </p:spTree>
   </p:cSld>
@@ -1563,7 +1676,7 @@
           <a:lstStyle/>
           <a:p>
             <a:r>
-              <a:t>Le plan a tenu : gel des fonctionnalités prononcé le mercredi 23, deux jours avant la date prévue ; depuis, uniquement des tests, de la documentation et la répétition. Tout ce qui est dans « Fait » a été montré en démonstration. Ordre de sacrifice, si la question tombe : conteneurisation, export, anglais, administration, règles supplémentaires. Jamais sacrifié : la chaîne, les trois règles, le surlignage, le passif, les tests. Les refus argumentés montrent qu’une réflexion a précédé le code.</a:t>
+              <a:t>Répond à « À qui est-ce destiné ? » et « Quel est l’objectif principal ? ». L’absence de score est une décision assumée, pas un manque : la défendre en une phrase.</a:t>
             </a:r>
           </a:p>
         </p:txBody>
@@ -1607,18 +1720,6 @@
       </p:grpSpPr>
       <p:sp>
         <p:nvSpPr>
-          <p:cNvPr id="2" name="Slide Image Placeholder 1"/>
-          <p:cNvSpPr>
-            <a:spLocks noGrp="1" noRot="1" noChangeAspect="1"/>
-          </p:cNvSpPr>
-          <p:nvPr>
-            <p:ph type="sldImg" idx="2"/>
-          </p:nvPr>
-        </p:nvSpPr>
-        <p:spPr/>
-      </p:sp>
-      <p:sp>
-        <p:nvSpPr>
           <p:cNvPr id="3" name="Notes Placeholder 2"/>
           <p:cNvSpPr>
             <a:spLocks noGrp="1"/>
@@ -1633,27 +1734,10 @@
           <a:lstStyle/>
           <a:p>
             <a:r>
-              <a:t>Ne pas lire le tableau : citer deux ou trois motifs. pysbd, parce qu’un découpage sur le point se trompe ; spaCy, parce qu’une expression régulière ne distingue pas un passif d’un passé composé.</a:t>
-            </a:r>
-          </a:p>
-          <a:p>
-            <a:r>
-              <a:t>Le modèle spaCy est épinglé par URL dans requirements.txt : un simple pip install suffit.</a:t>
-            </a:r>
-          </a:p>
-        </p:txBody>
-      </p:sp>
-      <p:sp>
-        <p:nvSpPr>
-          <p:cNvPr id="4" name="Slide Number Placeholder 3"/>
-          <p:cNvSpPr>
-            <a:spLocks noGrp="1"/>
-          </p:cNvSpPr>
-          <p:nvPr>
-            <p:ph type="sldNum" sz="quarter" idx="5"/>
-          </p:nvPr>
-        </p:nvSpPr>
-        <p:spPr/>
+              <a:t>Démonstration du parcours complet, environ cinq minutes. Avant la soutenance : flask run, puis une première analyse pour charger spaCy (environ deux secondes). Étape 1 : coller les deux paragraphes ; la première phrase (44 mots) porte à la fois la règle de longueur et des connecteurs, sans balises imbriquées ; « une notice est publiée » est un passif sans agent. Étape 3 : « À cet égard » n’est pas signalé, on l’ajoute dans Listes de mots, on relance, il l’est — sans redémarrage, les règles relisent la base. Étape 4 : la base ne contient aucun HTML, seulement le texte normalisé et les empans. Étape 5 : les quatre fichiers d’exemples/ donnent les mêmes signalements ; le .pdf reçoit un message dédié. Plan B : cette capture, et la suite de tests lancée en direct.</a:t>
+            </a:r>
+          </a:p>
+        </p:txBody>
       </p:sp>
     </p:spTree>
   </p:cSld>
@@ -1708,12 +1792,12 @@
           <a:lstStyle/>
           <a:p>
             <a:r>
-              <a:t>Montrer que chaque étape a une seule responsabilité. Le cadre au-dessus : tout ce qui est dedans est caché derrière un seul appel.</a:t>
-            </a:r>
-          </a:p>
-          <a:p>
-            <a:r>
-              <a:t>Si question sur la sécurité : surligner() échappe le HTML segment par segment avant d’insérer les balises mark.</a:t>
+              <a:t>Ne pas lire le tableau : citer deux ou trois motifs. pysbd, parce qu’un découpage sur le point se trompe ; spaCy, parce qu’une expression régulière ne distingue pas un passif d’un passé composé.</a:t>
+            </a:r>
+          </a:p>
+          <a:p>
+            <a:r>
+              <a:t>Le modèle spaCy est épinglé par URL dans requirements.txt : un simple pip install suffit.</a:t>
             </a:r>
           </a:p>
         </p:txBody>
@@ -1917,7 +2001,7 @@
           <a:p>
             <a:fld id="{5BCAD085-E8A6-8845-BD4E-CB4CCA059FC4}" type="datetimeFigureOut">
               <a:rPr lang="en-US" smtClean="0"/>
-              <a:t>9/16/2026</a:t>
+              <a:t>9/27/2026</a:t>
             </a:fld>
             <a:endParaRPr lang="en-US"/>
           </a:p>
@@ -1959,7 +2043,7 @@
           <a:p>
             <a:fld id="{C1FF6DA9-008F-8B48-92A6-B652298478BF}" type="slidenum">
               <a:rPr lang="en-US" smtClean="0"/>
-              <a:t>‹N°›</a:t>
+              <a:t>‹#›</a:t>
             </a:fld>
             <a:endParaRPr lang="en-US"/>
           </a:p>
@@ -2085,7 +2169,7 @@
           <a:p>
             <a:fld id="{5BCAD085-E8A6-8845-BD4E-CB4CCA059FC4}" type="datetimeFigureOut">
               <a:rPr lang="en-US" smtClean="0"/>
-              <a:t>9/16/2026</a:t>
+              <a:t>9/27/2026</a:t>
             </a:fld>
             <a:endParaRPr lang="en-US"/>
           </a:p>
@@ -2127,7 +2211,7 @@
           <a:p>
             <a:fld id="{C1FF6DA9-008F-8B48-92A6-B652298478BF}" type="slidenum">
               <a:rPr lang="en-US" smtClean="0"/>
-              <a:t>‹N°›</a:t>
+              <a:t>‹#›</a:t>
             </a:fld>
             <a:endParaRPr lang="en-US"/>
           </a:p>
@@ -2263,7 +2347,7 @@
           <a:p>
             <a:fld id="{5BCAD085-E8A6-8845-BD4E-CB4CCA059FC4}" type="datetimeFigureOut">
               <a:rPr lang="en-US" smtClean="0"/>
-              <a:t>9/16/2026</a:t>
+              <a:t>9/27/2026</a:t>
             </a:fld>
             <a:endParaRPr lang="en-US"/>
           </a:p>
@@ -2305,7 +2389,7 @@
           <a:p>
             <a:fld id="{C1FF6DA9-008F-8B48-92A6-B652298478BF}" type="slidenum">
               <a:rPr lang="en-US" smtClean="0"/>
-              <a:t>‹N°›</a:t>
+              <a:t>‹#›</a:t>
             </a:fld>
             <a:endParaRPr lang="en-US"/>
           </a:p>
@@ -2431,7 +2515,7 @@
           <a:p>
             <a:fld id="{5BCAD085-E8A6-8845-BD4E-CB4CCA059FC4}" type="datetimeFigureOut">
               <a:rPr lang="en-US" smtClean="0"/>
-              <a:t>9/16/2026</a:t>
+              <a:t>9/27/2026</a:t>
             </a:fld>
             <a:endParaRPr lang="en-US"/>
           </a:p>
@@ -2473,7 +2557,7 @@
           <a:p>
             <a:fld id="{C1FF6DA9-008F-8B48-92A6-B652298478BF}" type="slidenum">
               <a:rPr lang="en-US" smtClean="0"/>
-              <a:t>‹N°›</a:t>
+              <a:t>‹#›</a:t>
             </a:fld>
             <a:endParaRPr lang="en-US"/>
           </a:p>
@@ -2676,7 +2760,7 @@
           <a:p>
             <a:fld id="{5BCAD085-E8A6-8845-BD4E-CB4CCA059FC4}" type="datetimeFigureOut">
               <a:rPr lang="en-US" smtClean="0"/>
-              <a:t>9/16/2026</a:t>
+              <a:t>9/27/2026</a:t>
             </a:fld>
             <a:endParaRPr lang="en-US"/>
           </a:p>
@@ -2718,7 +2802,7 @@
           <a:p>
             <a:fld id="{C1FF6DA9-008F-8B48-92A6-B652298478BF}" type="slidenum">
               <a:rPr lang="en-US" smtClean="0"/>
-              <a:t>‹N°›</a:t>
+              <a:t>‹#›</a:t>
             </a:fld>
             <a:endParaRPr lang="en-US"/>
           </a:p>
@@ -2961,7 +3045,7 @@
           <a:p>
             <a:fld id="{5BCAD085-E8A6-8845-BD4E-CB4CCA059FC4}" type="datetimeFigureOut">
               <a:rPr lang="en-US" smtClean="0"/>
-              <a:t>9/16/2026</a:t>
+              <a:t>9/27/2026</a:t>
             </a:fld>
             <a:endParaRPr lang="en-US"/>
           </a:p>
@@ -3003,7 +3087,7 @@
           <a:p>
             <a:fld id="{C1FF6DA9-008F-8B48-92A6-B652298478BF}" type="slidenum">
               <a:rPr lang="en-US" smtClean="0"/>
-              <a:t>‹N°›</a:t>
+              <a:t>‹#›</a:t>
             </a:fld>
             <a:endParaRPr lang="en-US"/>
           </a:p>
@@ -3380,7 +3464,7 @@
           <a:p>
             <a:fld id="{5BCAD085-E8A6-8845-BD4E-CB4CCA059FC4}" type="datetimeFigureOut">
               <a:rPr lang="en-US" smtClean="0"/>
-              <a:t>9/16/2026</a:t>
+              <a:t>9/27/2026</a:t>
             </a:fld>
             <a:endParaRPr lang="en-US"/>
           </a:p>
@@ -3422,7 +3506,7 @@
           <a:p>
             <a:fld id="{C1FF6DA9-008F-8B48-92A6-B652298478BF}" type="slidenum">
               <a:rPr lang="en-US" smtClean="0"/>
-              <a:t>‹N°›</a:t>
+              <a:t>‹#›</a:t>
             </a:fld>
             <a:endParaRPr lang="en-US"/>
           </a:p>
@@ -3497,7 +3581,7 @@
           <a:p>
             <a:fld id="{5BCAD085-E8A6-8845-BD4E-CB4CCA059FC4}" type="datetimeFigureOut">
               <a:rPr lang="en-US" smtClean="0"/>
-              <a:t>9/16/2026</a:t>
+              <a:t>9/27/2026</a:t>
             </a:fld>
             <a:endParaRPr lang="en-US"/>
           </a:p>
@@ -3539,7 +3623,7 @@
           <a:p>
             <a:fld id="{C1FF6DA9-008F-8B48-92A6-B652298478BF}" type="slidenum">
               <a:rPr lang="en-US" smtClean="0"/>
-              <a:t>‹N°›</a:t>
+              <a:t>‹#›</a:t>
             </a:fld>
             <a:endParaRPr lang="en-US"/>
           </a:p>
@@ -3592,7 +3676,7 @@
           <a:p>
             <a:fld id="{5BCAD085-E8A6-8845-BD4E-CB4CCA059FC4}" type="datetimeFigureOut">
               <a:rPr lang="en-US" smtClean="0"/>
-              <a:t>9/16/2026</a:t>
+              <a:t>9/27/2026</a:t>
             </a:fld>
             <a:endParaRPr lang="en-US"/>
           </a:p>
@@ -3634,7 +3718,7 @@
           <a:p>
             <a:fld id="{C1FF6DA9-008F-8B48-92A6-B652298478BF}" type="slidenum">
               <a:rPr lang="en-US" smtClean="0"/>
-              <a:t>‹N°›</a:t>
+              <a:t>‹#›</a:t>
             </a:fld>
             <a:endParaRPr lang="en-US"/>
           </a:p>
@@ -3867,7 +3951,7 @@
           <a:p>
             <a:fld id="{5BCAD085-E8A6-8845-BD4E-CB4CCA059FC4}" type="datetimeFigureOut">
               <a:rPr lang="en-US" smtClean="0"/>
-              <a:t>9/16/2026</a:t>
+              <a:t>9/27/2026</a:t>
             </a:fld>
             <a:endParaRPr lang="en-US"/>
           </a:p>
@@ -3909,7 +3993,7 @@
           <a:p>
             <a:fld id="{C1FF6DA9-008F-8B48-92A6-B652298478BF}" type="slidenum">
               <a:rPr lang="en-US" smtClean="0"/>
-              <a:t>‹N°›</a:t>
+              <a:t>‹#›</a:t>
             </a:fld>
             <a:endParaRPr lang="en-US"/>
           </a:p>
@@ -4119,7 +4203,7 @@
           <a:p>
             <a:fld id="{5BCAD085-E8A6-8845-BD4E-CB4CCA059FC4}" type="datetimeFigureOut">
               <a:rPr lang="en-US" smtClean="0"/>
-              <a:t>9/16/2026</a:t>
+              <a:t>9/27/2026</a:t>
             </a:fld>
             <a:endParaRPr lang="en-US"/>
           </a:p>
@@ -4161,7 +4245,7 @@
           <a:p>
             <a:fld id="{C1FF6DA9-008F-8B48-92A6-B652298478BF}" type="slidenum">
               <a:rPr lang="en-US" smtClean="0"/>
-              <a:t>‹N°›</a:t>
+              <a:t>‹#›</a:t>
             </a:fld>
             <a:endParaRPr lang="en-US"/>
           </a:p>
@@ -4330,7 +4414,7 @@
           <a:p>
             <a:fld id="{5BCAD085-E8A6-8845-BD4E-CB4CCA059FC4}" type="datetimeFigureOut">
               <a:rPr lang="en-US" smtClean="0"/>
-              <a:t>9/16/2026</a:t>
+              <a:t>9/27/2026</a:t>
             </a:fld>
             <a:endParaRPr lang="en-US"/>
           </a:p>
@@ -4408,7 +4492,7 @@
           <a:p>
             <a:fld id="{C1FF6DA9-008F-8B48-92A6-B652298478BF}" type="slidenum">
               <a:rPr lang="en-US" smtClean="0"/>
-              <a:t>‹N°›</a:t>
+              <a:t>‹#›</a:t>
             </a:fld>
             <a:endParaRPr lang="en-US"/>
           </a:p>
@@ -6516,182 +6600,195 @@
                 <a:latin typeface="Consolas"/>
                 <a:cs typeface="Consolas"/>
               </a:rPr>
-              <a:t xml:space="preserve">app/</a:t>
-            </a:r>
+              <a:t>app/</a:t>
+            </a:r>
+          </a:p>
+          <a:p>
+            <a:pPr>
+              <a:lnSpc>
+                <a:spcPct val="140000"/>
+              </a:lnSpc>
+              <a:spcBef>
+                <a:spcPts val="0"/>
+              </a:spcBef>
+              <a:spcAft>
+                <a:spcPts val="0"/>
+              </a:spcAft>
+            </a:pPr>
             <a:r>
               <a:rPr lang="fr-FR" sz="1050" b="0" i="0">
                 <a:solidFill>
-                  <a:srgbClr val="56616A"/>
+                  <a:srgbClr val="13171B"/>
                 </a:solidFill>
                 <a:latin typeface="Consolas"/>
                 <a:cs typeface="Consolas"/>
               </a:rPr>
-              <a:t xml:space="preserve"/>
-            </a:r>
-          </a:p>
-          <a:p>
-            <a:pPr>
-              <a:lnSpc>
-                <a:spcPct val="140000"/>
-              </a:lnSpc>
-              <a:spcBef>
-                <a:spcPts val="0"/>
-              </a:spcBef>
-              <a:spcAft>
-                <a:spcPts val="0"/>
-              </a:spcAft>
-            </a:pPr>
+              <a:t>├── __init__.py      </a:t>
+            </a:r>
             <a:r>
               <a:rPr lang="fr-FR" sz="1050" b="0" i="0">
                 <a:solidFill>
-                  <a:srgbClr val="13171B"/>
+                  <a:srgbClr val="56616A"/>
                 </a:solidFill>
                 <a:latin typeface="Consolas"/>
                 <a:cs typeface="Consolas"/>
               </a:rPr>
-              <a:t xml:space="preserve">├── __init__.py      </a:t>
-            </a:r>
+              <a:t>create_app(), /health</a:t>
+            </a:r>
+          </a:p>
+          <a:p>
+            <a:pPr>
+              <a:lnSpc>
+                <a:spcPct val="140000"/>
+              </a:lnSpc>
+              <a:spcBef>
+                <a:spcPts val="0"/>
+              </a:spcBef>
+              <a:spcAft>
+                <a:spcPts val="0"/>
+              </a:spcAft>
+            </a:pPr>
             <a:r>
               <a:rPr lang="fr-FR" sz="1050" b="0" i="0">
                 <a:solidFill>
-                  <a:srgbClr val="56616A"/>
+                  <a:srgbClr val="13171B"/>
                 </a:solidFill>
                 <a:latin typeface="Consolas"/>
                 <a:cs typeface="Consolas"/>
               </a:rPr>
-              <a:t xml:space="preserve">create_app(), /health</a:t>
-            </a:r>
-          </a:p>
-          <a:p>
-            <a:pPr>
-              <a:lnSpc>
-                <a:spcPct val="140000"/>
-              </a:lnSpc>
-              <a:spcBef>
-                <a:spcPts val="0"/>
-              </a:spcBef>
-              <a:spcAft>
-                <a:spcPts val="0"/>
-              </a:spcAft>
-            </a:pPr>
+              <a:t>├── config.py        </a:t>
+            </a:r>
             <a:r>
               <a:rPr lang="fr-FR" sz="1050" b="0" i="0">
                 <a:solidFill>
-                  <a:srgbClr val="13171B"/>
+                  <a:srgbClr val="56616A"/>
                 </a:solidFill>
                 <a:latin typeface="Consolas"/>
                 <a:cs typeface="Consolas"/>
               </a:rPr>
-              <a:t xml:space="preserve">├── config.py        </a:t>
-            </a:r>
+              <a:t>configuration</a:t>
+            </a:r>
+          </a:p>
+          <a:p>
+            <a:pPr>
+              <a:lnSpc>
+                <a:spcPct val="140000"/>
+              </a:lnSpc>
+              <a:spcBef>
+                <a:spcPts val="0"/>
+              </a:spcBef>
+              <a:spcAft>
+                <a:spcPts val="0"/>
+              </a:spcAft>
+            </a:pPr>
             <a:r>
               <a:rPr lang="fr-FR" sz="1050" b="0" i="0">
                 <a:solidFill>
-                  <a:srgbClr val="56616A"/>
+                  <a:srgbClr val="13171B"/>
                 </a:solidFill>
                 <a:latin typeface="Consolas"/>
                 <a:cs typeface="Consolas"/>
               </a:rPr>
-              <a:t xml:space="preserve">configuration</a:t>
-            </a:r>
-          </a:p>
-          <a:p>
-            <a:pPr>
-              <a:lnSpc>
-                <a:spcPct val="140000"/>
-              </a:lnSpc>
-              <a:spcBef>
-                <a:spcPts val="0"/>
-              </a:spcBef>
-              <a:spcAft>
-                <a:spcPts val="0"/>
-              </a:spcAft>
-            </a:pPr>
+              <a:t>├── cli.py           </a:t>
+            </a:r>
             <a:r>
               <a:rPr lang="fr-FR" sz="1050" b="0" i="0">
                 <a:solidFill>
-                  <a:srgbClr val="13171B"/>
+                  <a:srgbClr val="56616A"/>
                 </a:solidFill>
                 <a:latin typeface="Consolas"/>
                 <a:cs typeface="Consolas"/>
               </a:rPr>
-              <a:t xml:space="preserve">├── cli.py           </a:t>
-            </a:r>
+              <a:t>flask seed</a:t>
+            </a:r>
+          </a:p>
+          <a:p>
+            <a:pPr>
+              <a:lnSpc>
+                <a:spcPct val="140000"/>
+              </a:lnSpc>
+              <a:spcBef>
+                <a:spcPts val="0"/>
+              </a:spcBef>
+              <a:spcAft>
+                <a:spcPts val="0"/>
+              </a:spcAft>
+            </a:pPr>
             <a:r>
               <a:rPr lang="fr-FR" sz="1050" b="0" i="0">
                 <a:solidFill>
-                  <a:srgbClr val="56616A"/>
+                  <a:srgbClr val="13171B"/>
                 </a:solidFill>
                 <a:latin typeface="Consolas"/>
                 <a:cs typeface="Consolas"/>
               </a:rPr>
-              <a:t xml:space="preserve">flask seed</a:t>
-            </a:r>
-          </a:p>
-          <a:p>
-            <a:pPr>
-              <a:lnSpc>
-                <a:spcPct val="140000"/>
-              </a:lnSpc>
-              <a:spcBef>
-                <a:spcPts val="0"/>
-              </a:spcBef>
-              <a:spcAft>
-                <a:spcPts val="0"/>
-              </a:spcAft>
-            </a:pPr>
+              <a:t>├── models/          </a:t>
+            </a:r>
             <a:r>
               <a:rPr lang="fr-FR" sz="1050" b="0" i="0">
                 <a:solidFill>
-                  <a:srgbClr val="13171B"/>
+                  <a:srgbClr val="56616A"/>
                 </a:solidFill>
                 <a:latin typeface="Consolas"/>
                 <a:cs typeface="Consolas"/>
               </a:rPr>
-              <a:t xml:space="preserve">├── models/          </a:t>
-            </a:r>
+              <a:t>5 modèles SQLAlchemy</a:t>
+            </a:r>
+          </a:p>
+          <a:p>
+            <a:pPr>
+              <a:lnSpc>
+                <a:spcPct val="140000"/>
+              </a:lnSpc>
+              <a:spcBef>
+                <a:spcPts val="0"/>
+              </a:spcBef>
+              <a:spcAft>
+                <a:spcPts val="0"/>
+              </a:spcAft>
+            </a:pPr>
             <a:r>
               <a:rPr lang="fr-FR" sz="1050" b="0" i="0">
                 <a:solidFill>
-                  <a:srgbClr val="56616A"/>
+                  <a:srgbClr val="13171B"/>
                 </a:solidFill>
                 <a:latin typeface="Consolas"/>
                 <a:cs typeface="Consolas"/>
               </a:rPr>
-              <a:t xml:space="preserve">5 modèles SQLAlchemy</a:t>
-            </a:r>
-          </a:p>
-          <a:p>
-            <a:pPr>
-              <a:lnSpc>
-                <a:spcPct val="140000"/>
-              </a:lnSpc>
-              <a:spcBef>
-                <a:spcPts val="0"/>
-              </a:spcBef>
-              <a:spcAft>
-                <a:spcPts val="0"/>
-              </a:spcAft>
-            </a:pPr>
+              <a:t>├── repositories.py  </a:t>
+            </a:r>
             <a:r>
               <a:rPr lang="fr-FR" sz="1050" b="0" i="0">
                 <a:solidFill>
-                  <a:srgbClr val="13171B"/>
+                  <a:srgbClr val="56616A"/>
                 </a:solidFill>
                 <a:latin typeface="Consolas"/>
                 <a:cs typeface="Consolas"/>
               </a:rPr>
-              <a:t xml:space="preserve">├── repositories.py  </a:t>
-            </a:r>
+              <a:t>tout le SQL</a:t>
+            </a:r>
+          </a:p>
+          <a:p>
+            <a:pPr>
+              <a:lnSpc>
+                <a:spcPct val="140000"/>
+              </a:lnSpc>
+              <a:spcBef>
+                <a:spcPts val="0"/>
+              </a:spcBef>
+              <a:spcAft>
+                <a:spcPts val="0"/>
+              </a:spcAft>
+            </a:pPr>
             <a:r>
               <a:rPr lang="fr-FR" sz="1050" b="0" i="0">
                 <a:solidFill>
-                  <a:srgbClr val="56616A"/>
+                  <a:srgbClr val="13171B"/>
                 </a:solidFill>
                 <a:latin typeface="Consolas"/>
                 <a:cs typeface="Consolas"/>
               </a:rPr>
-              <a:t xml:space="preserve">tout le SQL</a:t>
+              <a:t>├── routes/</a:t>
             </a:r>
           </a:p>
           <a:p>
@@ -6714,7 +6811,7 @@
                 <a:latin typeface="Consolas"/>
                 <a:cs typeface="Consolas"/>
               </a:rPr>
-              <a:t xml:space="preserve">├── routes/</a:t>
+              <a:t>│   ├── analyze.py   </a:t>
             </a:r>
             <a:r>
               <a:rPr lang="fr-FR" sz="1050" b="0" i="0">
@@ -6724,7 +6821,7 @@
                 <a:latin typeface="Consolas"/>
                 <a:cs typeface="Consolas"/>
               </a:rPr>
-              <a:t xml:space="preserve"/>
+              <a:t>analyser, enregistrer</a:t>
             </a:r>
           </a:p>
           <a:p>
@@ -6747,7 +6844,7 @@
                 <a:latin typeface="Consolas"/>
                 <a:cs typeface="Consolas"/>
               </a:rPr>
-              <a:t xml:space="preserve">│   ├── analyze.py   </a:t>
+              <a:t>│   └── admin.py     </a:t>
             </a:r>
             <a:r>
               <a:rPr lang="fr-FR" sz="1050" b="0" i="0">
@@ -6757,7 +6854,7 @@
                 <a:latin typeface="Consolas"/>
                 <a:cs typeface="Consolas"/>
               </a:rPr>
-              <a:t xml:space="preserve">analyser, enregistrer</a:t>
+              <a:t>listes de mots</a:t>
             </a:r>
           </a:p>
           <a:p>
@@ -6780,7 +6877,7 @@
                 <a:latin typeface="Consolas"/>
                 <a:cs typeface="Consolas"/>
               </a:rPr>
-              <a:t xml:space="preserve">│   └── admin.py     </a:t>
+              <a:t>├── templates/       </a:t>
             </a:r>
             <a:r>
               <a:rPr lang="fr-FR" sz="1050" b="0" i="0">
@@ -6790,7 +6887,7 @@
                 <a:latin typeface="Consolas"/>
                 <a:cs typeface="Consolas"/>
               </a:rPr>
-              <a:t xml:space="preserve">listes de mots</a:t>
+              <a:t>base, analyze/, admin/</a:t>
             </a:r>
           </a:p>
           <a:p>
@@ -6813,7 +6910,7 @@
                 <a:latin typeface="Consolas"/>
                 <a:cs typeface="Consolas"/>
               </a:rPr>
-              <a:t xml:space="preserve">├── templates/       </a:t>
+              <a:t>├── static/          </a:t>
             </a:r>
             <a:r>
               <a:rPr lang="fr-FR" sz="1050" b="0" i="0">
@@ -6823,7 +6920,7 @@
                 <a:latin typeface="Consolas"/>
                 <a:cs typeface="Consolas"/>
               </a:rPr>
-              <a:t xml:space="preserve">base, analyze/, admin/</a:t>
+              <a:t>style.css, app.js</a:t>
             </a:r>
           </a:p>
           <a:p>
@@ -6846,7 +6943,7 @@
                 <a:latin typeface="Consolas"/>
                 <a:cs typeface="Consolas"/>
               </a:rPr>
-              <a:t xml:space="preserve">├── static/          </a:t>
+              <a:t>└── services/        </a:t>
             </a:r>
             <a:r>
               <a:rPr lang="fr-FR" sz="1050" b="0" i="0">
@@ -6856,40 +6953,7 @@
                 <a:latin typeface="Consolas"/>
                 <a:cs typeface="Consolas"/>
               </a:rPr>
-              <a:t xml:space="preserve">style.css, app.js</a:t>
-            </a:r>
-          </a:p>
-          <a:p>
-            <a:pPr>
-              <a:lnSpc>
-                <a:spcPct val="140000"/>
-              </a:lnSpc>
-              <a:spcBef>
-                <a:spcPts val="0"/>
-              </a:spcBef>
-              <a:spcAft>
-                <a:spcPts val="0"/>
-              </a:spcAft>
-            </a:pPr>
-            <a:r>
-              <a:rPr lang="fr-FR" sz="1050" b="0" i="0">
-                <a:solidFill>
-                  <a:srgbClr val="13171B"/>
-                </a:solidFill>
-                <a:latin typeface="Consolas"/>
-                <a:cs typeface="Consolas"/>
-              </a:rPr>
-              <a:t xml:space="preserve">└── services/        </a:t>
-            </a:r>
-            <a:r>
-              <a:rPr lang="fr-FR" sz="1050" b="0" i="0">
-                <a:solidFill>
-                  <a:srgbClr val="56616A"/>
-                </a:solidFill>
-                <a:latin typeface="Consolas"/>
-                <a:cs typeface="Consolas"/>
-              </a:rPr>
-              <a:t xml:space="preserve">→</a:t>
+              <a:t>→</a:t>
             </a:r>
           </a:p>
         </p:txBody>
@@ -6980,7 +7044,7 @@
                 <a:latin typeface="Segoe UI"/>
                 <a:cs typeface="Segoe UI"/>
               </a:rPr>
-              <a:t xml:space="preserve">Deux registres, un seul motif</a:t>
+              <a:t>Deux registres, un seul motif</a:t>
             </a:r>
           </a:p>
           <a:p>
@@ -7003,7 +7067,7 @@
                 <a:latin typeface="Segoe UI"/>
                 <a:cs typeface="Segoe UI"/>
               </a:rPr>
-              <a:t xml:space="preserve">REGLES pour les règles, REGISTRE pour les formats : ajouter = une ligne.</a:t>
+              <a:t>REGLES pour les règles, REGISTRE pour les formats : ajouter = une ligne.</a:t>
             </a:r>
           </a:p>
         </p:txBody>
@@ -7094,7 +7158,7 @@
                 <a:latin typeface="Segoe UI"/>
                 <a:cs typeface="Segoe UI"/>
               </a:rPr>
-              <a:t xml:space="preserve">Le tri se fait à l’exécution</a:t>
+              <a:t>Le tri se fait à l’exécution</a:t>
             </a:r>
           </a:p>
           <a:p>
@@ -7117,7 +7181,7 @@
                 <a:latin typeface="Segoe UI"/>
                 <a:cs typeface="Segoe UI"/>
               </a:rPr>
-              <a:t xml:space="preserve">Chaque règle dit si elle s’applique à la langue ; run() trie les signalements.</a:t>
+              <a:t>Chaque règle dit si elle s’applique à la langue ; run() trie les signalements.</a:t>
             </a:r>
           </a:p>
         </p:txBody>
@@ -7184,7 +7248,7 @@
           <a:noFill/>
         </p:spPr>
         <p:txBody>
-          <a:bodyPr wrap="square" lIns="0" rIns="0" tIns="0" bIns="0">
+          <a:bodyPr wrap="square" lIns="0" tIns="0" rIns="0" bIns="0">
             <a:spAutoFit/>
           </a:bodyPr>
           <a:lstStyle/>
@@ -7208,17 +7272,30 @@
                 <a:latin typeface="Consolas"/>
                 <a:cs typeface="Consolas"/>
               </a:rPr>
-              <a:t xml:space="preserve">services/</a:t>
-            </a:r>
+              <a:t>services/</a:t>
+            </a:r>
+          </a:p>
+          <a:p>
+            <a:pPr>
+              <a:lnSpc>
+                <a:spcPct val="140000"/>
+              </a:lnSpc>
+              <a:spcBef>
+                <a:spcPts val="0"/>
+              </a:spcBef>
+              <a:spcAft>
+                <a:spcPts val="0"/>
+              </a:spcAft>
+            </a:pPr>
             <a:r>
               <a:rPr lang="fr-FR" sz="1050" b="0" i="0">
                 <a:solidFill>
-                  <a:srgbClr val="56616A"/>
+                  <a:srgbClr val="13171B"/>
                 </a:solidFill>
                 <a:latin typeface="Consolas"/>
                 <a:cs typeface="Consolas"/>
               </a:rPr>
-              <a:t xml:space="preserve"/>
+              <a:t>├── ingestion/</a:t>
             </a:r>
           </a:p>
           <a:p>
@@ -7241,7 +7318,7 @@
                 <a:latin typeface="Consolas"/>
                 <a:cs typeface="Consolas"/>
               </a:rPr>
-              <a:t xml:space="preserve">├── ingestion/</a:t>
+              <a:t>│   ├── normalization.py  </a:t>
             </a:r>
             <a:r>
               <a:rPr lang="fr-FR" sz="1050" b="0" i="0">
@@ -7251,7 +7328,7 @@
                 <a:latin typeface="Consolas"/>
                 <a:cs typeface="Consolas"/>
               </a:rPr>
-              <a:t xml:space="preserve"/>
+              <a:t>Unicode, espaces</a:t>
             </a:r>
           </a:p>
           <a:p>
@@ -7274,7 +7351,7 @@
                 <a:latin typeface="Consolas"/>
                 <a:cs typeface="Consolas"/>
               </a:rPr>
-              <a:t xml:space="preserve">│   ├── normalization.py  </a:t>
+              <a:t>│   ├── segmentation.py   </a:t>
             </a:r>
             <a:r>
               <a:rPr lang="fr-FR" sz="1050" b="0" i="0">
@@ -7284,7 +7361,7 @@
                 <a:latin typeface="Consolas"/>
                 <a:cs typeface="Consolas"/>
               </a:rPr>
-              <a:t xml:space="preserve">Unicode, espaces</a:t>
+              <a:t>paragraphes, phrases</a:t>
             </a:r>
           </a:p>
           <a:p>
@@ -7307,7 +7384,7 @@
                 <a:latin typeface="Consolas"/>
                 <a:cs typeface="Consolas"/>
               </a:rPr>
-              <a:t xml:space="preserve">│   ├── segmentation.py   </a:t>
+              <a:t>│   ├── tokenization.py   </a:t>
             </a:r>
             <a:r>
               <a:rPr lang="fr-FR" sz="1050" b="0" i="0">
@@ -7317,7 +7394,7 @@
                 <a:latin typeface="Consolas"/>
                 <a:cs typeface="Consolas"/>
               </a:rPr>
-              <a:t xml:space="preserve">paragraphes, phrases</a:t>
+              <a:t>mots + positions</a:t>
             </a:r>
           </a:p>
           <a:p>
@@ -7340,7 +7417,7 @@
                 <a:latin typeface="Consolas"/>
                 <a:cs typeface="Consolas"/>
               </a:rPr>
-              <a:t xml:space="preserve">│   ├── tokenization.py   </a:t>
+              <a:t>│   ├── linguistics.py    </a:t>
             </a:r>
             <a:r>
               <a:rPr lang="fr-FR" sz="1050" b="0" i="0">
@@ -7350,7 +7427,7 @@
                 <a:latin typeface="Consolas"/>
                 <a:cs typeface="Consolas"/>
               </a:rPr>
-              <a:t xml:space="preserve">mots + positions</a:t>
+              <a:t>seul import de spaCy</a:t>
             </a:r>
           </a:p>
           <a:p>
@@ -7373,7 +7450,7 @@
                 <a:latin typeface="Consolas"/>
                 <a:cs typeface="Consolas"/>
               </a:rPr>
-              <a:t xml:space="preserve">│   ├── linguistics.py    </a:t>
+              <a:t>│   └── document.py       </a:t>
             </a:r>
             <a:r>
               <a:rPr lang="fr-FR" sz="1050" b="0" i="0">
@@ -7383,7 +7460,7 @@
                 <a:latin typeface="Consolas"/>
                 <a:cs typeface="Consolas"/>
               </a:rPr>
-              <a:t xml:space="preserve">seul import de spaCy</a:t>
+              <a:t>build_document()</a:t>
             </a:r>
           </a:p>
           <a:p>
@@ -7406,7 +7483,7 @@
                 <a:latin typeface="Consolas"/>
                 <a:cs typeface="Consolas"/>
               </a:rPr>
-              <a:t xml:space="preserve">│   └── document.py       </a:t>
+              <a:t>├── rendering.py          </a:t>
             </a:r>
             <a:r>
               <a:rPr lang="fr-FR" sz="1050" b="0" i="0">
@@ -7416,7 +7493,7 @@
                 <a:latin typeface="Consolas"/>
                 <a:cs typeface="Consolas"/>
               </a:rPr>
-              <a:t xml:space="preserve">build_document()</a:t>
+              <a:t>échapper, surligner</a:t>
             </a:r>
           </a:p>
           <a:p>
@@ -7439,83 +7516,96 @@
                 <a:latin typeface="Consolas"/>
                 <a:cs typeface="Consolas"/>
               </a:rPr>
-              <a:t xml:space="preserve">├── rendering.py          </a:t>
-            </a:r>
+              <a:t>├── extraction/</a:t>
+            </a:r>
+          </a:p>
+          <a:p>
+            <a:pPr>
+              <a:lnSpc>
+                <a:spcPct val="140000"/>
+              </a:lnSpc>
+              <a:spcBef>
+                <a:spcPts val="0"/>
+              </a:spcBef>
+              <a:spcAft>
+                <a:spcPts val="0"/>
+              </a:spcAft>
+            </a:pPr>
             <a:r>
               <a:rPr lang="fr-FR" sz="1050" b="0" i="0">
                 <a:solidFill>
-                  <a:srgbClr val="56616A"/>
+                  <a:srgbClr val="13171B"/>
                 </a:solidFill>
                 <a:latin typeface="Consolas"/>
                 <a:cs typeface="Consolas"/>
               </a:rPr>
-              <a:t xml:space="preserve">échapper, surligner</a:t>
-            </a:r>
-          </a:p>
-          <a:p>
-            <a:pPr>
-              <a:lnSpc>
-                <a:spcPct val="140000"/>
-              </a:lnSpc>
-              <a:spcBef>
-                <a:spcPts val="0"/>
-              </a:spcBef>
-              <a:spcAft>
-                <a:spcPts val="0"/>
-              </a:spcAft>
-            </a:pPr>
+              <a:t>│   ├── base.py           </a:t>
+            </a:r>
             <a:r>
               <a:rPr lang="fr-FR" sz="1050" b="0" i="0">
                 <a:solidFill>
-                  <a:srgbClr val="13171B"/>
+                  <a:srgbClr val="56616A"/>
                 </a:solidFill>
                 <a:latin typeface="Consolas"/>
                 <a:cs typeface="Consolas"/>
               </a:rPr>
-              <a:t xml:space="preserve">├── extraction/</a:t>
-            </a:r>
+              <a:t>contrat, erreurs</a:t>
+            </a:r>
+          </a:p>
+          <a:p>
+            <a:pPr>
+              <a:lnSpc>
+                <a:spcPct val="140000"/>
+              </a:lnSpc>
+              <a:spcBef>
+                <a:spcPts val="0"/>
+              </a:spcBef>
+              <a:spcAft>
+                <a:spcPts val="0"/>
+              </a:spcAft>
+            </a:pPr>
             <a:r>
               <a:rPr lang="fr-FR" sz="1050" b="0" i="0">
                 <a:solidFill>
-                  <a:srgbClr val="56616A"/>
+                  <a:srgbClr val="13171B"/>
                 </a:solidFill>
                 <a:latin typeface="Consolas"/>
                 <a:cs typeface="Consolas"/>
               </a:rPr>
-              <a:t xml:space="preserve"/>
-            </a:r>
-          </a:p>
-          <a:p>
-            <a:pPr>
-              <a:lnSpc>
-                <a:spcPct val="140000"/>
-              </a:lnSpc>
-              <a:spcBef>
-                <a:spcPts val="0"/>
-              </a:spcBef>
-              <a:spcAft>
-                <a:spcPts val="0"/>
-              </a:spcAft>
-            </a:pPr>
+              <a:t>│   ├── registry.py       </a:t>
+            </a:r>
             <a:r>
               <a:rPr lang="fr-FR" sz="1050" b="0" i="0">
                 <a:solidFill>
-                  <a:srgbClr val="13171B"/>
+                  <a:srgbClr val="56616A"/>
                 </a:solidFill>
                 <a:latin typeface="Consolas"/>
                 <a:cs typeface="Consolas"/>
               </a:rPr>
-              <a:t xml:space="preserve">│   ├── base.py           </a:t>
-            </a:r>
+              <a:t>REGISTRE, extraire()</a:t>
+            </a:r>
+          </a:p>
+          <a:p>
+            <a:pPr>
+              <a:lnSpc>
+                <a:spcPct val="140000"/>
+              </a:lnSpc>
+              <a:spcBef>
+                <a:spcPts val="0"/>
+              </a:spcBef>
+              <a:spcAft>
+                <a:spcPts val="0"/>
+              </a:spcAft>
+            </a:pPr>
             <a:r>
               <a:rPr lang="fr-FR" sz="1050" b="0" i="0">
                 <a:solidFill>
-                  <a:srgbClr val="56616A"/>
+                  <a:srgbClr val="13171B"/>
                 </a:solidFill>
                 <a:latin typeface="Consolas"/>
                 <a:cs typeface="Consolas"/>
               </a:rPr>
-              <a:t xml:space="preserve">contrat, erreurs</a:t>
+              <a:t>│   └── txt · md · docx · odt</a:t>
             </a:r>
           </a:p>
           <a:p>
@@ -7538,281 +7628,205 @@
                 <a:latin typeface="Consolas"/>
                 <a:cs typeface="Consolas"/>
               </a:rPr>
-              <a:t xml:space="preserve">│   ├── registry.py       </a:t>
-            </a:r>
+              <a:t>└── rules/</a:t>
+            </a:r>
+          </a:p>
+          <a:p>
+            <a:pPr>
+              <a:lnSpc>
+                <a:spcPct val="140000"/>
+              </a:lnSpc>
+              <a:spcBef>
+                <a:spcPts val="0"/>
+              </a:spcBef>
+              <a:spcAft>
+                <a:spcPts val="0"/>
+              </a:spcAft>
+            </a:pPr>
             <a:r>
               <a:rPr lang="fr-FR" sz="1050" b="0" i="0">
                 <a:solidFill>
-                  <a:srgbClr val="56616A"/>
+                  <a:srgbClr val="13171B"/>
                 </a:solidFill>
                 <a:latin typeface="Consolas"/>
                 <a:cs typeface="Consolas"/>
               </a:rPr>
-              <a:t xml:space="preserve">REGISTRE, extraire()</a:t>
-            </a:r>
-          </a:p>
-          <a:p>
-            <a:pPr>
-              <a:lnSpc>
-                <a:spcPct val="140000"/>
-              </a:lnSpc>
-              <a:spcBef>
-                <a:spcPts val="0"/>
-              </a:spcBef>
-              <a:spcAft>
-                <a:spcPts val="0"/>
-              </a:spcAft>
-            </a:pPr>
+              <a:t>    ├── base.py           </a:t>
+            </a:r>
             <a:r>
               <a:rPr lang="fr-FR" sz="1050" b="0" i="0">
                 <a:solidFill>
-                  <a:srgbClr val="13171B"/>
+                  <a:srgbClr val="56616A"/>
                 </a:solidFill>
                 <a:latin typeface="Consolas"/>
                 <a:cs typeface="Consolas"/>
               </a:rPr>
-              <a:t xml:space="preserve">│   └── txt · md · docx · odt</a:t>
-            </a:r>
+              <a:t>Finding, Rule</a:t>
+            </a:r>
+          </a:p>
+          <a:p>
+            <a:pPr>
+              <a:lnSpc>
+                <a:spcPct val="140000"/>
+              </a:lnSpc>
+              <a:spcBef>
+                <a:spcPts val="0"/>
+              </a:spcBef>
+              <a:spcAft>
+                <a:spcPts val="0"/>
+              </a:spcAft>
+            </a:pPr>
             <a:r>
               <a:rPr lang="fr-FR" sz="1050" b="0" i="0">
                 <a:solidFill>
-                  <a:srgbClr val="56616A"/>
+                  <a:srgbClr val="13171B"/>
                 </a:solidFill>
                 <a:latin typeface="Consolas"/>
                 <a:cs typeface="Consolas"/>
               </a:rPr>
-              <a:t xml:space="preserve"/>
-            </a:r>
-          </a:p>
-          <a:p>
-            <a:pPr>
-              <a:lnSpc>
-                <a:spcPct val="140000"/>
-              </a:lnSpc>
-              <a:spcBef>
-                <a:spcPts val="0"/>
-              </a:spcBef>
-              <a:spcAft>
-                <a:spcPts val="0"/>
-              </a:spcAft>
-            </a:pPr>
+              <a:t>    ├── runner.py         </a:t>
+            </a:r>
             <a:r>
               <a:rPr lang="fr-FR" sz="1050" b="0" i="0">
                 <a:solidFill>
-                  <a:srgbClr val="13171B"/>
+                  <a:srgbClr val="56616A"/>
                 </a:solidFill>
                 <a:latin typeface="Consolas"/>
                 <a:cs typeface="Consolas"/>
               </a:rPr>
-              <a:t xml:space="preserve">└── rules/</a:t>
-            </a:r>
+              <a:t>REGLES, run()</a:t>
+            </a:r>
+          </a:p>
+          <a:p>
+            <a:pPr>
+              <a:lnSpc>
+                <a:spcPct val="140000"/>
+              </a:lnSpc>
+              <a:spcBef>
+                <a:spcPts val="0"/>
+              </a:spcBef>
+              <a:spcAft>
+                <a:spcPts val="0"/>
+              </a:spcAft>
+            </a:pPr>
             <a:r>
               <a:rPr lang="fr-FR" sz="1050" b="0" i="0">
                 <a:solidFill>
-                  <a:srgbClr val="56616A"/>
+                  <a:srgbClr val="13171B"/>
                 </a:solidFill>
                 <a:latin typeface="Consolas"/>
                 <a:cs typeface="Consolas"/>
               </a:rPr>
-              <a:t xml:space="preserve"/>
-            </a:r>
-          </a:p>
-          <a:p>
-            <a:pPr>
-              <a:lnSpc>
-                <a:spcPct val="140000"/>
-              </a:lnSpc>
-              <a:spcBef>
-                <a:spcPts val="0"/>
-              </a:spcBef>
-              <a:spcAft>
-                <a:spcPts val="0"/>
-              </a:spcAft>
-            </a:pPr>
+              <a:t>    ├── seuils.py         </a:t>
+            </a:r>
             <a:r>
               <a:rPr lang="fr-FR" sz="1050" b="0" i="0">
                 <a:solidFill>
-                  <a:srgbClr val="13171B"/>
+                  <a:srgbClr val="56616A"/>
                 </a:solidFill>
                 <a:latin typeface="Consolas"/>
                 <a:cs typeface="Consolas"/>
               </a:rPr>
-              <a:t xml:space="preserve">    ├── base.py           </a:t>
-            </a:r>
+              <a:t>seuils par langue</a:t>
+            </a:r>
+          </a:p>
+          <a:p>
+            <a:pPr>
+              <a:lnSpc>
+                <a:spcPct val="140000"/>
+              </a:lnSpc>
+              <a:spcBef>
+                <a:spcPts val="0"/>
+              </a:spcBef>
+              <a:spcAft>
+                <a:spcPts val="0"/>
+              </a:spcAft>
+            </a:pPr>
             <a:r>
               <a:rPr lang="fr-FR" sz="1050" b="0" i="0">
                 <a:solidFill>
-                  <a:srgbClr val="56616A"/>
+                  <a:srgbClr val="13171B"/>
                 </a:solidFill>
                 <a:latin typeface="Consolas"/>
                 <a:cs typeface="Consolas"/>
               </a:rPr>
-              <a:t xml:space="preserve">Finding, Rule</a:t>
-            </a:r>
-          </a:p>
-          <a:p>
-            <a:pPr>
-              <a:lnSpc>
-                <a:spcPct val="140000"/>
-              </a:lnSpc>
-              <a:spcBef>
-                <a:spcPts val="0"/>
-              </a:spcBef>
-              <a:spcAft>
-                <a:spcPts val="0"/>
-              </a:spcAft>
-            </a:pPr>
+              <a:t>    ├── lexiques.py       </a:t>
+            </a:r>
             <a:r>
               <a:rPr lang="fr-FR" sz="1050" b="0" i="0">
                 <a:solidFill>
-                  <a:srgbClr val="13171B"/>
+                  <a:srgbClr val="56616A"/>
                 </a:solidFill>
                 <a:latin typeface="Consolas"/>
                 <a:cs typeface="Consolas"/>
               </a:rPr>
-              <a:t xml:space="preserve">    ├── runner.py         </a:t>
-            </a:r>
+              <a:t>listes lues en base</a:t>
+            </a:r>
+          </a:p>
+          <a:p>
+            <a:pPr>
+              <a:lnSpc>
+                <a:spcPct val="140000"/>
+              </a:lnSpc>
+              <a:spcBef>
+                <a:spcPts val="0"/>
+              </a:spcBef>
+              <a:spcAft>
+                <a:spcPts val="0"/>
+              </a:spcAft>
+            </a:pPr>
             <a:r>
               <a:rPr lang="fr-FR" sz="1050" b="0" i="0">
                 <a:solidFill>
-                  <a:srgbClr val="56616A"/>
+                  <a:srgbClr val="13171B"/>
                 </a:solidFill>
                 <a:latin typeface="Consolas"/>
                 <a:cs typeface="Consolas"/>
               </a:rPr>
-              <a:t xml:space="preserve">REGLES, run()</a:t>
-            </a:r>
-          </a:p>
-          <a:p>
-            <a:pPr>
-              <a:lnSpc>
-                <a:spcPct val="140000"/>
-              </a:lnSpc>
-              <a:spcBef>
-                <a:spcPts val="0"/>
-              </a:spcBef>
-              <a:spcAft>
-                <a:spcPts val="0"/>
-              </a:spcAft>
-            </a:pPr>
+              <a:t>    ├── fr.py             </a:t>
+            </a:r>
             <a:r>
               <a:rPr lang="fr-FR" sz="1050" b="0" i="0">
                 <a:solidFill>
-                  <a:srgbClr val="13171B"/>
+                  <a:srgbClr val="56616A"/>
                 </a:solidFill>
                 <a:latin typeface="Consolas"/>
                 <a:cs typeface="Consolas"/>
               </a:rPr>
-              <a:t xml:space="preserve">    ├── seuils.py         </a:t>
-            </a:r>
+              <a:t>les trois règles</a:t>
+            </a:r>
+          </a:p>
+          <a:p>
+            <a:pPr>
+              <a:lnSpc>
+                <a:spcPct val="140000"/>
+              </a:lnSpc>
+              <a:spcBef>
+                <a:spcPts val="0"/>
+              </a:spcBef>
+              <a:spcAft>
+                <a:spcPts val="0"/>
+              </a:spcAft>
+            </a:pPr>
             <a:r>
               <a:rPr lang="fr-FR" sz="1050" b="0" i="0">
                 <a:solidFill>
-                  <a:srgbClr val="56616A"/>
+                  <a:srgbClr val="13171B"/>
                 </a:solidFill>
                 <a:latin typeface="Consolas"/>
                 <a:cs typeface="Consolas"/>
               </a:rPr>
-              <a:t xml:space="preserve">seuils par langue</a:t>
-            </a:r>
-          </a:p>
-          <a:p>
-            <a:pPr>
-              <a:lnSpc>
-                <a:spcPct val="140000"/>
-              </a:lnSpc>
-              <a:spcBef>
-                <a:spcPts val="0"/>
-              </a:spcBef>
-              <a:spcAft>
-                <a:spcPts val="0"/>
-              </a:spcAft>
-            </a:pPr>
+              <a:t>    └── en.py             </a:t>
+            </a:r>
             <a:r>
               <a:rPr lang="fr-FR" sz="1050" b="0" i="0">
                 <a:solidFill>
-                  <a:srgbClr val="13171B"/>
+                  <a:srgbClr val="56616A"/>
                 </a:solidFill>
                 <a:latin typeface="Consolas"/>
                 <a:cs typeface="Consolas"/>
               </a:rPr>
-              <a:t xml:space="preserve">    ├── lexiques.py       </a:t>
-            </a:r>
-            <a:r>
-              <a:rPr lang="fr-FR" sz="1050" b="0" i="0">
-                <a:solidFill>
-                  <a:srgbClr val="56616A"/>
-                </a:solidFill>
-                <a:latin typeface="Consolas"/>
-                <a:cs typeface="Consolas"/>
-              </a:rPr>
-              <a:t xml:space="preserve">listes lues en base</a:t>
-            </a:r>
-          </a:p>
-          <a:p>
-            <a:pPr>
-              <a:lnSpc>
-                <a:spcPct val="140000"/>
-              </a:lnSpc>
-              <a:spcBef>
-                <a:spcPts val="0"/>
-              </a:spcBef>
-              <a:spcAft>
-                <a:spcPts val="0"/>
-              </a:spcAft>
-            </a:pPr>
-            <a:r>
-              <a:rPr lang="fr-FR" sz="1050" b="0" i="0">
-                <a:solidFill>
-                  <a:srgbClr val="13171B"/>
-                </a:solidFill>
-                <a:latin typeface="Consolas"/>
-                <a:cs typeface="Consolas"/>
-              </a:rPr>
-              <a:t xml:space="preserve">    ├── fr.py             </a:t>
-            </a:r>
-            <a:r>
-              <a:rPr lang="fr-FR" sz="1050" b="0" i="0">
-                <a:solidFill>
-                  <a:srgbClr val="56616A"/>
-                </a:solidFill>
-                <a:latin typeface="Consolas"/>
-                <a:cs typeface="Consolas"/>
-              </a:rPr>
-              <a:t xml:space="preserve">les trois règles</a:t>
-            </a:r>
-          </a:p>
-          <a:p>
-            <a:pPr>
-              <a:lnSpc>
-                <a:spcPct val="140000"/>
-              </a:lnSpc>
-              <a:spcBef>
-                <a:spcPts val="0"/>
-              </a:spcBef>
-              <a:spcAft>
-                <a:spcPts val="0"/>
-              </a:spcAft>
-            </a:pPr>
-            <a:r>
-              <a:rPr lang="fr-FR" sz="1050" b="0" i="0">
-                <a:solidFill>
-                  <a:srgbClr val="13171B"/>
-                </a:solidFill>
-                <a:latin typeface="Consolas"/>
-                <a:cs typeface="Consolas"/>
-              </a:rPr>
-              <a:t xml:space="preserve">    └── en.py             </a:t>
-            </a:r>
-            <a:r>
-              <a:rPr lang="fr-FR" sz="1050" b="0" i="0">
-                <a:solidFill>
-                  <a:srgbClr val="56616A"/>
-                </a:solidFill>
-                <a:latin typeface="Consolas"/>
-                <a:cs typeface="Consolas"/>
-              </a:rPr>
-              <a:t xml:space="preserve">vide : l’anglais</a:t>
+              <a:t>vide : l’anglais</a:t>
             </a:r>
           </a:p>
         </p:txBody>
@@ -9607,6 +9621,941 @@
           </a:p>
         </p:txBody>
       </p:sp>
+      <p:graphicFrame>
+        <p:nvGraphicFramePr>
+          <p:cNvPr id="15" name="Tableau pourquoi"/>
+          <p:cNvGraphicFramePr>
+            <a:graphicFrameLocks noGrp="1"/>
+          </p:cNvGraphicFramePr>
+          <p:nvPr/>
+        </p:nvGraphicFramePr>
+        <p:xfrm>
+          <a:off x="685800" y="4230000"/>
+          <a:ext cx="7429500" cy="2120000"/>
+        </p:xfrm>
+        <a:graphic>
+          <a:graphicData uri="http://schemas.openxmlformats.org/drawingml/2006/table">
+            <a:tbl>
+              <a:tblPr firstRow="1"/>
+              <a:tblGrid>
+                <a:gridCol w="1325000">
+                  <a:extLst>
+                    <a:ext uri="{9D8B030D-6E8A-4147-A177-3AD203B41FA5}">
+                      <a16:colId xmlns:a16="http://schemas.microsoft.com/office/drawing/2014/main" val="20000"/>
+                    </a:ext>
+                  </a:extLst>
+                </a:gridCol>
+                <a:gridCol w="2290000">
+                  <a:extLst>
+                    <a:ext uri="{9D8B030D-6E8A-4147-A177-3AD203B41FA5}">
+                      <a16:colId xmlns:a16="http://schemas.microsoft.com/office/drawing/2014/main" val="20001"/>
+                    </a:ext>
+                  </a:extLst>
+                </a:gridCol>
+                <a:gridCol w="3814500">
+                  <a:extLst>
+                    <a:ext uri="{9D8B030D-6E8A-4147-A177-3AD203B41FA5}">
+                      <a16:colId xmlns:a16="http://schemas.microsoft.com/office/drawing/2014/main" val="20002"/>
+                    </a:ext>
+                  </a:extLst>
+                </a:gridCol>
+              </a:tblGrid>
+              <a:tr h="260000">
+                <a:tc>
+                  <a:txBody>
+                    <a:bodyPr/>
+                    <a:lstStyle/>
+                    <a:p>
+                      <a:r>
+                        <a:rPr lang="fr-FR" sz="975" b="1" i="0" dirty="0">
+                          <a:solidFill>
+                            <a:srgbClr val="56616A"/>
+                          </a:solidFill>
+                          <a:latin typeface="Segoe UI"/>
+                          <a:cs typeface="Segoe UI"/>
+                        </a:rPr>
+                        <a:t>TRANSFORMATION</a:t>
+                      </a:r>
+                    </a:p>
+                  </a:txBody>
+                  <a:tcPr marL="0" anchor="ctr">
+                    <a:lnL w="0">
+                      <a:noFill/>
+                    </a:lnL>
+                    <a:lnR w="0">
+                      <a:noFill/>
+                    </a:lnR>
+                    <a:lnT w="0">
+                      <a:noFill/>
+                    </a:lnT>
+                    <a:lnB w="19050">
+                      <a:solidFill>
+                        <a:srgbClr val="13171B"/>
+                      </a:solidFill>
+                    </a:lnB>
+                    <a:noFill/>
+                  </a:tcPr>
+                </a:tc>
+                <a:tc>
+                  <a:txBody>
+                    <a:bodyPr/>
+                    <a:lstStyle/>
+                    <a:p>
+                      <a:r>
+                        <a:rPr lang="fr-FR" sz="975" b="1" i="0" dirty="0">
+                          <a:solidFill>
+                            <a:srgbClr val="56616A"/>
+                          </a:solidFill>
+                          <a:latin typeface="Segoe UI"/>
+                          <a:cs typeface="Segoe UI"/>
+                        </a:rPr>
+                        <a:t>D'OÙ VIENT LE CARACTÈRE</a:t>
+                      </a:r>
+                    </a:p>
+                  </a:txBody>
+                  <a:tcPr marL="0" anchor="ctr">
+                    <a:lnL w="0">
+                      <a:noFill/>
+                    </a:lnL>
+                    <a:lnR w="0">
+                      <a:noFill/>
+                    </a:lnR>
+                    <a:lnT w="0">
+                      <a:noFill/>
+                    </a:lnT>
+                    <a:lnB w="19050">
+                      <a:solidFill>
+                        <a:srgbClr val="13171B"/>
+                      </a:solidFill>
+                    </a:lnB>
+                    <a:noFill/>
+                  </a:tcPr>
+                </a:tc>
+                <a:tc>
+                  <a:txBody>
+                    <a:bodyPr/>
+                    <a:lstStyle/>
+                    <a:p>
+                      <a:r>
+                        <a:rPr lang="fr-FR" sz="975" b="1" i="0" dirty="0">
+                          <a:solidFill>
+                            <a:srgbClr val="56616A"/>
+                          </a:solidFill>
+                          <a:latin typeface="Segoe UI"/>
+                          <a:cs typeface="Segoe UI"/>
+                        </a:rPr>
+                        <a:t>CE QU'IL CASSERAIT</a:t>
+                      </a:r>
+                    </a:p>
+                  </a:txBody>
+                  <a:tcPr marL="0" anchor="ctr">
+                    <a:lnL w="0">
+                      <a:noFill/>
+                    </a:lnL>
+                    <a:lnR w="0">
+                      <a:noFill/>
+                    </a:lnR>
+                    <a:lnT w="0">
+                      <a:noFill/>
+                    </a:lnT>
+                    <a:lnB w="19050">
+                      <a:solidFill>
+                        <a:srgbClr val="13171B"/>
+                      </a:solidFill>
+                    </a:lnB>
+                    <a:noFill/>
+                  </a:tcPr>
+                </a:tc>
+                <a:extLst>
+                  <a:ext uri="{0D108BD9-81ED-4DB2-BD59-A6C34878D82A}">
+                    <a16:rowId xmlns:a16="http://schemas.microsoft.com/office/drawing/2014/main" val="10000"/>
+                  </a:ext>
+                </a:extLst>
+              </a:tr>
+              <a:tr h="310000">
+                <a:tc>
+                  <a:txBody>
+                    <a:bodyPr/>
+                    <a:lstStyle/>
+                    <a:p>
+                      <a:r>
+                        <a:rPr lang="fr-FR" sz="1050" b="1" i="0" dirty="0">
+                          <a:solidFill>
+                            <a:srgbClr val="13171B"/>
+                          </a:solidFill>
+                          <a:latin typeface="Segoe UI"/>
+                          <a:cs typeface="Segoe UI"/>
+                        </a:rPr>
+                        <a:t>BOM</a:t>
+                      </a:r>
+                    </a:p>
+                  </a:txBody>
+                  <a:tcPr marL="0" anchor="ctr">
+                    <a:lnL w="0">
+                      <a:noFill/>
+                    </a:lnL>
+                    <a:lnR w="0">
+                      <a:noFill/>
+                    </a:lnR>
+                    <a:lnT w="19050" cap="flat" cmpd="sng" algn="ctr">
+                      <a:solidFill>
+                        <a:srgbClr val="13171B"/>
+                      </a:solidFill>
+                      <a:prstDash val="solid"/>
+                      <a:round/>
+                      <a:headEnd type="none" w="med" len="med"/>
+                      <a:tailEnd type="none" w="med" len="med"/>
+                    </a:lnT>
+                    <a:lnB w="9525">
+                      <a:solidFill>
+                        <a:srgbClr val="D5DADF"/>
+                      </a:solidFill>
+                    </a:lnB>
+                    <a:noFill/>
+                  </a:tcPr>
+                </a:tc>
+                <a:tc>
+                  <a:txBody>
+                    <a:bodyPr/>
+                    <a:lstStyle/>
+                    <a:p>
+                      <a:r>
+                        <a:rPr lang="fr-FR" sz="1050" b="0" i="0" dirty="0">
+                          <a:solidFill>
+                            <a:srgbClr val="56616A"/>
+                          </a:solidFill>
+                          <a:latin typeface="Segoe UI"/>
+                          <a:cs typeface="Segoe UI"/>
+                        </a:rPr>
+                        <a:t>un .txt UTF-8 du Bloc-notes</a:t>
+                      </a:r>
+                    </a:p>
+                  </a:txBody>
+                  <a:tcPr marL="0" anchor="ctr">
+                    <a:lnL w="0">
+                      <a:noFill/>
+                    </a:lnL>
+                    <a:lnR w="0">
+                      <a:noFill/>
+                    </a:lnR>
+                    <a:lnT w="19050" cap="flat" cmpd="sng" algn="ctr">
+                      <a:solidFill>
+                        <a:srgbClr val="13171B"/>
+                      </a:solidFill>
+                      <a:prstDash val="solid"/>
+                      <a:round/>
+                      <a:headEnd type="none" w="med" len="med"/>
+                      <a:tailEnd type="none" w="med" len="med"/>
+                    </a:lnT>
+                    <a:lnB w="9525">
+                      <a:solidFill>
+                        <a:srgbClr val="D5DADF"/>
+                      </a:solidFill>
+                    </a:lnB>
+                    <a:noFill/>
+                  </a:tcPr>
+                </a:tc>
+                <a:tc>
+                  <a:txBody>
+                    <a:bodyPr/>
+                    <a:lstStyle/>
+                    <a:p>
+                      <a:r>
+                        <a:rPr lang="fr-FR" sz="1050" b="0" i="0" dirty="0">
+                          <a:solidFill>
+                            <a:srgbClr val="56616A"/>
+                          </a:solidFill>
+                          <a:latin typeface="Segoe UI"/>
+                          <a:cs typeface="Segoe UI"/>
+                        </a:rPr>
+                        <a:t>invisible en tête : toutes les positions décalées</a:t>
+                      </a:r>
+                    </a:p>
+                  </a:txBody>
+                  <a:tcPr marL="0" anchor="ctr">
+                    <a:lnL w="0">
+                      <a:noFill/>
+                    </a:lnL>
+                    <a:lnR w="0">
+                      <a:noFill/>
+                    </a:lnR>
+                    <a:lnT w="19050" cap="flat" cmpd="sng" algn="ctr">
+                      <a:solidFill>
+                        <a:srgbClr val="13171B"/>
+                      </a:solidFill>
+                      <a:prstDash val="solid"/>
+                      <a:round/>
+                      <a:headEnd type="none" w="med" len="med"/>
+                      <a:tailEnd type="none" w="med" len="med"/>
+                    </a:lnT>
+                    <a:lnB w="9525">
+                      <a:solidFill>
+                        <a:srgbClr val="D5DADF"/>
+                      </a:solidFill>
+                    </a:lnB>
+                    <a:noFill/>
+                  </a:tcPr>
+                </a:tc>
+                <a:extLst>
+                  <a:ext uri="{0D108BD9-81ED-4DB2-BD59-A6C34878D82A}">
+                    <a16:rowId xmlns:a16="http://schemas.microsoft.com/office/drawing/2014/main" val="10001"/>
+                  </a:ext>
+                </a:extLst>
+              </a:tr>
+              <a:tr h="310000">
+                <a:tc>
+                  <a:txBody>
+                    <a:bodyPr/>
+                    <a:lstStyle/>
+                    <a:p>
+                      <a:r>
+                        <a:rPr lang="fr-FR" sz="1050" b="1" i="0" dirty="0">
+                          <a:solidFill>
+                            <a:srgbClr val="13171B"/>
+                          </a:solidFill>
+                          <a:latin typeface="Segoe UI"/>
+                          <a:cs typeface="Segoe UI"/>
+                        </a:rPr>
+                        <a:t>Fins de ligne</a:t>
+                      </a:r>
+                    </a:p>
+                  </a:txBody>
+                  <a:tcPr marL="0" anchor="ctr">
+                    <a:lnL w="0">
+                      <a:noFill/>
+                    </a:lnL>
+                    <a:lnR w="0">
+                      <a:noFill/>
+                    </a:lnR>
+                    <a:lnT w="9525" cap="flat" cmpd="sng" algn="ctr">
+                      <a:solidFill>
+                        <a:srgbClr val="D5DADF"/>
+                      </a:solidFill>
+                      <a:prstDash val="solid"/>
+                      <a:round/>
+                      <a:headEnd type="none" w="med" len="med"/>
+                      <a:tailEnd type="none" w="med" len="med"/>
+                    </a:lnT>
+                    <a:lnB w="9525">
+                      <a:solidFill>
+                        <a:srgbClr val="D5DADF"/>
+                      </a:solidFill>
+                    </a:lnB>
+                    <a:noFill/>
+                  </a:tcPr>
+                </a:tc>
+                <a:tc>
+                  <a:txBody>
+                    <a:bodyPr/>
+                    <a:lstStyle/>
+                    <a:p>
+                      <a:r>
+                        <a:rPr lang="fr-FR" sz="1050" b="0" i="0" dirty="0">
+                          <a:solidFill>
+                            <a:srgbClr val="56616A"/>
+                          </a:solidFill>
+                          <a:latin typeface="Segoe UI"/>
+                          <a:cs typeface="Segoe UI"/>
+                        </a:rPr>
+                        <a:t>fichiers Windows, navigateur</a:t>
+                      </a:r>
+                    </a:p>
+                  </a:txBody>
+                  <a:tcPr marL="0" anchor="ctr">
+                    <a:lnL w="0">
+                      <a:noFill/>
+                    </a:lnL>
+                    <a:lnR w="0">
+                      <a:noFill/>
+                    </a:lnR>
+                    <a:lnT w="9525" cap="flat" cmpd="sng" algn="ctr">
+                      <a:solidFill>
+                        <a:srgbClr val="D5DADF"/>
+                      </a:solidFill>
+                      <a:prstDash val="solid"/>
+                      <a:round/>
+                      <a:headEnd type="none" w="med" len="med"/>
+                      <a:tailEnd type="none" w="med" len="med"/>
+                    </a:lnT>
+                    <a:lnB w="9525">
+                      <a:solidFill>
+                        <a:srgbClr val="D5DADF"/>
+                      </a:solidFill>
+                    </a:lnB>
+                    <a:noFill/>
+                  </a:tcPr>
+                </a:tc>
+                <a:tc>
+                  <a:txBody>
+                    <a:bodyPr/>
+                    <a:lstStyle/>
+                    <a:p>
+                      <a:r>
+                        <a:rPr lang="fr-FR" sz="1050" b="0" i="0" dirty="0">
+                          <a:solidFill>
+                            <a:srgbClr val="56616A"/>
+                          </a:solidFill>
+                          <a:latin typeface="Segoe UI"/>
+                          <a:cs typeface="Segoe UI"/>
+                        </a:rPr>
+                        <a:t>un caractère de trop par ligne, paragraphes perdus</a:t>
+                      </a:r>
+                    </a:p>
+                  </a:txBody>
+                  <a:tcPr marL="0" anchor="ctr">
+                    <a:lnL w="0">
+                      <a:noFill/>
+                    </a:lnL>
+                    <a:lnR w="0">
+                      <a:noFill/>
+                    </a:lnR>
+                    <a:lnT w="9525" cap="flat" cmpd="sng" algn="ctr">
+                      <a:solidFill>
+                        <a:srgbClr val="D5DADF"/>
+                      </a:solidFill>
+                      <a:prstDash val="solid"/>
+                      <a:round/>
+                      <a:headEnd type="none" w="med" len="med"/>
+                      <a:tailEnd type="none" w="med" len="med"/>
+                    </a:lnT>
+                    <a:lnB w="9525">
+                      <a:solidFill>
+                        <a:srgbClr val="D5DADF"/>
+                      </a:solidFill>
+                    </a:lnB>
+                    <a:noFill/>
+                  </a:tcPr>
+                </a:tc>
+                <a:extLst>
+                  <a:ext uri="{0D108BD9-81ED-4DB2-BD59-A6C34878D82A}">
+                    <a16:rowId xmlns:a16="http://schemas.microsoft.com/office/drawing/2014/main" val="10002"/>
+                  </a:ext>
+                </a:extLst>
+              </a:tr>
+              <a:tr h="310000">
+                <a:tc>
+                  <a:txBody>
+                    <a:bodyPr/>
+                    <a:lstStyle/>
+                    <a:p>
+                      <a:r>
+                        <a:rPr lang="fr-FR" sz="1050" b="1" i="0" dirty="0">
+                          <a:solidFill>
+                            <a:srgbClr val="13171B"/>
+                          </a:solidFill>
+                          <a:latin typeface="Segoe UI"/>
+                          <a:cs typeface="Segoe UI"/>
+                        </a:rPr>
+                        <a:t>Accents (NFC)</a:t>
+                      </a:r>
+                    </a:p>
+                  </a:txBody>
+                  <a:tcPr marL="0" anchor="ctr">
+                    <a:lnL w="0">
+                      <a:noFill/>
+                    </a:lnL>
+                    <a:lnR w="0">
+                      <a:noFill/>
+                    </a:lnR>
+                    <a:lnT w="9525" cap="flat" cmpd="sng" algn="ctr">
+                      <a:solidFill>
+                        <a:srgbClr val="D5DADF"/>
+                      </a:solidFill>
+                      <a:prstDash val="solid"/>
+                      <a:round/>
+                      <a:headEnd type="none" w="med" len="med"/>
+                      <a:tailEnd type="none" w="med" len="med"/>
+                    </a:lnT>
+                    <a:lnB w="9525">
+                      <a:solidFill>
+                        <a:srgbClr val="D5DADF"/>
+                      </a:solidFill>
+                    </a:lnB>
+                    <a:noFill/>
+                  </a:tcPr>
+                </a:tc>
+                <a:tc>
+                  <a:txBody>
+                    <a:bodyPr/>
+                    <a:lstStyle/>
+                    <a:p>
+                      <a:r>
+                        <a:rPr lang="fr-FR" sz="1050" b="0" i="0" dirty="0">
+                          <a:solidFill>
+                            <a:srgbClr val="56616A"/>
+                          </a:solidFill>
+                          <a:latin typeface="Segoe UI"/>
+                          <a:cs typeface="Segoe UI"/>
+                        </a:rPr>
+                        <a:t>copie depuis un PDF ou un Mac</a:t>
+                      </a:r>
+                    </a:p>
+                  </a:txBody>
+                  <a:tcPr marL="0" anchor="ctr">
+                    <a:lnL w="0">
+                      <a:noFill/>
+                    </a:lnL>
+                    <a:lnR w="0">
+                      <a:noFill/>
+                    </a:lnR>
+                    <a:lnT w="9525" cap="flat" cmpd="sng" algn="ctr">
+                      <a:solidFill>
+                        <a:srgbClr val="D5DADF"/>
+                      </a:solidFill>
+                      <a:prstDash val="solid"/>
+                      <a:round/>
+                      <a:headEnd type="none" w="med" len="med"/>
+                      <a:tailEnd type="none" w="med" len="med"/>
+                    </a:lnT>
+                    <a:lnB w="9525">
+                      <a:solidFill>
+                        <a:srgbClr val="D5DADF"/>
+                      </a:solidFill>
+                    </a:lnB>
+                    <a:noFill/>
+                  </a:tcPr>
+                </a:tc>
+                <a:tc>
+                  <a:txBody>
+                    <a:bodyPr/>
+                    <a:lstStyle/>
+                    <a:p>
+                      <a:r>
+                        <a:rPr lang="fr-FR" sz="1050" b="0" i="0" dirty="0">
+                          <a:solidFill>
+                            <a:srgbClr val="56616A"/>
+                          </a:solidFill>
+                          <a:latin typeface="Segoe UI"/>
+                          <a:cs typeface="Segoe UI"/>
+                        </a:rPr>
+                        <a:t>« é » compte deux caractères, lexique manqué</a:t>
+                      </a:r>
+                    </a:p>
+                  </a:txBody>
+                  <a:tcPr marL="0" anchor="ctr">
+                    <a:lnL w="0">
+                      <a:noFill/>
+                    </a:lnL>
+                    <a:lnR w="0">
+                      <a:noFill/>
+                    </a:lnR>
+                    <a:lnT w="9525" cap="flat" cmpd="sng" algn="ctr">
+                      <a:solidFill>
+                        <a:srgbClr val="D5DADF"/>
+                      </a:solidFill>
+                      <a:prstDash val="solid"/>
+                      <a:round/>
+                      <a:headEnd type="none" w="med" len="med"/>
+                      <a:tailEnd type="none" w="med" len="med"/>
+                    </a:lnT>
+                    <a:lnB w="9525">
+                      <a:solidFill>
+                        <a:srgbClr val="D5DADF"/>
+                      </a:solidFill>
+                    </a:lnB>
+                    <a:noFill/>
+                  </a:tcPr>
+                </a:tc>
+                <a:extLst>
+                  <a:ext uri="{0D108BD9-81ED-4DB2-BD59-A6C34878D82A}">
+                    <a16:rowId xmlns:a16="http://schemas.microsoft.com/office/drawing/2014/main" val="10003"/>
+                  </a:ext>
+                </a:extLst>
+              </a:tr>
+              <a:tr h="310000">
+                <a:tc>
+                  <a:txBody>
+                    <a:bodyPr/>
+                    <a:lstStyle/>
+                    <a:p>
+                      <a:r>
+                        <a:rPr lang="fr-FR" sz="1050" b="1" i="0" dirty="0">
+                          <a:solidFill>
+                            <a:srgbClr val="13171B"/>
+                          </a:solidFill>
+                          <a:latin typeface="Segoe UI"/>
+                          <a:cs typeface="Segoe UI"/>
+                        </a:rPr>
+                        <a:t>Césure invisible</a:t>
+                      </a:r>
+                    </a:p>
+                  </a:txBody>
+                  <a:tcPr marL="0" anchor="ctr">
+                    <a:lnL w="0">
+                      <a:noFill/>
+                    </a:lnL>
+                    <a:lnR w="0">
+                      <a:noFill/>
+                    </a:lnR>
+                    <a:lnT w="9525" cap="flat" cmpd="sng" algn="ctr">
+                      <a:solidFill>
+                        <a:srgbClr val="D5DADF"/>
+                      </a:solidFill>
+                      <a:prstDash val="solid"/>
+                      <a:round/>
+                      <a:headEnd type="none" w="med" len="med"/>
+                      <a:tailEnd type="none" w="med" len="med"/>
+                    </a:lnT>
+                    <a:lnB w="9525">
+                      <a:solidFill>
+                        <a:srgbClr val="D5DADF"/>
+                      </a:solidFill>
+                    </a:lnB>
+                    <a:noFill/>
+                  </a:tcPr>
+                </a:tc>
+                <a:tc>
+                  <a:txBody>
+                    <a:bodyPr/>
+                    <a:lstStyle/>
+                    <a:p>
+                      <a:r>
+                        <a:rPr lang="fr-FR" sz="1050" b="0" i="0" dirty="0">
+                          <a:solidFill>
+                            <a:srgbClr val="56616A"/>
+                          </a:solidFill>
+                          <a:latin typeface="Segoe UI"/>
+                          <a:cs typeface="Segoe UI"/>
+                        </a:rPr>
+                        <a:t>Word, pages web</a:t>
+                      </a:r>
+                    </a:p>
+                  </a:txBody>
+                  <a:tcPr marL="0" anchor="ctr">
+                    <a:lnL w="0">
+                      <a:noFill/>
+                    </a:lnL>
+                    <a:lnR w="0">
+                      <a:noFill/>
+                    </a:lnR>
+                    <a:lnT w="9525" cap="flat" cmpd="sng" algn="ctr">
+                      <a:solidFill>
+                        <a:srgbClr val="D5DADF"/>
+                      </a:solidFill>
+                      <a:prstDash val="solid"/>
+                      <a:round/>
+                      <a:headEnd type="none" w="med" len="med"/>
+                      <a:tailEnd type="none" w="med" len="med"/>
+                    </a:lnT>
+                    <a:lnB w="9525">
+                      <a:solidFill>
+                        <a:srgbClr val="D5DADF"/>
+                      </a:solidFill>
+                    </a:lnB>
+                    <a:noFill/>
+                  </a:tcPr>
+                </a:tc>
+                <a:tc>
+                  <a:txBody>
+                    <a:bodyPr/>
+                    <a:lstStyle/>
+                    <a:p>
+                      <a:r>
+                        <a:rPr lang="fr-FR" sz="1050" b="0" i="0" dirty="0">
+                          <a:solidFill>
+                            <a:srgbClr val="56616A"/>
+                          </a:solidFill>
+                          <a:latin typeface="Segoe UI"/>
+                          <a:cs typeface="Segoe UI"/>
+                        </a:rPr>
+                        <a:t>mot coupé en deux : « nécessaire » non reconnu</a:t>
+                      </a:r>
+                    </a:p>
+                  </a:txBody>
+                  <a:tcPr marL="0" anchor="ctr">
+                    <a:lnL w="0">
+                      <a:noFill/>
+                    </a:lnL>
+                    <a:lnR w="0">
+                      <a:noFill/>
+                    </a:lnR>
+                    <a:lnT w="9525" cap="flat" cmpd="sng" algn="ctr">
+                      <a:solidFill>
+                        <a:srgbClr val="D5DADF"/>
+                      </a:solidFill>
+                      <a:prstDash val="solid"/>
+                      <a:round/>
+                      <a:headEnd type="none" w="med" len="med"/>
+                      <a:tailEnd type="none" w="med" len="med"/>
+                    </a:lnT>
+                    <a:lnB w="9525">
+                      <a:solidFill>
+                        <a:srgbClr val="D5DADF"/>
+                      </a:solidFill>
+                    </a:lnB>
+                    <a:noFill/>
+                  </a:tcPr>
+                </a:tc>
+                <a:extLst>
+                  <a:ext uri="{0D108BD9-81ED-4DB2-BD59-A6C34878D82A}">
+                    <a16:rowId xmlns:a16="http://schemas.microsoft.com/office/drawing/2014/main" val="10004"/>
+                  </a:ext>
+                </a:extLst>
+              </a:tr>
+              <a:tr h="310000">
+                <a:tc>
+                  <a:txBody>
+                    <a:bodyPr/>
+                    <a:lstStyle/>
+                    <a:p>
+                      <a:r>
+                        <a:rPr lang="fr-FR" sz="1050" b="1" i="0" dirty="0">
+                          <a:solidFill>
+                            <a:srgbClr val="13171B"/>
+                          </a:solidFill>
+                          <a:latin typeface="Segoe UI"/>
+                          <a:cs typeface="Segoe UI"/>
+                        </a:rPr>
+                        <a:t>Apostrophe courbe</a:t>
+                      </a:r>
+                    </a:p>
+                  </a:txBody>
+                  <a:tcPr marL="0" anchor="ctr">
+                    <a:lnL w="0">
+                      <a:noFill/>
+                    </a:lnL>
+                    <a:lnR w="0">
+                      <a:noFill/>
+                    </a:lnR>
+                    <a:lnT w="9525" cap="flat" cmpd="sng" algn="ctr">
+                      <a:solidFill>
+                        <a:srgbClr val="D5DADF"/>
+                      </a:solidFill>
+                      <a:prstDash val="solid"/>
+                      <a:round/>
+                      <a:headEnd type="none" w="med" len="med"/>
+                      <a:tailEnd type="none" w="med" len="med"/>
+                    </a:lnT>
+                    <a:lnB w="9525">
+                      <a:solidFill>
+                        <a:srgbClr val="D5DADF"/>
+                      </a:solidFill>
+                    </a:lnB>
+                    <a:noFill/>
+                  </a:tcPr>
+                </a:tc>
+                <a:tc>
+                  <a:txBody>
+                    <a:bodyPr/>
+                    <a:lstStyle/>
+                    <a:p>
+                      <a:r>
+                        <a:rPr lang="fr-FR" sz="1050" b="0" i="0" dirty="0">
+                          <a:solidFill>
+                            <a:srgbClr val="56616A"/>
+                          </a:solidFill>
+                          <a:latin typeface="Segoe UI"/>
+                          <a:cs typeface="Segoe UI"/>
+                        </a:rPr>
+                        <a:t>correction auto de Word</a:t>
+                      </a:r>
+                    </a:p>
+                  </a:txBody>
+                  <a:tcPr marL="0" anchor="ctr">
+                    <a:lnL w="0">
+                      <a:noFill/>
+                    </a:lnL>
+                    <a:lnR w="0">
+                      <a:noFill/>
+                    </a:lnR>
+                    <a:lnT w="9525" cap="flat" cmpd="sng" algn="ctr">
+                      <a:solidFill>
+                        <a:srgbClr val="D5DADF"/>
+                      </a:solidFill>
+                      <a:prstDash val="solid"/>
+                      <a:round/>
+                      <a:headEnd type="none" w="med" len="med"/>
+                      <a:tailEnd type="none" w="med" len="med"/>
+                    </a:lnT>
+                    <a:lnB w="9525">
+                      <a:solidFill>
+                        <a:srgbClr val="D5DADF"/>
+                      </a:solidFill>
+                    </a:lnB>
+                    <a:noFill/>
+                  </a:tcPr>
+                </a:tc>
+                <a:tc>
+                  <a:txBody>
+                    <a:bodyPr/>
+                    <a:lstStyle/>
+                    <a:p>
+                      <a:r>
+                        <a:rPr lang="fr-FR" sz="1050" b="0" i="0" dirty="0">
+                          <a:solidFill>
+                            <a:srgbClr val="56616A"/>
+                          </a:solidFill>
+                          <a:latin typeface="Segoe UI"/>
+                          <a:cs typeface="Segoe UI"/>
+                        </a:rPr>
+                        <a:t>« afin d’ » manqué ; spaCy lit « l’ » comme un nom</a:t>
+                      </a:r>
+                    </a:p>
+                  </a:txBody>
+                  <a:tcPr marL="0" anchor="ctr">
+                    <a:lnL w="0">
+                      <a:noFill/>
+                    </a:lnL>
+                    <a:lnR w="0">
+                      <a:noFill/>
+                    </a:lnR>
+                    <a:lnT w="9525" cap="flat" cmpd="sng" algn="ctr">
+                      <a:solidFill>
+                        <a:srgbClr val="D5DADF"/>
+                      </a:solidFill>
+                      <a:prstDash val="solid"/>
+                      <a:round/>
+                      <a:headEnd type="none" w="med" len="med"/>
+                      <a:tailEnd type="none" w="med" len="med"/>
+                    </a:lnT>
+                    <a:lnB w="9525">
+                      <a:solidFill>
+                        <a:srgbClr val="D5DADF"/>
+                      </a:solidFill>
+                    </a:lnB>
+                    <a:noFill/>
+                  </a:tcPr>
+                </a:tc>
+                <a:extLst>
+                  <a:ext uri="{0D108BD9-81ED-4DB2-BD59-A6C34878D82A}">
+                    <a16:rowId xmlns:a16="http://schemas.microsoft.com/office/drawing/2014/main" val="10005"/>
+                  </a:ext>
+                </a:extLst>
+              </a:tr>
+              <a:tr h="310000">
+                <a:tc>
+                  <a:txBody>
+                    <a:bodyPr/>
+                    <a:lstStyle/>
+                    <a:p>
+                      <a:r>
+                        <a:rPr lang="fr-FR" sz="1050" b="1" i="0" dirty="0">
+                          <a:solidFill>
+                            <a:srgbClr val="13171B"/>
+                          </a:solidFill>
+                          <a:latin typeface="Segoe UI"/>
+                          <a:cs typeface="Segoe UI"/>
+                        </a:rPr>
+                        <a:t>Insécables</a:t>
+                      </a:r>
+                    </a:p>
+                  </a:txBody>
+                  <a:tcPr marL="0" anchor="ctr">
+                    <a:lnL w="0">
+                      <a:noFill/>
+                    </a:lnL>
+                    <a:lnR w="0">
+                      <a:noFill/>
+                    </a:lnR>
+                    <a:lnT w="9525" cap="flat" cmpd="sng" algn="ctr">
+                      <a:solidFill>
+                        <a:srgbClr val="D5DADF"/>
+                      </a:solidFill>
+                      <a:prstDash val="solid"/>
+                      <a:round/>
+                      <a:headEnd type="none" w="med" len="med"/>
+                      <a:tailEnd type="none" w="med" len="med"/>
+                    </a:lnT>
+                    <a:lnB w="9525">
+                      <a:solidFill>
+                        <a:srgbClr val="D5DADF"/>
+                      </a:solidFill>
+                    </a:lnB>
+                    <a:noFill/>
+                  </a:tcPr>
+                </a:tc>
+                <a:tc>
+                  <a:txBody>
+                    <a:bodyPr/>
+                    <a:lstStyle/>
+                    <a:p>
+                      <a:r>
+                        <a:rPr lang="fr-FR" sz="1050" b="0" i="0" dirty="0">
+                          <a:solidFill>
+                            <a:srgbClr val="56616A"/>
+                          </a:solidFill>
+                          <a:latin typeface="Segoe UI"/>
+                          <a:cs typeface="Segoe UI"/>
+                        </a:rPr>
+                        <a:t>avant : ; ! ? et dans « »</a:t>
+                      </a:r>
+                    </a:p>
+                  </a:txBody>
+                  <a:tcPr marL="0" anchor="ctr">
+                    <a:lnL w="0">
+                      <a:noFill/>
+                    </a:lnL>
+                    <a:lnR w="0">
+                      <a:noFill/>
+                    </a:lnR>
+                    <a:lnT w="9525" cap="flat" cmpd="sng" algn="ctr">
+                      <a:solidFill>
+                        <a:srgbClr val="D5DADF"/>
+                      </a:solidFill>
+                      <a:prstDash val="solid"/>
+                      <a:round/>
+                      <a:headEnd type="none" w="med" len="med"/>
+                      <a:tailEnd type="none" w="med" len="med"/>
+                    </a:lnT>
+                    <a:lnB w="9525">
+                      <a:solidFill>
+                        <a:srgbClr val="D5DADF"/>
+                      </a:solidFill>
+                    </a:lnB>
+                    <a:noFill/>
+                  </a:tcPr>
+                </a:tc>
+                <a:tc>
+                  <a:txBody>
+                    <a:bodyPr/>
+                    <a:lstStyle/>
+                    <a:p>
+                      <a:r>
+                        <a:rPr lang="fr-FR" sz="1050" b="0" i="0" dirty="0">
+                          <a:solidFill>
+                            <a:srgbClr val="56616A"/>
+                          </a:solidFill>
+                          <a:latin typeface="Segoe UI"/>
+                          <a:cs typeface="Segoe UI"/>
+                        </a:rPr>
+                        <a:t>spaCy en fait un token SPACE parasite dans l'arbre</a:t>
+                      </a:r>
+                    </a:p>
+                  </a:txBody>
+                  <a:tcPr marL="0" anchor="ctr">
+                    <a:lnL w="0">
+                      <a:noFill/>
+                    </a:lnL>
+                    <a:lnR w="0">
+                      <a:noFill/>
+                    </a:lnR>
+                    <a:lnT w="9525" cap="flat" cmpd="sng" algn="ctr">
+                      <a:solidFill>
+                        <a:srgbClr val="D5DADF"/>
+                      </a:solidFill>
+                      <a:prstDash val="solid"/>
+                      <a:round/>
+                      <a:headEnd type="none" w="med" len="med"/>
+                      <a:tailEnd type="none" w="med" len="med"/>
+                    </a:lnT>
+                    <a:lnB w="9525">
+                      <a:solidFill>
+                        <a:srgbClr val="D5DADF"/>
+                      </a:solidFill>
+                    </a:lnB>
+                    <a:noFill/>
+                  </a:tcPr>
+                </a:tc>
+                <a:extLst>
+                  <a:ext uri="{0D108BD9-81ED-4DB2-BD59-A6C34878D82A}">
+                    <a16:rowId xmlns:a16="http://schemas.microsoft.com/office/drawing/2014/main" val="10006"/>
+                  </a:ext>
+                </a:extLst>
+              </a:tr>
+            </a:tbl>
+          </a:graphicData>
+        </a:graphic>
+      </p:graphicFrame>
     </p:spTree>
   </p:cSld>
   <p:clrMapOvr>
@@ -9816,7 +10765,7 @@
                 <a:latin typeface="Consolas"/>
                 <a:cs typeface="Consolas"/>
               </a:rPr>
-              <a:t xml:space="preserve">for</a:t>
+              <a:t>for</a:t>
             </a:r>
             <a:r>
               <a:rPr lang="fr-FR" sz="1200" b="0" i="0">
@@ -9826,17 +10775,17 @@
                 <a:latin typeface="Consolas"/>
                 <a:cs typeface="Consolas"/>
               </a:rPr>
-              <a:t xml:space="preserve"> </a:t>
+              <a:t> bloc </a:t>
             </a:r>
             <a:r>
               <a:rPr lang="fr-FR" sz="1200" b="0" i="0">
                 <a:solidFill>
-                  <a:srgbClr val="E4E4E4"/>
+                  <a:srgbClr val="C9A6FF"/>
                 </a:solidFill>
                 <a:latin typeface="Consolas"/>
                 <a:cs typeface="Consolas"/>
               </a:rPr>
-              <a:t xml:space="preserve">bloc</a:t>
+              <a:t>in</a:t>
             </a:r>
             <a:r>
               <a:rPr lang="fr-FR" sz="1200" b="0" i="0">
@@ -9846,17 +10795,17 @@
                 <a:latin typeface="Consolas"/>
                 <a:cs typeface="Consolas"/>
               </a:rPr>
-              <a:t xml:space="preserve"> </a:t>
+              <a:t> re.</a:t>
             </a:r>
             <a:r>
               <a:rPr lang="fr-FR" sz="1200" b="0" i="0">
                 <a:solidFill>
-                  <a:srgbClr val="C9A6FF"/>
+                  <a:srgbClr val="6CCFE6"/>
                 </a:solidFill>
                 <a:latin typeface="Consolas"/>
                 <a:cs typeface="Consolas"/>
               </a:rPr>
-              <a:t xml:space="preserve">in</a:t>
+              <a:t>finditer</a:t>
             </a:r>
             <a:r>
               <a:rPr lang="fr-FR" sz="1200" b="0" i="0">
@@ -9866,18 +10815,31 @@
                 <a:latin typeface="Consolas"/>
                 <a:cs typeface="Consolas"/>
               </a:rPr>
-              <a:t xml:space="preserve"> </a:t>
+              <a:t>(PARAGRAPHE, texte):        </a:t>
             </a:r>
             <a:r>
               <a:rPr lang="fr-FR" sz="1200" b="0" i="0">
                 <a:solidFill>
-                  <a:srgbClr val="E4E4E4"/>
+                  <a:srgbClr val="8D949D"/>
                 </a:solidFill>
                 <a:latin typeface="Consolas"/>
                 <a:cs typeface="Consolas"/>
               </a:rPr>
-              <a:t xml:space="preserve">re</a:t>
-            </a:r>
+              <a:t>  # 1  un paragraphe</a:t>
+            </a:r>
+          </a:p>
+          <a:p>
+            <a:pPr>
+              <a:lnSpc>
+                <a:spcPct val="150000"/>
+              </a:lnSpc>
+              <a:spcBef>
+                <a:spcPts val="0"/>
+              </a:spcBef>
+              <a:spcAft>
+                <a:spcPts val="0"/>
+              </a:spcAft>
+            </a:pPr>
             <a:r>
               <a:rPr lang="fr-FR" sz="1200" b="0" i="0">
                 <a:solidFill>
@@ -9886,17 +10848,17 @@
                 <a:latin typeface="Consolas"/>
                 <a:cs typeface="Consolas"/>
               </a:rPr>
-              <a:t xml:space="preserve">.</a:t>
+              <a:t>    </a:t>
             </a:r>
             <a:r>
               <a:rPr lang="fr-FR" sz="1200" b="0" i="0">
                 <a:solidFill>
-                  <a:srgbClr val="6CCFE6"/>
+                  <a:srgbClr val="C9A6FF"/>
                 </a:solidFill>
                 <a:latin typeface="Consolas"/>
                 <a:cs typeface="Consolas"/>
               </a:rPr>
-              <a:t xml:space="preserve">finditer</a:t>
+              <a:t>for</a:t>
             </a:r>
             <a:r>
               <a:rPr lang="fr-FR" sz="1200" b="0" i="0">
@@ -9906,17 +10868,17 @@
                 <a:latin typeface="Consolas"/>
                 <a:cs typeface="Consolas"/>
               </a:rPr>
-              <a:t xml:space="preserve">(</a:t>
+              <a:t> span </a:t>
             </a:r>
             <a:r>
               <a:rPr lang="fr-FR" sz="1200" b="0" i="0">
                 <a:solidFill>
-                  <a:srgbClr val="E4E4E4"/>
+                  <a:srgbClr val="C9A6FF"/>
                 </a:solidFill>
                 <a:latin typeface="Consolas"/>
                 <a:cs typeface="Consolas"/>
               </a:rPr>
-              <a:t xml:space="preserve">PARAGRAPHE</a:t>
+              <a:t>in</a:t>
             </a:r>
             <a:r>
               <a:rPr lang="fr-FR" sz="1200" b="0" i="0">
@@ -9926,17 +10888,17 @@
                 <a:latin typeface="Consolas"/>
                 <a:cs typeface="Consolas"/>
               </a:rPr>
-              <a:t xml:space="preserve">,</a:t>
+              <a:t> _segmenter.</a:t>
             </a:r>
             <a:r>
               <a:rPr lang="fr-FR" sz="1200" b="0" i="0">
                 <a:solidFill>
-                  <a:srgbClr val="E4E4E4"/>
+                  <a:srgbClr val="6CCFE6"/>
                 </a:solidFill>
                 <a:latin typeface="Consolas"/>
                 <a:cs typeface="Consolas"/>
               </a:rPr>
-              <a:t xml:space="preserve"> </a:t>
+              <a:t>segment</a:t>
             </a:r>
             <a:r>
               <a:rPr lang="fr-FR" sz="1200" b="0" i="0">
@@ -9946,17 +10908,17 @@
                 <a:latin typeface="Consolas"/>
                 <a:cs typeface="Consolas"/>
               </a:rPr>
-              <a:t xml:space="preserve">texte</a:t>
+              <a:t>(bloc.</a:t>
             </a:r>
             <a:r>
               <a:rPr lang="fr-FR" sz="1200" b="0" i="0">
                 <a:solidFill>
-                  <a:srgbClr val="E4E4E4"/>
+                  <a:srgbClr val="6CCFE6"/>
                 </a:solidFill>
                 <a:latin typeface="Consolas"/>
                 <a:cs typeface="Consolas"/>
               </a:rPr>
-              <a:t xml:space="preserve">)</a:t>
+              <a:t>group</a:t>
             </a:r>
             <a:r>
               <a:rPr lang="fr-FR" sz="1200" b="0" i="0">
@@ -9966,433 +10928,70 @@
                 <a:latin typeface="Consolas"/>
                 <a:cs typeface="Consolas"/>
               </a:rPr>
-              <a:t xml:space="preserve">:</a:t>
+              <a:t>()):  </a:t>
             </a:r>
             <a:r>
               <a:rPr lang="fr-FR" sz="1200" b="0" i="0">
                 <a:solidFill>
-                  <a:srgbClr val="E4E4E4"/>
+                  <a:srgbClr val="8D949D"/>
                 </a:solidFill>
                 <a:latin typeface="Consolas"/>
                 <a:cs typeface="Consolas"/>
               </a:rPr>
-              <a:t xml:space="preserve">        </a:t>
-            </a:r>
+              <a:t>  # 2  ses phrases</a:t>
+            </a:r>
+          </a:p>
+          <a:p>
+            <a:pPr>
+              <a:lnSpc>
+                <a:spcPct val="150000"/>
+              </a:lnSpc>
+              <a:spcBef>
+                <a:spcPts val="0"/>
+              </a:spcBef>
+              <a:spcAft>
+                <a:spcPts val="0"/>
+              </a:spcAft>
+            </a:pPr>
             <a:r>
               <a:rPr lang="fr-FR" sz="1200" b="0" i="0">
                 <a:solidFill>
-                  <a:srgbClr val="8D949D"/>
+                  <a:srgbClr val="E4E4E4"/>
                 </a:solidFill>
                 <a:latin typeface="Consolas"/>
                 <a:cs typeface="Consolas"/>
               </a:rPr>
-              <a:t xml:space="preserve">  # 1  un paragraphe</a:t>
-            </a:r>
-          </a:p>
-          <a:p>
-            <a:pPr>
-              <a:lnSpc>
-                <a:spcPct val="150000"/>
-              </a:lnSpc>
-              <a:spcBef>
-                <a:spcPts val="0"/>
-              </a:spcBef>
-              <a:spcAft>
-                <a:spcPts val="0"/>
-              </a:spcAft>
-            </a:pPr>
+              <a:t>        start = bloc.</a:t>
+            </a:r>
             <a:r>
               <a:rPr lang="fr-FR" sz="1200" b="0" i="0">
                 <a:solidFill>
-                  <a:srgbClr val="E4E4E4"/>
+                  <a:srgbClr val="6CCFE6"/>
                 </a:solidFill>
                 <a:latin typeface="Consolas"/>
                 <a:cs typeface="Consolas"/>
               </a:rPr>
-              <a:t xml:space="preserve">    </a:t>
+              <a:t>start</a:t>
             </a:r>
             <a:r>
               <a:rPr lang="fr-FR" sz="1200" b="0" i="0">
                 <a:solidFill>
-                  <a:srgbClr val="C9A6FF"/>
+                  <a:srgbClr val="E4E4E4"/>
                 </a:solidFill>
                 <a:latin typeface="Consolas"/>
                 <a:cs typeface="Consolas"/>
               </a:rPr>
-              <a:t xml:space="preserve">for</a:t>
+              <a:t>() + span.start          </a:t>
             </a:r>
             <a:r>
               <a:rPr lang="fr-FR" sz="1200" b="0" i="0">
                 <a:solidFill>
-                  <a:srgbClr val="E4E4E4"/>
+                  <a:srgbClr val="8D949D"/>
                 </a:solidFill>
                 <a:latin typeface="Consolas"/>
                 <a:cs typeface="Consolas"/>
               </a:rPr>
-              <a:t xml:space="preserve"> </a:t>
-            </a:r>
-            <a:r>
-              <a:rPr lang="fr-FR" sz="1200" b="0" i="0">
-                <a:solidFill>
-                  <a:srgbClr val="E4E4E4"/>
-                </a:solidFill>
-                <a:latin typeface="Consolas"/>
-                <a:cs typeface="Consolas"/>
-              </a:rPr>
-              <a:t xml:space="preserve">span</a:t>
-            </a:r>
-            <a:r>
-              <a:rPr lang="fr-FR" sz="1200" b="0" i="0">
-                <a:solidFill>
-                  <a:srgbClr val="E4E4E4"/>
-                </a:solidFill>
-                <a:latin typeface="Consolas"/>
-                <a:cs typeface="Consolas"/>
-              </a:rPr>
-              <a:t xml:space="preserve"> </a:t>
-            </a:r>
-            <a:r>
-              <a:rPr lang="fr-FR" sz="1200" b="0" i="0">
-                <a:solidFill>
-                  <a:srgbClr val="C9A6FF"/>
-                </a:solidFill>
-                <a:latin typeface="Consolas"/>
-                <a:cs typeface="Consolas"/>
-              </a:rPr>
-              <a:t xml:space="preserve">in</a:t>
-            </a:r>
-            <a:r>
-              <a:rPr lang="fr-FR" sz="1200" b="0" i="0">
-                <a:solidFill>
-                  <a:srgbClr val="E4E4E4"/>
-                </a:solidFill>
-                <a:latin typeface="Consolas"/>
-                <a:cs typeface="Consolas"/>
-              </a:rPr>
-              <a:t xml:space="preserve"> </a:t>
-            </a:r>
-            <a:r>
-              <a:rPr lang="fr-FR" sz="1200" b="0" i="0">
-                <a:solidFill>
-                  <a:srgbClr val="E4E4E4"/>
-                </a:solidFill>
-                <a:latin typeface="Consolas"/>
-                <a:cs typeface="Consolas"/>
-              </a:rPr>
-              <a:t xml:space="preserve">_segmenter</a:t>
-            </a:r>
-            <a:r>
-              <a:rPr lang="fr-FR" sz="1200" b="0" i="0">
-                <a:solidFill>
-                  <a:srgbClr val="E4E4E4"/>
-                </a:solidFill>
-                <a:latin typeface="Consolas"/>
-                <a:cs typeface="Consolas"/>
-              </a:rPr>
-              <a:t xml:space="preserve">.</a:t>
-            </a:r>
-            <a:r>
-              <a:rPr lang="fr-FR" sz="1200" b="0" i="0">
-                <a:solidFill>
-                  <a:srgbClr val="6CCFE6"/>
-                </a:solidFill>
-                <a:latin typeface="Consolas"/>
-                <a:cs typeface="Consolas"/>
-              </a:rPr>
-              <a:t xml:space="preserve">segment</a:t>
-            </a:r>
-            <a:r>
-              <a:rPr lang="fr-FR" sz="1200" b="0" i="0">
-                <a:solidFill>
-                  <a:srgbClr val="E4E4E4"/>
-                </a:solidFill>
-                <a:latin typeface="Consolas"/>
-                <a:cs typeface="Consolas"/>
-              </a:rPr>
-              <a:t xml:space="preserve">(</a:t>
-            </a:r>
-            <a:r>
-              <a:rPr lang="fr-FR" sz="1200" b="0" i="0">
-                <a:solidFill>
-                  <a:srgbClr val="E4E4E4"/>
-                </a:solidFill>
-                <a:latin typeface="Consolas"/>
-                <a:cs typeface="Consolas"/>
-              </a:rPr>
-              <a:t xml:space="preserve">bloc</a:t>
-            </a:r>
-            <a:r>
-              <a:rPr lang="fr-FR" sz="1200" b="0" i="0">
-                <a:solidFill>
-                  <a:srgbClr val="E4E4E4"/>
-                </a:solidFill>
-                <a:latin typeface="Consolas"/>
-                <a:cs typeface="Consolas"/>
-              </a:rPr>
-              <a:t xml:space="preserve">.</a:t>
-            </a:r>
-            <a:r>
-              <a:rPr lang="fr-FR" sz="1200" b="0" i="0">
-                <a:solidFill>
-                  <a:srgbClr val="6CCFE6"/>
-                </a:solidFill>
-                <a:latin typeface="Consolas"/>
-                <a:cs typeface="Consolas"/>
-              </a:rPr>
-              <a:t xml:space="preserve">group</a:t>
-            </a:r>
-            <a:r>
-              <a:rPr lang="fr-FR" sz="1200" b="0" i="0">
-                <a:solidFill>
-                  <a:srgbClr val="E4E4E4"/>
-                </a:solidFill>
-                <a:latin typeface="Consolas"/>
-                <a:cs typeface="Consolas"/>
-              </a:rPr>
-              <a:t xml:space="preserve">(</a:t>
-            </a:r>
-            <a:r>
-              <a:rPr lang="fr-FR" sz="1200" b="0" i="0">
-                <a:solidFill>
-                  <a:srgbClr val="E4E4E4"/>
-                </a:solidFill>
-                <a:latin typeface="Consolas"/>
-                <a:cs typeface="Consolas"/>
-              </a:rPr>
-              <a:t xml:space="preserve">)</a:t>
-            </a:r>
-            <a:r>
-              <a:rPr lang="fr-FR" sz="1200" b="0" i="0">
-                <a:solidFill>
-                  <a:srgbClr val="E4E4E4"/>
-                </a:solidFill>
-                <a:latin typeface="Consolas"/>
-                <a:cs typeface="Consolas"/>
-              </a:rPr>
-              <a:t xml:space="preserve">)</a:t>
-            </a:r>
-            <a:r>
-              <a:rPr lang="fr-FR" sz="1200" b="0" i="0">
-                <a:solidFill>
-                  <a:srgbClr val="E4E4E4"/>
-                </a:solidFill>
-                <a:latin typeface="Consolas"/>
-                <a:cs typeface="Consolas"/>
-              </a:rPr>
-              <a:t xml:space="preserve">:</a:t>
-            </a:r>
-            <a:r>
-              <a:rPr lang="fr-FR" sz="1200" b="0" i="0">
-                <a:solidFill>
-                  <a:srgbClr val="E4E4E4"/>
-                </a:solidFill>
-                <a:latin typeface="Consolas"/>
-                <a:cs typeface="Consolas"/>
-              </a:rPr>
-              <a:t xml:space="preserve">  </a:t>
-            </a:r>
-            <a:r>
-              <a:rPr lang="fr-FR" sz="1200" b="0" i="0">
-                <a:solidFill>
-                  <a:srgbClr val="8D949D"/>
-                </a:solidFill>
-                <a:latin typeface="Consolas"/>
-                <a:cs typeface="Consolas"/>
-              </a:rPr>
-              <a:t xml:space="preserve">  # 2  ses phrases</a:t>
-            </a:r>
-          </a:p>
-          <a:p>
-            <a:pPr>
-              <a:lnSpc>
-                <a:spcPct val="150000"/>
-              </a:lnSpc>
-              <a:spcBef>
-                <a:spcPts val="0"/>
-              </a:spcBef>
-              <a:spcAft>
-                <a:spcPts val="0"/>
-              </a:spcAft>
-            </a:pPr>
-            <a:r>
-              <a:rPr lang="fr-FR" sz="1200" b="0" i="0">
-                <a:solidFill>
-                  <a:srgbClr val="E4E4E4"/>
-                </a:solidFill>
-                <a:latin typeface="Consolas"/>
-                <a:cs typeface="Consolas"/>
-              </a:rPr>
-              <a:t xml:space="preserve">        </a:t>
-            </a:r>
-            <a:r>
-              <a:rPr lang="fr-FR" sz="1200" b="0" i="0">
-                <a:solidFill>
-                  <a:srgbClr val="E4E4E4"/>
-                </a:solidFill>
-                <a:latin typeface="Consolas"/>
-                <a:cs typeface="Consolas"/>
-              </a:rPr>
-              <a:t xml:space="preserve">start</a:t>
-            </a:r>
-            <a:r>
-              <a:rPr lang="fr-FR" sz="1200" b="0" i="0">
-                <a:solidFill>
-                  <a:srgbClr val="E4E4E4"/>
-                </a:solidFill>
-                <a:latin typeface="Consolas"/>
-                <a:cs typeface="Consolas"/>
-              </a:rPr>
-              <a:t xml:space="preserve"> </a:t>
-            </a:r>
-            <a:r>
-              <a:rPr lang="fr-FR" sz="1200" b="0" i="0">
-                <a:solidFill>
-                  <a:srgbClr val="E4E4E4"/>
-                </a:solidFill>
-                <a:latin typeface="Consolas"/>
-                <a:cs typeface="Consolas"/>
-              </a:rPr>
-              <a:t xml:space="preserve">=</a:t>
-            </a:r>
-            <a:r>
-              <a:rPr lang="fr-FR" sz="1200" b="0" i="0">
-                <a:solidFill>
-                  <a:srgbClr val="E4E4E4"/>
-                </a:solidFill>
-                <a:latin typeface="Consolas"/>
-                <a:cs typeface="Consolas"/>
-              </a:rPr>
-              <a:t xml:space="preserve"> </a:t>
-            </a:r>
-            <a:r>
-              <a:rPr lang="fr-FR" sz="1200" b="0" i="0">
-                <a:solidFill>
-                  <a:srgbClr val="E4E4E4"/>
-                </a:solidFill>
-                <a:latin typeface="Consolas"/>
-                <a:cs typeface="Consolas"/>
-              </a:rPr>
-              <a:t xml:space="preserve">bloc</a:t>
-            </a:r>
-            <a:r>
-              <a:rPr lang="fr-FR" sz="1200" b="0" i="0">
-                <a:solidFill>
-                  <a:srgbClr val="E4E4E4"/>
-                </a:solidFill>
-                <a:latin typeface="Consolas"/>
-                <a:cs typeface="Consolas"/>
-              </a:rPr>
-              <a:t xml:space="preserve">.</a:t>
-            </a:r>
-            <a:r>
-              <a:rPr lang="fr-FR" sz="1200" b="0" i="0">
-                <a:solidFill>
-                  <a:srgbClr val="6CCFE6"/>
-                </a:solidFill>
-                <a:latin typeface="Consolas"/>
-                <a:cs typeface="Consolas"/>
-              </a:rPr>
-              <a:t xml:space="preserve">start</a:t>
-            </a:r>
-            <a:r>
-              <a:rPr lang="fr-FR" sz="1200" b="0" i="0">
-                <a:solidFill>
-                  <a:srgbClr val="E4E4E4"/>
-                </a:solidFill>
-                <a:latin typeface="Consolas"/>
-                <a:cs typeface="Consolas"/>
-              </a:rPr>
-              <a:t xml:space="preserve">(</a:t>
-            </a:r>
-            <a:r>
-              <a:rPr lang="fr-FR" sz="1200" b="0" i="0">
-                <a:solidFill>
-                  <a:srgbClr val="E4E4E4"/>
-                </a:solidFill>
-                <a:latin typeface="Consolas"/>
-                <a:cs typeface="Consolas"/>
-              </a:rPr>
-              <a:t xml:space="preserve">)</a:t>
-            </a:r>
-            <a:r>
-              <a:rPr lang="fr-FR" sz="1200" b="0" i="0">
-                <a:solidFill>
-                  <a:srgbClr val="E4E4E4"/>
-                </a:solidFill>
-                <a:latin typeface="Consolas"/>
-                <a:cs typeface="Consolas"/>
-              </a:rPr>
-              <a:t xml:space="preserve"> </a:t>
-            </a:r>
-            <a:r>
-              <a:rPr lang="fr-FR" sz="1200" b="0" i="0">
-                <a:solidFill>
-                  <a:srgbClr val="E4E4E4"/>
-                </a:solidFill>
-                <a:latin typeface="Consolas"/>
-                <a:cs typeface="Consolas"/>
-              </a:rPr>
-              <a:t xml:space="preserve">+</a:t>
-            </a:r>
-            <a:r>
-              <a:rPr lang="fr-FR" sz="1200" b="0" i="0">
-                <a:solidFill>
-                  <a:srgbClr val="E4E4E4"/>
-                </a:solidFill>
-                <a:latin typeface="Consolas"/>
-                <a:cs typeface="Consolas"/>
-              </a:rPr>
-              <a:t xml:space="preserve"> </a:t>
-            </a:r>
-            <a:r>
-              <a:rPr lang="fr-FR" sz="1200" b="0" i="0">
-                <a:solidFill>
-                  <a:srgbClr val="E4E4E4"/>
-                </a:solidFill>
-                <a:latin typeface="Consolas"/>
-                <a:cs typeface="Consolas"/>
-              </a:rPr>
-              <a:t xml:space="preserve">span</a:t>
-            </a:r>
-            <a:r>
-              <a:rPr lang="fr-FR" sz="1200" b="0" i="0">
-                <a:solidFill>
-                  <a:srgbClr val="E4E4E4"/>
-                </a:solidFill>
-                <a:latin typeface="Consolas"/>
-                <a:cs typeface="Consolas"/>
-              </a:rPr>
-              <a:t xml:space="preserve">.</a:t>
-            </a:r>
-            <a:r>
-              <a:rPr lang="fr-FR" sz="1200" b="0" i="0">
-                <a:solidFill>
-                  <a:srgbClr val="E4E4E4"/>
-                </a:solidFill>
-                <a:latin typeface="Consolas"/>
-                <a:cs typeface="Consolas"/>
-              </a:rPr>
-              <a:t xml:space="preserve">start</a:t>
-            </a:r>
-            <a:r>
-              <a:rPr lang="fr-FR" sz="1200" b="0" i="0">
-                <a:solidFill>
-                  <a:srgbClr val="E4E4E4"/>
-                </a:solidFill>
-                <a:latin typeface="Consolas"/>
-                <a:cs typeface="Consolas"/>
-              </a:rPr>
-              <a:t xml:space="preserve">          </a:t>
-            </a:r>
-            <a:r>
-              <a:rPr lang="fr-FR" sz="1200" b="0" i="0">
-                <a:solidFill>
-                  <a:srgbClr val="8D949D"/>
-                </a:solidFill>
-                <a:latin typeface="Consolas"/>
-                <a:cs typeface="Consolas"/>
-              </a:rPr>
-              <a:t xml:space="preserve">  # 3  position absolue</a:t>
+              <a:t>  # 3  position absolue</a:t>
             </a:r>
           </a:p>
         </p:txBody>
@@ -10841,7 +11440,7 @@
           <a:noFill/>
         </p:spPr>
         <p:txBody>
-          <a:bodyPr wrap="square" lIns="0" rIns="0" tIns="0" bIns="0">
+          <a:bodyPr wrap="square" lIns="0" tIns="0" rIns="0" bIns="0">
             <a:spAutoFit/>
           </a:bodyPr>
           <a:lstStyle/>
@@ -10865,7 +11464,7 @@
                 <a:latin typeface="Consolas"/>
                 <a:cs typeface="Consolas"/>
               </a:rPr>
-              <a:t xml:space="preserve">285</a:t>
+              <a:t>285</a:t>
             </a:r>
           </a:p>
           <a:p>
@@ -10888,7 +11487,7 @@
                 <a:latin typeface="Consolas"/>
                 <a:cs typeface="Consolas"/>
               </a:rPr>
-              <a:t xml:space="preserve">bloc.start()</a:t>
+              <a:t>bloc.start()</a:t>
             </a:r>
           </a:p>
           <a:p>
@@ -10911,7 +11510,7 @@
                 <a:latin typeface="Segoe UI"/>
                 <a:cs typeface="Segoe UI"/>
               </a:rPr>
-              <a:t xml:space="preserve">début du 2ᵉ paragraphe</a:t>
+              <a:t>début du 2ᵉ paragraphe</a:t>
             </a:r>
           </a:p>
         </p:txBody>
@@ -10933,7 +11532,7 @@
           <a:noFill/>
         </p:spPr>
         <p:txBody>
-          <a:bodyPr wrap="square" lIns="0" rIns="0" tIns="0" bIns="0">
+          <a:bodyPr wrap="square" lIns="0" tIns="0" rIns="0" bIns="0">
             <a:spAutoFit/>
           </a:bodyPr>
           <a:lstStyle/>
@@ -10957,7 +11556,7 @@
                 <a:latin typeface="Consolas"/>
                 <a:cs typeface="Consolas"/>
               </a:rPr>
-              <a:t xml:space="preserve">+ 49</a:t>
+              <a:t>+ 49</a:t>
             </a:r>
           </a:p>
           <a:p>
@@ -10980,7 +11579,7 @@
                 <a:latin typeface="Consolas"/>
                 <a:cs typeface="Consolas"/>
               </a:rPr>
-              <a:t xml:space="preserve">span.start</a:t>
+              <a:t>span.start</a:t>
             </a:r>
           </a:p>
           <a:p>
@@ -11003,7 +11602,7 @@
                 <a:latin typeface="Segoe UI"/>
                 <a:cs typeface="Segoe UI"/>
               </a:rPr>
-              <a:t xml:space="preserve">début de la phrase dans ce paragraphe</a:t>
+              <a:t>début de la phrase dans ce paragraphe</a:t>
             </a:r>
           </a:p>
         </p:txBody>
@@ -11025,7 +11624,7 @@
           <a:noFill/>
         </p:spPr>
         <p:txBody>
-          <a:bodyPr wrap="square" lIns="0" rIns="0" tIns="0" bIns="0">
+          <a:bodyPr wrap="square" lIns="0" tIns="0" rIns="0" bIns="0">
             <a:spAutoFit/>
           </a:bodyPr>
           <a:lstStyle/>
@@ -11049,7 +11648,7 @@
                 <a:latin typeface="Consolas"/>
                 <a:cs typeface="Consolas"/>
               </a:rPr>
-              <a:t xml:space="preserve">= 334</a:t>
+              <a:t>= 334</a:t>
             </a:r>
           </a:p>
           <a:p>
@@ -11072,7 +11671,7 @@
                 <a:latin typeface="Consolas"/>
                 <a:cs typeface="Consolas"/>
               </a:rPr>
-              <a:t xml:space="preserve">« En ce qui concerne… »</a:t>
+              <a:t>« En ce qui concerne… »</a:t>
             </a:r>
           </a:p>
           <a:p>
@@ -11095,7 +11694,7 @@
                 <a:latin typeface="Segoe UI"/>
                 <a:cs typeface="Segoe UI"/>
               </a:rPr>
-              <a:t xml:space="preserve">dans le texte complet</a:t>
+              <a:t>dans le texte complet</a:t>
             </a:r>
           </a:p>
         </p:txBody>
@@ -11309,7 +11908,7 @@
                 <a:latin typeface="Consolas"/>
                 <a:cs typeface="Consolas"/>
               </a:rPr>
-              <a:t xml:space="preserve">for</a:t>
+              <a:t>for</a:t>
             </a:r>
             <a:r>
               <a:rPr lang="fr-FR" sz="1200" b="0" i="0">
@@ -11319,17 +11918,17 @@
                 <a:latin typeface="Consolas"/>
                 <a:cs typeface="Consolas"/>
               </a:rPr>
-              <a:t xml:space="preserve"> </a:t>
+              <a:t> match </a:t>
             </a:r>
             <a:r>
               <a:rPr lang="fr-FR" sz="1200" b="0" i="0">
                 <a:solidFill>
-                  <a:srgbClr val="E4E4E4"/>
+                  <a:srgbClr val="C9A6FF"/>
                 </a:solidFill>
                 <a:latin typeface="Consolas"/>
                 <a:cs typeface="Consolas"/>
               </a:rPr>
-              <a:t xml:space="preserve">match</a:t>
+              <a:t>in</a:t>
             </a:r>
             <a:r>
               <a:rPr lang="fr-FR" sz="1200" b="0" i="0">
@@ -11339,17 +11938,17 @@
                 <a:latin typeface="Consolas"/>
                 <a:cs typeface="Consolas"/>
               </a:rPr>
-              <a:t xml:space="preserve"> </a:t>
+              <a:t> re.</a:t>
             </a:r>
             <a:r>
               <a:rPr lang="fr-FR" sz="1200" b="0" i="0">
                 <a:solidFill>
-                  <a:srgbClr val="C9A6FF"/>
+                  <a:srgbClr val="6CCFE6"/>
                 </a:solidFill>
                 <a:latin typeface="Consolas"/>
                 <a:cs typeface="Consolas"/>
               </a:rPr>
-              <a:t xml:space="preserve">in</a:t>
+              <a:t>finditer</a:t>
             </a:r>
             <a:r>
               <a:rPr lang="fr-FR" sz="1200" b="0" i="0">
@@ -11359,17 +11958,17 @@
                 <a:latin typeface="Consolas"/>
                 <a:cs typeface="Consolas"/>
               </a:rPr>
-              <a:t xml:space="preserve"> </a:t>
+              <a:t>(</a:t>
             </a:r>
             <a:r>
               <a:rPr lang="fr-FR" sz="1200" b="0" i="0">
                 <a:solidFill>
-                  <a:srgbClr val="E4E4E4"/>
+                  <a:srgbClr val="F0A46A"/>
                 </a:solidFill>
                 <a:latin typeface="Consolas"/>
                 <a:cs typeface="Consolas"/>
               </a:rPr>
-              <a:t xml:space="preserve">re</a:t>
+              <a:t>r"\S+"</a:t>
             </a:r>
             <a:r>
               <a:rPr lang="fr-FR" sz="1200" b="0" i="0">
@@ -11379,18 +11978,31 @@
                 <a:latin typeface="Consolas"/>
                 <a:cs typeface="Consolas"/>
               </a:rPr>
-              <a:t xml:space="preserve">.</a:t>
+              <a:t>, phrase):  </a:t>
             </a:r>
             <a:r>
               <a:rPr lang="fr-FR" sz="1200" b="0" i="0">
                 <a:solidFill>
-                  <a:srgbClr val="6CCFE6"/>
+                  <a:srgbClr val="8D949D"/>
                 </a:solidFill>
                 <a:latin typeface="Consolas"/>
                 <a:cs typeface="Consolas"/>
               </a:rPr>
-              <a:t xml:space="preserve">finditer</a:t>
-            </a:r>
+              <a:t>  # un mot = une suite sans espace</a:t>
+            </a:r>
+          </a:p>
+          <a:p>
+            <a:pPr>
+              <a:lnSpc>
+                <a:spcPct val="150000"/>
+              </a:lnSpc>
+              <a:spcBef>
+                <a:spcPts val="0"/>
+              </a:spcBef>
+              <a:spcAft>
+                <a:spcPts val="0"/>
+              </a:spcAft>
+            </a:pPr>
             <a:r>
               <a:rPr lang="fr-FR" sz="1200" b="0" i="0">
                 <a:solidFill>
@@ -11399,17 +12011,17 @@
                 <a:latin typeface="Consolas"/>
                 <a:cs typeface="Consolas"/>
               </a:rPr>
-              <a:t xml:space="preserve">(</a:t>
+              <a:t>    start = offset + match.</a:t>
             </a:r>
             <a:r>
               <a:rPr lang="fr-FR" sz="1200" b="0" i="0">
                 <a:solidFill>
-                  <a:srgbClr val="F0A46A"/>
+                  <a:srgbClr val="6CCFE6"/>
                 </a:solidFill>
                 <a:latin typeface="Consolas"/>
                 <a:cs typeface="Consolas"/>
               </a:rPr>
-              <a:t xml:space="preserve">r"\S+"</a:t>
+              <a:t>start</a:t>
             </a:r>
             <a:r>
               <a:rPr lang="fr-FR" sz="1200" b="0" i="0">
@@ -11419,240 +12031,17 @@
                 <a:latin typeface="Consolas"/>
                 <a:cs typeface="Consolas"/>
               </a:rPr>
-              <a:t xml:space="preserve">,</a:t>
+              <a:t>()         </a:t>
             </a:r>
             <a:r>
               <a:rPr lang="fr-FR" sz="1200" b="0" i="0">
                 <a:solidFill>
-                  <a:srgbClr val="E4E4E4"/>
+                  <a:srgbClr val="8D949D"/>
                 </a:solidFill>
                 <a:latin typeface="Consolas"/>
                 <a:cs typeface="Consolas"/>
               </a:rPr>
-              <a:t xml:space="preserve"> </a:t>
-            </a:r>
-            <a:r>
-              <a:rPr lang="fr-FR" sz="1200" b="0" i="0">
-                <a:solidFill>
-                  <a:srgbClr val="E4E4E4"/>
-                </a:solidFill>
-                <a:latin typeface="Consolas"/>
-                <a:cs typeface="Consolas"/>
-              </a:rPr>
-              <a:t xml:space="preserve">phrase</a:t>
-            </a:r>
-            <a:r>
-              <a:rPr lang="fr-FR" sz="1200" b="0" i="0">
-                <a:solidFill>
-                  <a:srgbClr val="E4E4E4"/>
-                </a:solidFill>
-                <a:latin typeface="Consolas"/>
-                <a:cs typeface="Consolas"/>
-              </a:rPr>
-              <a:t xml:space="preserve">)</a:t>
-            </a:r>
-            <a:r>
-              <a:rPr lang="fr-FR" sz="1200" b="0" i="0">
-                <a:solidFill>
-                  <a:srgbClr val="E4E4E4"/>
-                </a:solidFill>
-                <a:latin typeface="Consolas"/>
-                <a:cs typeface="Consolas"/>
-              </a:rPr>
-              <a:t xml:space="preserve">:</a:t>
-            </a:r>
-            <a:r>
-              <a:rPr lang="fr-FR" sz="1200" b="0" i="0">
-                <a:solidFill>
-                  <a:srgbClr val="E4E4E4"/>
-                </a:solidFill>
-                <a:latin typeface="Consolas"/>
-                <a:cs typeface="Consolas"/>
-              </a:rPr>
-              <a:t xml:space="preserve">  </a:t>
-            </a:r>
-            <a:r>
-              <a:rPr lang="fr-FR" sz="1200" b="0" i="0">
-                <a:solidFill>
-                  <a:srgbClr val="8D949D"/>
-                </a:solidFill>
-                <a:latin typeface="Consolas"/>
-                <a:cs typeface="Consolas"/>
-              </a:rPr>
-              <a:t xml:space="preserve">  # un mot = une suite sans espace</a:t>
-            </a:r>
-          </a:p>
-          <a:p>
-            <a:pPr>
-              <a:lnSpc>
-                <a:spcPct val="150000"/>
-              </a:lnSpc>
-              <a:spcBef>
-                <a:spcPts val="0"/>
-              </a:spcBef>
-              <a:spcAft>
-                <a:spcPts val="0"/>
-              </a:spcAft>
-            </a:pPr>
-            <a:r>
-              <a:rPr lang="fr-FR" sz="1200" b="0" i="0">
-                <a:solidFill>
-                  <a:srgbClr val="E4E4E4"/>
-                </a:solidFill>
-                <a:latin typeface="Consolas"/>
-                <a:cs typeface="Consolas"/>
-              </a:rPr>
-              <a:t xml:space="preserve">    </a:t>
-            </a:r>
-            <a:r>
-              <a:rPr lang="fr-FR" sz="1200" b="0" i="0">
-                <a:solidFill>
-                  <a:srgbClr val="E4E4E4"/>
-                </a:solidFill>
-                <a:latin typeface="Consolas"/>
-                <a:cs typeface="Consolas"/>
-              </a:rPr>
-              <a:t xml:space="preserve">start</a:t>
-            </a:r>
-            <a:r>
-              <a:rPr lang="fr-FR" sz="1200" b="0" i="0">
-                <a:solidFill>
-                  <a:srgbClr val="E4E4E4"/>
-                </a:solidFill>
-                <a:latin typeface="Consolas"/>
-                <a:cs typeface="Consolas"/>
-              </a:rPr>
-              <a:t xml:space="preserve"> </a:t>
-            </a:r>
-            <a:r>
-              <a:rPr lang="fr-FR" sz="1200" b="0" i="0">
-                <a:solidFill>
-                  <a:srgbClr val="E4E4E4"/>
-                </a:solidFill>
-                <a:latin typeface="Consolas"/>
-                <a:cs typeface="Consolas"/>
-              </a:rPr>
-              <a:t xml:space="preserve">=</a:t>
-            </a:r>
-            <a:r>
-              <a:rPr lang="fr-FR" sz="1200" b="0" i="0">
-                <a:solidFill>
-                  <a:srgbClr val="E4E4E4"/>
-                </a:solidFill>
-                <a:latin typeface="Consolas"/>
-                <a:cs typeface="Consolas"/>
-              </a:rPr>
-              <a:t xml:space="preserve"> </a:t>
-            </a:r>
-            <a:r>
-              <a:rPr lang="fr-FR" sz="1200" b="0" i="0">
-                <a:solidFill>
-                  <a:srgbClr val="E4E4E4"/>
-                </a:solidFill>
-                <a:latin typeface="Consolas"/>
-                <a:cs typeface="Consolas"/>
-              </a:rPr>
-              <a:t xml:space="preserve">offset</a:t>
-            </a:r>
-            <a:r>
-              <a:rPr lang="fr-FR" sz="1200" b="0" i="0">
-                <a:solidFill>
-                  <a:srgbClr val="E4E4E4"/>
-                </a:solidFill>
-                <a:latin typeface="Consolas"/>
-                <a:cs typeface="Consolas"/>
-              </a:rPr>
-              <a:t xml:space="preserve"> </a:t>
-            </a:r>
-            <a:r>
-              <a:rPr lang="fr-FR" sz="1200" b="0" i="0">
-                <a:solidFill>
-                  <a:srgbClr val="E4E4E4"/>
-                </a:solidFill>
-                <a:latin typeface="Consolas"/>
-                <a:cs typeface="Consolas"/>
-              </a:rPr>
-              <a:t xml:space="preserve">+</a:t>
-            </a:r>
-            <a:r>
-              <a:rPr lang="fr-FR" sz="1200" b="0" i="0">
-                <a:solidFill>
-                  <a:srgbClr val="E4E4E4"/>
-                </a:solidFill>
-                <a:latin typeface="Consolas"/>
-                <a:cs typeface="Consolas"/>
-              </a:rPr>
-              <a:t xml:space="preserve"> </a:t>
-            </a:r>
-            <a:r>
-              <a:rPr lang="fr-FR" sz="1200" b="0" i="0">
-                <a:solidFill>
-                  <a:srgbClr val="E4E4E4"/>
-                </a:solidFill>
-                <a:latin typeface="Consolas"/>
-                <a:cs typeface="Consolas"/>
-              </a:rPr>
-              <a:t xml:space="preserve">match</a:t>
-            </a:r>
-            <a:r>
-              <a:rPr lang="fr-FR" sz="1200" b="0" i="0">
-                <a:solidFill>
-                  <a:srgbClr val="E4E4E4"/>
-                </a:solidFill>
-                <a:latin typeface="Consolas"/>
-                <a:cs typeface="Consolas"/>
-              </a:rPr>
-              <a:t xml:space="preserve">.</a:t>
-            </a:r>
-            <a:r>
-              <a:rPr lang="fr-FR" sz="1200" b="0" i="0">
-                <a:solidFill>
-                  <a:srgbClr val="6CCFE6"/>
-                </a:solidFill>
-                <a:latin typeface="Consolas"/>
-                <a:cs typeface="Consolas"/>
-              </a:rPr>
-              <a:t xml:space="preserve">start</a:t>
-            </a:r>
-            <a:r>
-              <a:rPr lang="fr-FR" sz="1200" b="0" i="0">
-                <a:solidFill>
-                  <a:srgbClr val="E4E4E4"/>
-                </a:solidFill>
-                <a:latin typeface="Consolas"/>
-                <a:cs typeface="Consolas"/>
-              </a:rPr>
-              <a:t xml:space="preserve">(</a:t>
-            </a:r>
-            <a:r>
-              <a:rPr lang="fr-FR" sz="1200" b="0" i="0">
-                <a:solidFill>
-                  <a:srgbClr val="E4E4E4"/>
-                </a:solidFill>
-                <a:latin typeface="Consolas"/>
-                <a:cs typeface="Consolas"/>
-              </a:rPr>
-              <a:t xml:space="preserve">)</a:t>
-            </a:r>
-            <a:r>
-              <a:rPr lang="fr-FR" sz="1200" b="0" i="0">
-                <a:solidFill>
-                  <a:srgbClr val="E4E4E4"/>
-                </a:solidFill>
-                <a:latin typeface="Consolas"/>
-                <a:cs typeface="Consolas"/>
-              </a:rPr>
-              <a:t xml:space="preserve">         </a:t>
-            </a:r>
-            <a:r>
-              <a:rPr lang="fr-FR" sz="1200" b="0" i="0">
-                <a:solidFill>
-                  <a:srgbClr val="8D949D"/>
-                </a:solidFill>
-                <a:latin typeface="Consolas"/>
-                <a:cs typeface="Consolas"/>
-              </a:rPr>
-              <a:t xml:space="preserve">  # reportée, jamais cherchée</a:t>
+              <a:t>  # reportée, jamais cherchée</a:t>
             </a:r>
           </a:p>
         </p:txBody>
@@ -16369,7 +16758,7 @@
                 <a:latin typeface="Consolas"/>
                 <a:cs typeface="Consolas"/>
               </a:rPr>
-              <a:t xml:space="preserve">for</a:t>
+              <a:t>for</a:t>
             </a:r>
             <a:r>
               <a:rPr lang="fr-FR" sz="1350" b="0" i="0">
@@ -16379,17 +16768,17 @@
                 <a:latin typeface="Consolas"/>
                 <a:cs typeface="Consolas"/>
               </a:rPr>
-              <a:t xml:space="preserve"> </a:t>
+              <a:t> aux </a:t>
             </a:r>
             <a:r>
               <a:rPr lang="fr-FR" sz="1350" b="0" i="0">
                 <a:solidFill>
-                  <a:srgbClr val="E4E4E4"/>
+                  <a:srgbClr val="C9A6FF"/>
                 </a:solidFill>
                 <a:latin typeface="Consolas"/>
                 <a:cs typeface="Consolas"/>
               </a:rPr>
-              <a:t xml:space="preserve">aux</a:t>
+              <a:t>in</a:t>
             </a:r>
             <a:r>
               <a:rPr lang="fr-FR" sz="1350" b="0" i="0">
@@ -16399,27 +16788,40 @@
                 <a:latin typeface="Consolas"/>
                 <a:cs typeface="Consolas"/>
               </a:rPr>
-              <a:t xml:space="preserve"> </a:t>
-            </a:r>
+              <a:t> phrase.analyse:</a:t>
+            </a:r>
+          </a:p>
+          <a:p>
+            <a:pPr>
+              <a:lnSpc>
+                <a:spcPct val="150000"/>
+              </a:lnSpc>
+              <a:spcBef>
+                <a:spcPts val="0"/>
+              </a:spcBef>
+              <a:spcAft>
+                <a:spcPts val="0"/>
+              </a:spcAft>
+            </a:pPr>
             <a:r>
               <a:rPr lang="fr-FR" sz="1350" b="0" i="0">
                 <a:solidFill>
-                  <a:srgbClr val="C9A6FF"/>
+                  <a:srgbClr val="E4E4E4"/>
                 </a:solidFill>
                 <a:latin typeface="Consolas"/>
                 <a:cs typeface="Consolas"/>
               </a:rPr>
-              <a:t xml:space="preserve">in</a:t>
+              <a:t>    </a:t>
             </a:r>
             <a:r>
               <a:rPr lang="fr-FR" sz="1350" b="0" i="0">
                 <a:solidFill>
-                  <a:srgbClr val="E4E4E4"/>
+                  <a:srgbClr val="C9A6FF"/>
                 </a:solidFill>
                 <a:latin typeface="Consolas"/>
                 <a:cs typeface="Consolas"/>
               </a:rPr>
-              <a:t xml:space="preserve"> </a:t>
+              <a:t>if</a:t>
             </a:r>
             <a:r>
               <a:rPr lang="fr-FR" sz="1350" b="0" i="0">
@@ -16429,17 +16831,17 @@
                 <a:latin typeface="Consolas"/>
                 <a:cs typeface="Consolas"/>
               </a:rPr>
-              <a:t xml:space="preserve">phrase</a:t>
+              <a:t> aux.fonction </a:t>
             </a:r>
             <a:r>
               <a:rPr lang="fr-FR" sz="1350" b="0" i="0">
                 <a:solidFill>
-                  <a:srgbClr val="E4E4E4"/>
+                  <a:srgbClr val="C9A6FF"/>
                 </a:solidFill>
                 <a:latin typeface="Consolas"/>
                 <a:cs typeface="Consolas"/>
               </a:rPr>
-              <a:t xml:space="preserve">.</a:t>
+              <a:t>not</a:t>
             </a:r>
             <a:r>
               <a:rPr lang="fr-FR" sz="1350" b="0" i="0">
@@ -16449,31 +16851,18 @@
                 <a:latin typeface="Consolas"/>
                 <a:cs typeface="Consolas"/>
               </a:rPr>
-              <a:t xml:space="preserve">analyse</a:t>
+              <a:t> </a:t>
             </a:r>
             <a:r>
               <a:rPr lang="fr-FR" sz="1350" b="0" i="0">
                 <a:solidFill>
-                  <a:srgbClr val="E4E4E4"/>
+                  <a:srgbClr val="C9A6FF"/>
                 </a:solidFill>
                 <a:latin typeface="Consolas"/>
                 <a:cs typeface="Consolas"/>
               </a:rPr>
-              <a:t xml:space="preserve">:</a:t>
-            </a:r>
-          </a:p>
-          <a:p>
-            <a:pPr>
-              <a:lnSpc>
-                <a:spcPct val="150000"/>
-              </a:lnSpc>
-              <a:spcBef>
-                <a:spcPts val="0"/>
-              </a:spcBef>
-              <a:spcAft>
-                <a:spcPts val="0"/>
-              </a:spcAft>
-            </a:pPr>
+              <a:t>in</a:t>
+            </a:r>
             <a:r>
               <a:rPr lang="fr-FR" sz="1350" b="0" i="0">
                 <a:solidFill>
@@ -16482,17 +16871,17 @@
                 <a:latin typeface="Consolas"/>
                 <a:cs typeface="Consolas"/>
               </a:rPr>
-              <a:t xml:space="preserve">    </a:t>
+              <a:t> {</a:t>
             </a:r>
             <a:r>
               <a:rPr lang="fr-FR" sz="1350" b="0" i="0">
                 <a:solidFill>
-                  <a:srgbClr val="C9A6FF"/>
+                  <a:srgbClr val="F0A46A"/>
                 </a:solidFill>
                 <a:latin typeface="Consolas"/>
                 <a:cs typeface="Consolas"/>
               </a:rPr>
-              <a:t xml:space="preserve">if</a:t>
+              <a:t>"aux:pass"</a:t>
             </a:r>
             <a:r>
               <a:rPr lang="fr-FR" sz="1350" b="0" i="0">
@@ -16502,17 +16891,17 @@
                 <a:latin typeface="Consolas"/>
                 <a:cs typeface="Consolas"/>
               </a:rPr>
-              <a:t xml:space="preserve"> </a:t>
+              <a:t>, </a:t>
             </a:r>
             <a:r>
               <a:rPr lang="fr-FR" sz="1350" b="0" i="0">
                 <a:solidFill>
-                  <a:srgbClr val="E4E4E4"/>
+                  <a:srgbClr val="F0A46A"/>
                 </a:solidFill>
                 <a:latin typeface="Consolas"/>
                 <a:cs typeface="Consolas"/>
               </a:rPr>
-              <a:t xml:space="preserve">aux</a:t>
+              <a:t>"cop"</a:t>
             </a:r>
             <a:r>
               <a:rPr lang="fr-FR" sz="1350" b="0" i="0">
@@ -16522,17 +16911,17 @@
                 <a:latin typeface="Consolas"/>
                 <a:cs typeface="Consolas"/>
               </a:rPr>
-              <a:t xml:space="preserve">.</a:t>
+              <a:t>}:  </a:t>
             </a:r>
             <a:r>
               <a:rPr lang="fr-FR" sz="1350" b="0" i="0">
                 <a:solidFill>
-                  <a:srgbClr val="E4E4E4"/>
+                  <a:srgbClr val="C9A6FF"/>
                 </a:solidFill>
                 <a:latin typeface="Consolas"/>
                 <a:cs typeface="Consolas"/>
               </a:rPr>
-              <a:t xml:space="preserve">fonction</a:t>
+              <a:t>continue</a:t>
             </a:r>
             <a:r>
               <a:rPr lang="fr-FR" sz="1350" b="0" i="0">
@@ -16542,18 +16931,31 @@
                 <a:latin typeface="Consolas"/>
                 <a:cs typeface="Consolas"/>
               </a:rPr>
-              <a:t xml:space="preserve"> </a:t>
+              <a:t> </a:t>
             </a:r>
             <a:r>
               <a:rPr lang="fr-FR" sz="1350" b="0" i="0">
                 <a:solidFill>
-                  <a:srgbClr val="C9A6FF"/>
+                  <a:srgbClr val="8D949D"/>
                 </a:solidFill>
                 <a:latin typeface="Consolas"/>
                 <a:cs typeface="Consolas"/>
               </a:rPr>
-              <a:t xml:space="preserve">not</a:t>
-            </a:r>
+              <a:t>  # 1</a:t>
+            </a:r>
+          </a:p>
+          <a:p>
+            <a:pPr>
+              <a:lnSpc>
+                <a:spcPct val="150000"/>
+              </a:lnSpc>
+              <a:spcBef>
+                <a:spcPts val="0"/>
+              </a:spcBef>
+              <a:spcAft>
+                <a:spcPts val="0"/>
+              </a:spcAft>
+            </a:pPr>
             <a:r>
               <a:rPr lang="fr-FR" sz="1350" b="0" i="0">
                 <a:solidFill>
@@ -16562,18 +16964,31 @@
                 <a:latin typeface="Consolas"/>
                 <a:cs typeface="Consolas"/>
               </a:rPr>
-              <a:t xml:space="preserve"> </a:t>
+              <a:t>    participe = phrase.analyse[aux.gouverneur]            </a:t>
             </a:r>
             <a:r>
               <a:rPr lang="fr-FR" sz="1350" b="0" i="0">
                 <a:solidFill>
-                  <a:srgbClr val="C9A6FF"/>
+                  <a:srgbClr val="8D949D"/>
                 </a:solidFill>
                 <a:latin typeface="Consolas"/>
                 <a:cs typeface="Consolas"/>
               </a:rPr>
-              <a:t xml:space="preserve">in</a:t>
-            </a:r>
+              <a:t>  # 2</a:t>
+            </a:r>
+          </a:p>
+          <a:p>
+            <a:pPr>
+              <a:lnSpc>
+                <a:spcPct val="150000"/>
+              </a:lnSpc>
+              <a:spcBef>
+                <a:spcPts val="0"/>
+              </a:spcBef>
+              <a:spcAft>
+                <a:spcPts val="0"/>
+              </a:spcAft>
+            </a:pPr>
             <a:r>
               <a:rPr lang="fr-FR" sz="1350" b="0" i="0">
                 <a:solidFill>
@@ -16582,37 +16997,37 @@
                 <a:latin typeface="Consolas"/>
                 <a:cs typeface="Consolas"/>
               </a:rPr>
-              <a:t xml:space="preserve"> </a:t>
+              <a:t>    </a:t>
             </a:r>
             <a:r>
               <a:rPr lang="fr-FR" sz="1350" b="0" i="0">
                 <a:solidFill>
-                  <a:srgbClr val="E4E4E4"/>
+                  <a:srgbClr val="C9A6FF"/>
                 </a:solidFill>
                 <a:latin typeface="Consolas"/>
                 <a:cs typeface="Consolas"/>
               </a:rPr>
-              <a:t xml:space="preserve">{</a:t>
+              <a:t>if</a:t>
             </a:r>
             <a:r>
               <a:rPr lang="fr-FR" sz="1350" b="0" i="0">
                 <a:solidFill>
-                  <a:srgbClr val="F0A46A"/>
+                  <a:srgbClr val="E4E4E4"/>
                 </a:solidFill>
                 <a:latin typeface="Consolas"/>
                 <a:cs typeface="Consolas"/>
               </a:rPr>
-              <a:t xml:space="preserve">"aux:pass"</a:t>
+              <a:t> participe.categorie != </a:t>
             </a:r>
             <a:r>
               <a:rPr lang="fr-FR" sz="1350" b="0" i="0">
                 <a:solidFill>
-                  <a:srgbClr val="E4E4E4"/>
+                  <a:srgbClr val="F0A46A"/>
                 </a:solidFill>
                 <a:latin typeface="Consolas"/>
                 <a:cs typeface="Consolas"/>
               </a:rPr>
-              <a:t xml:space="preserve">,</a:t>
+              <a:t>"VERB"</a:t>
             </a:r>
             <a:r>
               <a:rPr lang="fr-FR" sz="1350" b="0" i="0">
@@ -16622,17 +17037,17 @@
                 <a:latin typeface="Consolas"/>
                 <a:cs typeface="Consolas"/>
               </a:rPr>
-              <a:t xml:space="preserve"> </a:t>
+              <a:t>:            </a:t>
             </a:r>
             <a:r>
               <a:rPr lang="fr-FR" sz="1350" b="0" i="0">
                 <a:solidFill>
-                  <a:srgbClr val="F0A46A"/>
+                  <a:srgbClr val="C9A6FF"/>
                 </a:solidFill>
                 <a:latin typeface="Consolas"/>
                 <a:cs typeface="Consolas"/>
               </a:rPr>
-              <a:t xml:space="preserve">"cop"</a:t>
+              <a:t>continue</a:t>
             </a:r>
             <a:r>
               <a:rPr lang="fr-FR" sz="1350" b="0" i="0">
@@ -16642,18 +17057,31 @@
                 <a:latin typeface="Consolas"/>
                 <a:cs typeface="Consolas"/>
               </a:rPr>
-              <a:t xml:space="preserve">}</a:t>
+              <a:t> </a:t>
             </a:r>
             <a:r>
               <a:rPr lang="fr-FR" sz="1350" b="0" i="0">
                 <a:solidFill>
-                  <a:srgbClr val="E4E4E4"/>
+                  <a:srgbClr val="8D949D"/>
                 </a:solidFill>
                 <a:latin typeface="Consolas"/>
                 <a:cs typeface="Consolas"/>
               </a:rPr>
-              <a:t xml:space="preserve">:</a:t>
-            </a:r>
+              <a:t>  # 3</a:t>
+            </a:r>
+          </a:p>
+          <a:p>
+            <a:pPr>
+              <a:lnSpc>
+                <a:spcPct val="150000"/>
+              </a:lnSpc>
+              <a:spcBef>
+                <a:spcPts val="0"/>
+              </a:spcBef>
+              <a:spcAft>
+                <a:spcPts val="0"/>
+              </a:spcAft>
+            </a:pPr>
             <a:r>
               <a:rPr lang="fr-FR" sz="1350" b="0" i="0">
                 <a:solidFill>
@@ -16662,7 +17090,7 @@
                 <a:latin typeface="Consolas"/>
                 <a:cs typeface="Consolas"/>
               </a:rPr>
-              <a:t xml:space="preserve">  </a:t>
+              <a:t>    </a:t>
             </a:r>
             <a:r>
               <a:rPr lang="fr-FR" sz="1350" b="0" i="0">
@@ -16672,7 +17100,7 @@
                 <a:latin typeface="Consolas"/>
                 <a:cs typeface="Consolas"/>
               </a:rPr>
-              <a:t xml:space="preserve">continue</a:t>
+              <a:t>if</a:t>
             </a:r>
             <a:r>
               <a:rPr lang="fr-FR" sz="1350" b="0" i="0">
@@ -16682,31 +17110,18 @@
                 <a:latin typeface="Consolas"/>
                 <a:cs typeface="Consolas"/>
               </a:rPr>
-              <a:t xml:space="preserve"> </a:t>
+              <a:t> participe.lemme </a:t>
             </a:r>
             <a:r>
               <a:rPr lang="fr-FR" sz="1350" b="0" i="0">
                 <a:solidFill>
-                  <a:srgbClr val="8D949D"/>
+                  <a:srgbClr val="C9A6FF"/>
                 </a:solidFill>
                 <a:latin typeface="Consolas"/>
                 <a:cs typeface="Consolas"/>
               </a:rPr>
-              <a:t xml:space="preserve">  # 1</a:t>
-            </a:r>
-          </a:p>
-          <a:p>
-            <a:pPr>
-              <a:lnSpc>
-                <a:spcPct val="150000"/>
-              </a:lnSpc>
-              <a:spcBef>
-                <a:spcPts val="0"/>
-              </a:spcBef>
-              <a:spcAft>
-                <a:spcPts val="0"/>
-              </a:spcAft>
-            </a:pPr>
+              <a:t>in</a:t>
+            </a:r>
             <a:r>
               <a:rPr lang="fr-FR" sz="1350" b="0" i="0">
                 <a:solidFill>
@@ -16715,17 +17130,17 @@
                 <a:latin typeface="Consolas"/>
                 <a:cs typeface="Consolas"/>
               </a:rPr>
-              <a:t xml:space="preserve">    </a:t>
+              <a:t> verbes_etre:           </a:t>
             </a:r>
             <a:r>
               <a:rPr lang="fr-FR" sz="1350" b="0" i="0">
                 <a:solidFill>
-                  <a:srgbClr val="E4E4E4"/>
+                  <a:srgbClr val="C9A6FF"/>
                 </a:solidFill>
                 <a:latin typeface="Consolas"/>
                 <a:cs typeface="Consolas"/>
               </a:rPr>
-              <a:t xml:space="preserve">participe</a:t>
+              <a:t>continue</a:t>
             </a:r>
             <a:r>
               <a:rPr lang="fr-FR" sz="1350" b="0" i="0">
@@ -16735,18 +17150,31 @@
                 <a:latin typeface="Consolas"/>
                 <a:cs typeface="Consolas"/>
               </a:rPr>
-              <a:t xml:space="preserve"> </a:t>
+              <a:t> </a:t>
             </a:r>
             <a:r>
               <a:rPr lang="fr-FR" sz="1350" b="0" i="0">
                 <a:solidFill>
-                  <a:srgbClr val="E4E4E4"/>
+                  <a:srgbClr val="8D949D"/>
                 </a:solidFill>
                 <a:latin typeface="Consolas"/>
                 <a:cs typeface="Consolas"/>
               </a:rPr>
-              <a:t xml:space="preserve">=</a:t>
-            </a:r>
+              <a:t>  # 4</a:t>
+            </a:r>
+          </a:p>
+          <a:p>
+            <a:pPr>
+              <a:lnSpc>
+                <a:spcPct val="150000"/>
+              </a:lnSpc>
+              <a:spcBef>
+                <a:spcPts val="0"/>
+              </a:spcBef>
+              <a:spcAft>
+                <a:spcPts val="0"/>
+              </a:spcAft>
+            </a:pPr>
             <a:r>
               <a:rPr lang="fr-FR" sz="1350" b="0" i="0">
                 <a:solidFill>
@@ -16755,17 +17183,17 @@
                 <a:latin typeface="Consolas"/>
                 <a:cs typeface="Consolas"/>
               </a:rPr>
-              <a:t xml:space="preserve"> </a:t>
+              <a:t>    agent = </a:t>
             </a:r>
             <a:r>
               <a:rPr lang="fr-FR" sz="1350" b="0" i="0">
                 <a:solidFill>
-                  <a:srgbClr val="E4E4E4"/>
+                  <a:srgbClr val="6CCFE6"/>
                 </a:solidFill>
                 <a:latin typeface="Consolas"/>
                 <a:cs typeface="Consolas"/>
               </a:rPr>
-              <a:t xml:space="preserve">phrase</a:t>
+              <a:t>any</a:t>
             </a:r>
             <a:r>
               <a:rPr lang="fr-FR" sz="1350" b="0" i="0">
@@ -16775,17 +17203,17 @@
                 <a:latin typeface="Consolas"/>
                 <a:cs typeface="Consolas"/>
               </a:rPr>
-              <a:t xml:space="preserve">.</a:t>
+              <a:t>(t.fonction == </a:t>
             </a:r>
             <a:r>
               <a:rPr lang="fr-FR" sz="1350" b="0" i="0">
                 <a:solidFill>
-                  <a:srgbClr val="E4E4E4"/>
+                  <a:srgbClr val="F0A46A"/>
                 </a:solidFill>
                 <a:latin typeface="Consolas"/>
                 <a:cs typeface="Consolas"/>
               </a:rPr>
-              <a:t xml:space="preserve">analyse</a:t>
+              <a:t>"obl:agent"</a:t>
             </a:r>
             <a:r>
               <a:rPr lang="fr-FR" sz="1350" b="0" i="0">
@@ -16795,650 +17223,31 @@
                 <a:latin typeface="Consolas"/>
                 <a:cs typeface="Consolas"/>
               </a:rPr>
-              <a:t xml:space="preserve">[</a:t>
+              <a:t> ...)            </a:t>
             </a:r>
             <a:r>
               <a:rPr lang="fr-FR" sz="1350" b="0" i="0">
                 <a:solidFill>
-                  <a:srgbClr val="E4E4E4"/>
+                  <a:srgbClr val="8D949D"/>
                 </a:solidFill>
                 <a:latin typeface="Consolas"/>
                 <a:cs typeface="Consolas"/>
               </a:rPr>
-              <a:t xml:space="preserve">aux</a:t>
-            </a:r>
-            <a:r>
-              <a:rPr lang="fr-FR" sz="1350" b="0" i="0">
-                <a:solidFill>
-                  <a:srgbClr val="E4E4E4"/>
-                </a:solidFill>
-                <a:latin typeface="Consolas"/>
-                <a:cs typeface="Consolas"/>
-              </a:rPr>
-              <a:t xml:space="preserve">.</a:t>
-            </a:r>
-            <a:r>
-              <a:rPr lang="fr-FR" sz="1350" b="0" i="0">
-                <a:solidFill>
-                  <a:srgbClr val="E4E4E4"/>
-                </a:solidFill>
-                <a:latin typeface="Consolas"/>
-                <a:cs typeface="Consolas"/>
-              </a:rPr>
-              <a:t xml:space="preserve">gouverneur</a:t>
-            </a:r>
-            <a:r>
-              <a:rPr lang="fr-FR" sz="1350" b="0" i="0">
-                <a:solidFill>
-                  <a:srgbClr val="E4E4E4"/>
-                </a:solidFill>
-                <a:latin typeface="Consolas"/>
-                <a:cs typeface="Consolas"/>
-              </a:rPr>
-              <a:t xml:space="preserve">]</a:t>
-            </a:r>
-            <a:r>
-              <a:rPr lang="fr-FR" sz="1350" b="0" i="0">
-                <a:solidFill>
-                  <a:srgbClr val="E4E4E4"/>
-                </a:solidFill>
-                <a:latin typeface="Consolas"/>
-                <a:cs typeface="Consolas"/>
-              </a:rPr>
-              <a:t xml:space="preserve">            </a:t>
-            </a:r>
-            <a:r>
-              <a:rPr lang="fr-FR" sz="1350" b="0" i="0">
-                <a:solidFill>
-                  <a:srgbClr val="8D949D"/>
-                </a:solidFill>
-                <a:latin typeface="Consolas"/>
-                <a:cs typeface="Consolas"/>
-              </a:rPr>
-              <a:t xml:space="preserve">  # 2</a:t>
-            </a:r>
-          </a:p>
-          <a:p>
-            <a:pPr>
-              <a:lnSpc>
-                <a:spcPct val="150000"/>
-              </a:lnSpc>
-              <a:spcBef>
-                <a:spcPts val="0"/>
-              </a:spcBef>
-              <a:spcAft>
-                <a:spcPts val="0"/>
-              </a:spcAft>
-            </a:pPr>
-            <a:r>
-              <a:rPr lang="fr-FR" sz="1350" b="0" i="0">
-                <a:solidFill>
-                  <a:srgbClr val="E4E4E4"/>
-                </a:solidFill>
-                <a:latin typeface="Consolas"/>
-                <a:cs typeface="Consolas"/>
-              </a:rPr>
-              <a:t xml:space="preserve">    </a:t>
-            </a:r>
-            <a:r>
-              <a:rPr lang="fr-FR" sz="1350" b="0" i="0">
-                <a:solidFill>
-                  <a:srgbClr val="C9A6FF"/>
-                </a:solidFill>
-                <a:latin typeface="Consolas"/>
-                <a:cs typeface="Consolas"/>
-              </a:rPr>
-              <a:t xml:space="preserve">if</a:t>
-            </a:r>
-            <a:r>
-              <a:rPr lang="fr-FR" sz="1350" b="0" i="0">
-                <a:solidFill>
-                  <a:srgbClr val="E4E4E4"/>
-                </a:solidFill>
-                <a:latin typeface="Consolas"/>
-                <a:cs typeface="Consolas"/>
-              </a:rPr>
-              <a:t xml:space="preserve"> </a:t>
-            </a:r>
-            <a:r>
-              <a:rPr lang="fr-FR" sz="1350" b="0" i="0">
-                <a:solidFill>
-                  <a:srgbClr val="E4E4E4"/>
-                </a:solidFill>
-                <a:latin typeface="Consolas"/>
-                <a:cs typeface="Consolas"/>
-              </a:rPr>
-              <a:t xml:space="preserve">participe</a:t>
-            </a:r>
-            <a:r>
-              <a:rPr lang="fr-FR" sz="1350" b="0" i="0">
-                <a:solidFill>
-                  <a:srgbClr val="E4E4E4"/>
-                </a:solidFill>
-                <a:latin typeface="Consolas"/>
-                <a:cs typeface="Consolas"/>
-              </a:rPr>
-              <a:t xml:space="preserve">.</a:t>
-            </a:r>
-            <a:r>
-              <a:rPr lang="fr-FR" sz="1350" b="0" i="0">
-                <a:solidFill>
-                  <a:srgbClr val="E4E4E4"/>
-                </a:solidFill>
-                <a:latin typeface="Consolas"/>
-                <a:cs typeface="Consolas"/>
-              </a:rPr>
-              <a:t xml:space="preserve">categorie</a:t>
-            </a:r>
-            <a:r>
-              <a:rPr lang="fr-FR" sz="1350" b="0" i="0">
-                <a:solidFill>
-                  <a:srgbClr val="E4E4E4"/>
-                </a:solidFill>
-                <a:latin typeface="Consolas"/>
-                <a:cs typeface="Consolas"/>
-              </a:rPr>
-              <a:t xml:space="preserve"> </a:t>
-            </a:r>
-            <a:r>
-              <a:rPr lang="fr-FR" sz="1350" b="0" i="0">
-                <a:solidFill>
-                  <a:srgbClr val="E4E4E4"/>
-                </a:solidFill>
-                <a:latin typeface="Consolas"/>
-                <a:cs typeface="Consolas"/>
-              </a:rPr>
-              <a:t xml:space="preserve">!</a:t>
-            </a:r>
-            <a:r>
-              <a:rPr lang="fr-FR" sz="1350" b="0" i="0">
-                <a:solidFill>
-                  <a:srgbClr val="E4E4E4"/>
-                </a:solidFill>
-                <a:latin typeface="Consolas"/>
-                <a:cs typeface="Consolas"/>
-              </a:rPr>
-              <a:t xml:space="preserve">=</a:t>
-            </a:r>
-            <a:r>
-              <a:rPr lang="fr-FR" sz="1350" b="0" i="0">
-                <a:solidFill>
-                  <a:srgbClr val="E4E4E4"/>
-                </a:solidFill>
-                <a:latin typeface="Consolas"/>
-                <a:cs typeface="Consolas"/>
-              </a:rPr>
-              <a:t xml:space="preserve"> </a:t>
-            </a:r>
-            <a:r>
-              <a:rPr lang="fr-FR" sz="1350" b="0" i="0">
-                <a:solidFill>
-                  <a:srgbClr val="F0A46A"/>
-                </a:solidFill>
-                <a:latin typeface="Consolas"/>
-                <a:cs typeface="Consolas"/>
-              </a:rPr>
-              <a:t xml:space="preserve">"VERB"</a:t>
-            </a:r>
-            <a:r>
-              <a:rPr lang="fr-FR" sz="1350" b="0" i="0">
-                <a:solidFill>
-                  <a:srgbClr val="E4E4E4"/>
-                </a:solidFill>
-                <a:latin typeface="Consolas"/>
-                <a:cs typeface="Consolas"/>
-              </a:rPr>
-              <a:t xml:space="preserve">:</a:t>
-            </a:r>
-            <a:r>
-              <a:rPr lang="fr-FR" sz="1350" b="0" i="0">
-                <a:solidFill>
-                  <a:srgbClr val="E4E4E4"/>
-                </a:solidFill>
-                <a:latin typeface="Consolas"/>
-                <a:cs typeface="Consolas"/>
-              </a:rPr>
-              <a:t xml:space="preserve">            </a:t>
-            </a:r>
-            <a:r>
-              <a:rPr lang="fr-FR" sz="1350" b="0" i="0">
-                <a:solidFill>
-                  <a:srgbClr val="C9A6FF"/>
-                </a:solidFill>
-                <a:latin typeface="Consolas"/>
-                <a:cs typeface="Consolas"/>
-              </a:rPr>
-              <a:t xml:space="preserve">continue</a:t>
-            </a:r>
-            <a:r>
-              <a:rPr lang="fr-FR" sz="1350" b="0" i="0">
-                <a:solidFill>
-                  <a:srgbClr val="E4E4E4"/>
-                </a:solidFill>
-                <a:latin typeface="Consolas"/>
-                <a:cs typeface="Consolas"/>
-              </a:rPr>
-              <a:t xml:space="preserve"> </a:t>
-            </a:r>
-            <a:r>
-              <a:rPr lang="fr-FR" sz="1350" b="0" i="0">
-                <a:solidFill>
-                  <a:srgbClr val="8D949D"/>
-                </a:solidFill>
-                <a:latin typeface="Consolas"/>
-                <a:cs typeface="Consolas"/>
-              </a:rPr>
-              <a:t xml:space="preserve">  # 3</a:t>
-            </a:r>
-          </a:p>
-          <a:p>
-            <a:pPr>
-              <a:lnSpc>
-                <a:spcPct val="150000"/>
-              </a:lnSpc>
-              <a:spcBef>
-                <a:spcPts val="0"/>
-              </a:spcBef>
-              <a:spcAft>
-                <a:spcPts val="0"/>
-              </a:spcAft>
-            </a:pPr>
-            <a:r>
-              <a:rPr lang="fr-FR" sz="1350" b="0" i="0">
-                <a:solidFill>
-                  <a:srgbClr val="E4E4E4"/>
-                </a:solidFill>
-                <a:latin typeface="Consolas"/>
-                <a:cs typeface="Consolas"/>
-              </a:rPr>
-              <a:t xml:space="preserve">    </a:t>
-            </a:r>
-            <a:r>
-              <a:rPr lang="fr-FR" sz="1350" b="0" i="0">
-                <a:solidFill>
-                  <a:srgbClr val="C9A6FF"/>
-                </a:solidFill>
-                <a:latin typeface="Consolas"/>
-                <a:cs typeface="Consolas"/>
-              </a:rPr>
-              <a:t xml:space="preserve">if</a:t>
-            </a:r>
-            <a:r>
-              <a:rPr lang="fr-FR" sz="1350" b="0" i="0">
-                <a:solidFill>
-                  <a:srgbClr val="E4E4E4"/>
-                </a:solidFill>
-                <a:latin typeface="Consolas"/>
-                <a:cs typeface="Consolas"/>
-              </a:rPr>
-              <a:t xml:space="preserve"> </a:t>
-            </a:r>
-            <a:r>
-              <a:rPr lang="fr-FR" sz="1350" b="0" i="0">
-                <a:solidFill>
-                  <a:srgbClr val="E4E4E4"/>
-                </a:solidFill>
-                <a:latin typeface="Consolas"/>
-                <a:cs typeface="Consolas"/>
-              </a:rPr>
-              <a:t xml:space="preserve">participe</a:t>
-            </a:r>
-            <a:r>
-              <a:rPr lang="fr-FR" sz="1350" b="0" i="0">
-                <a:solidFill>
-                  <a:srgbClr val="E4E4E4"/>
-                </a:solidFill>
-                <a:latin typeface="Consolas"/>
-                <a:cs typeface="Consolas"/>
-              </a:rPr>
-              <a:t xml:space="preserve">.</a:t>
-            </a:r>
-            <a:r>
-              <a:rPr lang="fr-FR" sz="1350" b="0" i="0">
-                <a:solidFill>
-                  <a:srgbClr val="E4E4E4"/>
-                </a:solidFill>
-                <a:latin typeface="Consolas"/>
-                <a:cs typeface="Consolas"/>
-              </a:rPr>
-              <a:t xml:space="preserve">lemme</a:t>
-            </a:r>
-            <a:r>
-              <a:rPr lang="fr-FR" sz="1350" b="0" i="0">
-                <a:solidFill>
-                  <a:srgbClr val="E4E4E4"/>
-                </a:solidFill>
-                <a:latin typeface="Consolas"/>
-                <a:cs typeface="Consolas"/>
-              </a:rPr>
-              <a:t xml:space="preserve"> </a:t>
-            </a:r>
-            <a:r>
-              <a:rPr lang="fr-FR" sz="1350" b="0" i="0">
-                <a:solidFill>
-                  <a:srgbClr val="C9A6FF"/>
-                </a:solidFill>
-                <a:latin typeface="Consolas"/>
-                <a:cs typeface="Consolas"/>
-              </a:rPr>
-              <a:t xml:space="preserve">in</a:t>
-            </a:r>
-            <a:r>
-              <a:rPr lang="fr-FR" sz="1350" b="0" i="0">
-                <a:solidFill>
-                  <a:srgbClr val="E4E4E4"/>
-                </a:solidFill>
-                <a:latin typeface="Consolas"/>
-                <a:cs typeface="Consolas"/>
-              </a:rPr>
-              <a:t xml:space="preserve"> </a:t>
-            </a:r>
-            <a:r>
-              <a:rPr lang="fr-FR" sz="1350" b="0" i="0">
-                <a:solidFill>
-                  <a:srgbClr val="E4E4E4"/>
-                </a:solidFill>
-                <a:latin typeface="Consolas"/>
-                <a:cs typeface="Consolas"/>
-              </a:rPr>
-              <a:t xml:space="preserve">verbes_etre</a:t>
-            </a:r>
-            <a:r>
-              <a:rPr lang="fr-FR" sz="1350" b="0" i="0">
-                <a:solidFill>
-                  <a:srgbClr val="E4E4E4"/>
-                </a:solidFill>
-                <a:latin typeface="Consolas"/>
-                <a:cs typeface="Consolas"/>
-              </a:rPr>
-              <a:t xml:space="preserve">:</a:t>
-            </a:r>
-            <a:r>
-              <a:rPr lang="fr-FR" sz="1350" b="0" i="0">
-                <a:solidFill>
-                  <a:srgbClr val="E4E4E4"/>
-                </a:solidFill>
-                <a:latin typeface="Consolas"/>
-                <a:cs typeface="Consolas"/>
-              </a:rPr>
-              <a:t xml:space="preserve">           </a:t>
-            </a:r>
-            <a:r>
-              <a:rPr lang="fr-FR" sz="1350" b="0" i="0">
-                <a:solidFill>
-                  <a:srgbClr val="C9A6FF"/>
-                </a:solidFill>
-                <a:latin typeface="Consolas"/>
-                <a:cs typeface="Consolas"/>
-              </a:rPr>
-              <a:t xml:space="preserve">continue</a:t>
-            </a:r>
-            <a:r>
-              <a:rPr lang="fr-FR" sz="1350" b="0" i="0">
-                <a:solidFill>
-                  <a:srgbClr val="E4E4E4"/>
-                </a:solidFill>
-                <a:latin typeface="Consolas"/>
-                <a:cs typeface="Consolas"/>
-              </a:rPr>
-              <a:t xml:space="preserve"> </a:t>
-            </a:r>
-            <a:r>
-              <a:rPr lang="fr-FR" sz="1350" b="0" i="0">
-                <a:solidFill>
-                  <a:srgbClr val="8D949D"/>
-                </a:solidFill>
-                <a:latin typeface="Consolas"/>
-                <a:cs typeface="Consolas"/>
-              </a:rPr>
-              <a:t xml:space="preserve">  # 4</a:t>
-            </a:r>
-          </a:p>
-          <a:p>
-            <a:pPr>
-              <a:lnSpc>
-                <a:spcPct val="150000"/>
-              </a:lnSpc>
-              <a:spcBef>
-                <a:spcPts val="0"/>
-              </a:spcBef>
-              <a:spcAft>
-                <a:spcPts val="0"/>
-              </a:spcAft>
-            </a:pPr>
-            <a:r>
-              <a:rPr lang="fr-FR" sz="1350" b="0" i="0">
-                <a:solidFill>
-                  <a:srgbClr val="E4E4E4"/>
-                </a:solidFill>
-                <a:latin typeface="Consolas"/>
-                <a:cs typeface="Consolas"/>
-              </a:rPr>
-              <a:t xml:space="preserve">    </a:t>
-            </a:r>
-            <a:r>
-              <a:rPr lang="fr-FR" sz="1350" b="0" i="0">
-                <a:solidFill>
-                  <a:srgbClr val="E4E4E4"/>
-                </a:solidFill>
-                <a:latin typeface="Consolas"/>
-                <a:cs typeface="Consolas"/>
-              </a:rPr>
-              <a:t xml:space="preserve">agent</a:t>
-            </a:r>
-            <a:r>
-              <a:rPr lang="fr-FR" sz="1350" b="0" i="0">
-                <a:solidFill>
-                  <a:srgbClr val="E4E4E4"/>
-                </a:solidFill>
-                <a:latin typeface="Consolas"/>
-                <a:cs typeface="Consolas"/>
-              </a:rPr>
-              <a:t xml:space="preserve"> </a:t>
-            </a:r>
-            <a:r>
-              <a:rPr lang="fr-FR" sz="1350" b="0" i="0">
-                <a:solidFill>
-                  <a:srgbClr val="E4E4E4"/>
-                </a:solidFill>
-                <a:latin typeface="Consolas"/>
-                <a:cs typeface="Consolas"/>
-              </a:rPr>
-              <a:t xml:space="preserve">=</a:t>
-            </a:r>
-            <a:r>
-              <a:rPr lang="fr-FR" sz="1350" b="0" i="0">
-                <a:solidFill>
-                  <a:srgbClr val="E4E4E4"/>
-                </a:solidFill>
-                <a:latin typeface="Consolas"/>
-                <a:cs typeface="Consolas"/>
-              </a:rPr>
-              <a:t xml:space="preserve"> </a:t>
-            </a:r>
-            <a:r>
-              <a:rPr lang="fr-FR" sz="1350" b="0" i="0">
-                <a:solidFill>
-                  <a:srgbClr val="6CCFE6"/>
-                </a:solidFill>
-                <a:latin typeface="Consolas"/>
-                <a:cs typeface="Consolas"/>
-              </a:rPr>
-              <a:t xml:space="preserve">any</a:t>
-            </a:r>
-            <a:r>
-              <a:rPr lang="fr-FR" sz="1350" b="0" i="0">
-                <a:solidFill>
-                  <a:srgbClr val="E4E4E4"/>
-                </a:solidFill>
-                <a:latin typeface="Consolas"/>
-                <a:cs typeface="Consolas"/>
-              </a:rPr>
-              <a:t xml:space="preserve">(</a:t>
-            </a:r>
-            <a:r>
-              <a:rPr lang="fr-FR" sz="1350" b="0" i="0">
-                <a:solidFill>
-                  <a:srgbClr val="E4E4E4"/>
-                </a:solidFill>
-                <a:latin typeface="Consolas"/>
-                <a:cs typeface="Consolas"/>
-              </a:rPr>
-              <a:t xml:space="preserve">t</a:t>
-            </a:r>
-            <a:r>
-              <a:rPr lang="fr-FR" sz="1350" b="0" i="0">
-                <a:solidFill>
-                  <a:srgbClr val="E4E4E4"/>
-                </a:solidFill>
-                <a:latin typeface="Consolas"/>
-                <a:cs typeface="Consolas"/>
-              </a:rPr>
-              <a:t xml:space="preserve">.</a:t>
-            </a:r>
-            <a:r>
-              <a:rPr lang="fr-FR" sz="1350" b="0" i="0">
-                <a:solidFill>
-                  <a:srgbClr val="E4E4E4"/>
-                </a:solidFill>
-                <a:latin typeface="Consolas"/>
-                <a:cs typeface="Consolas"/>
-              </a:rPr>
-              <a:t xml:space="preserve">fonction</a:t>
-            </a:r>
-            <a:r>
-              <a:rPr lang="fr-FR" sz="1350" b="0" i="0">
-                <a:solidFill>
-                  <a:srgbClr val="E4E4E4"/>
-                </a:solidFill>
-                <a:latin typeface="Consolas"/>
-                <a:cs typeface="Consolas"/>
-              </a:rPr>
-              <a:t xml:space="preserve"> </a:t>
-            </a:r>
-            <a:r>
-              <a:rPr lang="fr-FR" sz="1350" b="0" i="0">
-                <a:solidFill>
-                  <a:srgbClr val="E4E4E4"/>
-                </a:solidFill>
-                <a:latin typeface="Consolas"/>
-                <a:cs typeface="Consolas"/>
-              </a:rPr>
-              <a:t xml:space="preserve">=</a:t>
-            </a:r>
-            <a:r>
-              <a:rPr lang="fr-FR" sz="1350" b="0" i="0">
-                <a:solidFill>
-                  <a:srgbClr val="E4E4E4"/>
-                </a:solidFill>
-                <a:latin typeface="Consolas"/>
-                <a:cs typeface="Consolas"/>
-              </a:rPr>
-              <a:t xml:space="preserve">=</a:t>
-            </a:r>
-            <a:r>
-              <a:rPr lang="fr-FR" sz="1350" b="0" i="0">
-                <a:solidFill>
-                  <a:srgbClr val="E4E4E4"/>
-                </a:solidFill>
-                <a:latin typeface="Consolas"/>
-                <a:cs typeface="Consolas"/>
-              </a:rPr>
-              <a:t xml:space="preserve"> </a:t>
-            </a:r>
-            <a:r>
-              <a:rPr lang="fr-FR" sz="1350" b="0" i="0">
-                <a:solidFill>
-                  <a:srgbClr val="F0A46A"/>
-                </a:solidFill>
-                <a:latin typeface="Consolas"/>
-                <a:cs typeface="Consolas"/>
-              </a:rPr>
-              <a:t xml:space="preserve">"obl:agent"</a:t>
-            </a:r>
-            <a:r>
-              <a:rPr lang="fr-FR" sz="1350" b="0" i="0">
-                <a:solidFill>
-                  <a:srgbClr val="E4E4E4"/>
-                </a:solidFill>
-                <a:latin typeface="Consolas"/>
-                <a:cs typeface="Consolas"/>
-              </a:rPr>
-              <a:t xml:space="preserve"> </a:t>
-            </a:r>
-            <a:r>
-              <a:rPr lang="fr-FR" sz="1350" b="0" i="0">
-                <a:solidFill>
-                  <a:srgbClr val="E4E4E4"/>
-                </a:solidFill>
-                <a:latin typeface="Consolas"/>
-                <a:cs typeface="Consolas"/>
-              </a:rPr>
-              <a:t xml:space="preserve">.</a:t>
-            </a:r>
-            <a:r>
-              <a:rPr lang="fr-FR" sz="1350" b="0" i="0">
-                <a:solidFill>
-                  <a:srgbClr val="E4E4E4"/>
-                </a:solidFill>
-                <a:latin typeface="Consolas"/>
-                <a:cs typeface="Consolas"/>
-              </a:rPr>
-              <a:t xml:space="preserve">.</a:t>
-            </a:r>
-            <a:r>
-              <a:rPr lang="fr-FR" sz="1350" b="0" i="0">
-                <a:solidFill>
-                  <a:srgbClr val="E4E4E4"/>
-                </a:solidFill>
-                <a:latin typeface="Consolas"/>
-                <a:cs typeface="Consolas"/>
-              </a:rPr>
-              <a:t xml:space="preserve">.</a:t>
-            </a:r>
-            <a:r>
-              <a:rPr lang="fr-FR" sz="1350" b="0" i="0">
-                <a:solidFill>
-                  <a:srgbClr val="E4E4E4"/>
-                </a:solidFill>
-                <a:latin typeface="Consolas"/>
-                <a:cs typeface="Consolas"/>
-              </a:rPr>
-              <a:t xml:space="preserve">)</a:t>
-            </a:r>
-            <a:r>
-              <a:rPr lang="fr-FR" sz="1350" b="0" i="0">
-                <a:solidFill>
-                  <a:srgbClr val="E4E4E4"/>
-                </a:solidFill>
-                <a:latin typeface="Consolas"/>
-                <a:cs typeface="Consolas"/>
-              </a:rPr>
-              <a:t xml:space="preserve">            </a:t>
-            </a:r>
-            <a:r>
-              <a:rPr lang="fr-FR" sz="1350" b="0" i="0">
-                <a:solidFill>
-                  <a:srgbClr val="8D949D"/>
-                </a:solidFill>
-                <a:latin typeface="Consolas"/>
-                <a:cs typeface="Consolas"/>
-              </a:rPr>
-              <a:t xml:space="preserve">  # 5</a:t>
-            </a:r>
-          </a:p>
-        </p:txBody>
-      </p:sp>
-      <p:sp>
-        <p:nvSpPr>
-          <p:cNvPr id="6" name="TextBox 5"/>
+              <a:t>  # 5</a:t>
+            </a:r>
+          </a:p>
+        </p:txBody>
+      </p:sp>
+      <p:sp>
+        <p:nvSpPr>
+          <p:cNvPr id="16" name="TextBox 15"/>
           <p:cNvSpPr txBox="1"/>
           <p:nvPr/>
         </p:nvSpPr>
         <p:spPr>
           <a:xfrm>
-            <a:off x="8591550" y="1666875"/>
-            <a:ext cx="247650" cy="228600"/>
+            <a:off x="685800" y="6250000"/>
+            <a:ext cx="7620000" cy="857250"/>
           </a:xfrm>
           <a:prstGeom prst="rect">
             <a:avLst/>
@@ -17453,37 +17262,631 @@
           <a:p>
             <a:pPr>
               <a:lnSpc>
-                <a:spcPct val="135000"/>
-              </a:lnSpc>
-              <a:spcBef>
-                <a:spcPts val="0"/>
-              </a:spcBef>
-              <a:spcAft>
-                <a:spcPts val="0"/>
-              </a:spcAft>
-            </a:pPr>
-            <a:r>
-              <a:rPr sz="1350" b="1" i="0">
-                <a:solidFill>
-                  <a:srgbClr val="7446C9"/>
-                </a:solidFill>
-                <a:latin typeface="Consolas"/>
-              </a:rPr>
-              <a:t>1</a:t>
-            </a:r>
-          </a:p>
-        </p:txBody>
-      </p:sp>
-      <p:sp>
-        <p:nvSpPr>
-          <p:cNvPr id="7" name="TextBox 6"/>
+                <a:spcPct val="140000"/>
+              </a:lnSpc>
+              <a:spcBef>
+                <a:spcPts val="0"/>
+              </a:spcBef>
+              <a:spcAft>
+                <a:spcPts val="0"/>
+              </a:spcAft>
+            </a:pPr>
+            <a:r>
+              <a:rPr sz="1125" b="0" i="0">
+                <a:solidFill>
+                  <a:srgbClr val="56616A"/>
+                </a:solidFill>
+                <a:latin typeface="Segoe UI"/>
+              </a:rPr>
+              <a:t>Extrait simplifié de app/services/rules/fr.py.</a:t>
+            </a:r>
+          </a:p>
+        </p:txBody>
+      </p:sp>
+      <p:graphicFrame>
+        <p:nvGraphicFramePr>
+          <p:cNvPr id="17" name="Tableau pourquoi"/>
+          <p:cNvGraphicFramePr>
+            <a:graphicFrameLocks noGrp="1"/>
+          </p:cNvGraphicFramePr>
+          <p:nvPr/>
+        </p:nvGraphicFramePr>
+        <p:xfrm>
+          <a:off x="685800" y="4230000"/>
+          <a:ext cx="7620000" cy="1810000"/>
+        </p:xfrm>
+        <a:graphic>
+          <a:graphicData uri="http://schemas.openxmlformats.org/drawingml/2006/table">
+            <a:tbl>
+              <a:tblPr firstRow="1"/>
+              <a:tblGrid>
+                <a:gridCol w="380000">
+                  <a:extLst>
+                    <a:ext uri="{9D8B030D-6E8A-4147-A177-3AD203B41FA5}">
+                      <a16:colId xmlns:a16="http://schemas.microsoft.com/office/drawing/2014/main" val="20000"/>
+                    </a:ext>
+                  </a:extLst>
+                </a:gridCol>
+                <a:gridCol w="7240000">
+                  <a:extLst>
+                    <a:ext uri="{9D8B030D-6E8A-4147-A177-3AD203B41FA5}">
+                      <a16:colId xmlns:a16="http://schemas.microsoft.com/office/drawing/2014/main" val="20001"/>
+                    </a:ext>
+                  </a:extLst>
+                </a:gridCol>
+              </a:tblGrid>
+              <a:tr h="260000">
+                <a:tc>
+                  <a:txBody>
+                    <a:bodyPr/>
+                    <a:lstStyle/>
+                    <a:p>
+                      <a:endParaRPr/>
+                    </a:p>
+                  </a:txBody>
+                  <a:tcPr marL="0" anchor="ctr">
+                    <a:lnL w="0">
+                      <a:noFill/>
+                    </a:lnL>
+                    <a:lnR w="0">
+                      <a:noFill/>
+                    </a:lnR>
+                    <a:lnT w="0">
+                      <a:noFill/>
+                    </a:lnT>
+                    <a:lnB w="19050">
+                      <a:solidFill>
+                        <a:srgbClr val="13171B"/>
+                      </a:solidFill>
+                    </a:lnB>
+                    <a:noFill/>
+                  </a:tcPr>
+                </a:tc>
+                <a:tc>
+                  <a:txBody>
+                    <a:bodyPr/>
+                    <a:lstStyle/>
+                    <a:p>
+                      <a:r>
+                        <a:rPr lang="fr-FR" sz="975" b="1" i="0" dirty="0">
+                          <a:solidFill>
+                            <a:srgbClr val="56616A"/>
+                          </a:solidFill>
+                          <a:latin typeface="Segoe UI"/>
+                          <a:cs typeface="Segoe UI"/>
+                        </a:rPr>
+                        <a:t>POURQUOI CES CINQ QUESTIONS</a:t>
+                      </a:r>
+                    </a:p>
+                  </a:txBody>
+                  <a:tcPr marL="0" anchor="ctr">
+                    <a:lnL w="0">
+                      <a:noFill/>
+                    </a:lnL>
+                    <a:lnR w="0">
+                      <a:noFill/>
+                    </a:lnR>
+                    <a:lnT w="0">
+                      <a:noFill/>
+                    </a:lnT>
+                    <a:lnB w="19050">
+                      <a:solidFill>
+                        <a:srgbClr val="13171B"/>
+                      </a:solidFill>
+                    </a:lnB>
+                    <a:noFill/>
+                  </a:tcPr>
+                </a:tc>
+                <a:extLst>
+                  <a:ext uri="{0D108BD9-81ED-4DB2-BD59-A6C34878D82A}">
+                    <a16:rowId xmlns:a16="http://schemas.microsoft.com/office/drawing/2014/main" val="10000"/>
+                  </a:ext>
+                </a:extLst>
+              </a:tr>
+              <a:tr h="310000">
+                <a:tc>
+                  <a:txBody>
+                    <a:bodyPr/>
+                    <a:lstStyle/>
+                    <a:p>
+                      <a:r>
+                        <a:rPr lang="fr-FR" sz="1050" b="1" i="0" dirty="0">
+                          <a:solidFill>
+                            <a:srgbClr val="7446C9"/>
+                          </a:solidFill>
+                          <a:latin typeface="Consolas"/>
+                          <a:cs typeface="Consolas"/>
+                        </a:rPr>
+                        <a:t>1</a:t>
+                      </a:r>
+                    </a:p>
+                  </a:txBody>
+                  <a:tcPr marL="0" anchor="ctr">
+                    <a:lnL w="0">
+                      <a:noFill/>
+                    </a:lnL>
+                    <a:lnR w="0">
+                      <a:noFill/>
+                    </a:lnR>
+                    <a:lnT w="19050" cap="flat" cmpd="sng" algn="ctr">
+                      <a:solidFill>
+                        <a:srgbClr val="13171B"/>
+                      </a:solidFill>
+                      <a:prstDash val="solid"/>
+                      <a:round/>
+                      <a:headEnd type="none" w="med" len="med"/>
+                      <a:tailEnd type="none" w="med" len="med"/>
+                    </a:lnT>
+                    <a:lnB w="9525">
+                      <a:solidFill>
+                        <a:srgbClr val="D5DADF"/>
+                      </a:solidFill>
+                    </a:lnB>
+                    <a:noFill/>
+                  </a:tcPr>
+                </a:tc>
+                <a:tc>
+                  <a:txBody>
+                    <a:bodyPr/>
+                    <a:lstStyle/>
+                    <a:p>
+                      <a:r>
+                        <a:rPr lang="fr-FR" sz="1050" b="0" i="0" dirty="0">
+                          <a:solidFill>
+                            <a:srgbClr val="56616A"/>
+                          </a:solidFill>
+                          <a:latin typeface="Segoe UI"/>
+                          <a:cs typeface="Segoe UI"/>
+                        </a:rPr>
+                        <a:t>Trouver le « être » auxiliaire. aux:pass = passif sûr ; cop = passif possible, à vérifier (voir à droite).</a:t>
+                      </a:r>
+                    </a:p>
+                  </a:txBody>
+                  <a:tcPr marL="0" anchor="ctr">
+                    <a:lnL w="0">
+                      <a:noFill/>
+                    </a:lnL>
+                    <a:lnR w="0">
+                      <a:noFill/>
+                    </a:lnR>
+                    <a:lnT w="19050" cap="flat" cmpd="sng" algn="ctr">
+                      <a:solidFill>
+                        <a:srgbClr val="13171B"/>
+                      </a:solidFill>
+                      <a:prstDash val="solid"/>
+                      <a:round/>
+                      <a:headEnd type="none" w="med" len="med"/>
+                      <a:tailEnd type="none" w="med" len="med"/>
+                    </a:lnT>
+                    <a:lnB w="9525">
+                      <a:solidFill>
+                        <a:srgbClr val="D5DADF"/>
+                      </a:solidFill>
+                    </a:lnB>
+                    <a:noFill/>
+                  </a:tcPr>
+                </a:tc>
+                <a:extLst>
+                  <a:ext uri="{0D108BD9-81ED-4DB2-BD59-A6C34878D82A}">
+                    <a16:rowId xmlns:a16="http://schemas.microsoft.com/office/drawing/2014/main" val="10001"/>
+                  </a:ext>
+                </a:extLst>
+              </a:tr>
+              <a:tr h="310000">
+                <a:tc>
+                  <a:txBody>
+                    <a:bodyPr/>
+                    <a:lstStyle/>
+                    <a:p>
+                      <a:r>
+                        <a:rPr lang="fr-FR" sz="1050" b="1" i="0" dirty="0">
+                          <a:solidFill>
+                            <a:srgbClr val="7446C9"/>
+                          </a:solidFill>
+                          <a:latin typeface="Consolas"/>
+                          <a:cs typeface="Consolas"/>
+                        </a:rPr>
+                        <a:t>2</a:t>
+                      </a:r>
+                    </a:p>
+                  </a:txBody>
+                  <a:tcPr marL="0" anchor="ctr">
+                    <a:lnL w="0">
+                      <a:noFill/>
+                    </a:lnL>
+                    <a:lnR w="0">
+                      <a:noFill/>
+                    </a:lnR>
+                    <a:lnT w="9525" cap="flat" cmpd="sng" algn="ctr">
+                      <a:solidFill>
+                        <a:srgbClr val="D5DADF"/>
+                      </a:solidFill>
+                      <a:prstDash val="solid"/>
+                      <a:round/>
+                      <a:headEnd type="none" w="med" len="med"/>
+                      <a:tailEnd type="none" w="med" len="med"/>
+                    </a:lnT>
+                    <a:lnB w="9525">
+                      <a:solidFill>
+                        <a:srgbClr val="D5DADF"/>
+                      </a:solidFill>
+                    </a:lnB>
+                    <a:noFill/>
+                  </a:tcPr>
+                </a:tc>
+                <a:tc>
+                  <a:txBody>
+                    <a:bodyPr/>
+                    <a:lstStyle/>
+                    <a:p>
+                      <a:r>
+                        <a:rPr lang="fr-FR" sz="1050" b="0" i="0" dirty="0">
+                          <a:solidFill>
+                            <a:srgbClr val="56616A"/>
+                          </a:solidFill>
+                          <a:latin typeface="Segoe UI"/>
+                          <a:cs typeface="Segoe UI"/>
+                        </a:rPr>
+                        <a:t>« été » seul ne dit rien : on remonte au mot qu'il accompagne (« prise ») pour savoir ce que c'est.</a:t>
+                      </a:r>
+                    </a:p>
+                  </a:txBody>
+                  <a:tcPr marL="0" anchor="ctr">
+                    <a:lnL w="0">
+                      <a:noFill/>
+                    </a:lnL>
+                    <a:lnR w="0">
+                      <a:noFill/>
+                    </a:lnR>
+                    <a:lnT w="9525" cap="flat" cmpd="sng" algn="ctr">
+                      <a:solidFill>
+                        <a:srgbClr val="D5DADF"/>
+                      </a:solidFill>
+                      <a:prstDash val="solid"/>
+                      <a:round/>
+                      <a:headEnd type="none" w="med" len="med"/>
+                      <a:tailEnd type="none" w="med" len="med"/>
+                    </a:lnT>
+                    <a:lnB w="9525">
+                      <a:solidFill>
+                        <a:srgbClr val="D5DADF"/>
+                      </a:solidFill>
+                    </a:lnB>
+                    <a:noFill/>
+                  </a:tcPr>
+                </a:tc>
+                <a:extLst>
+                  <a:ext uri="{0D108BD9-81ED-4DB2-BD59-A6C34878D82A}">
+                    <a16:rowId xmlns:a16="http://schemas.microsoft.com/office/drawing/2014/main" val="10002"/>
+                  </a:ext>
+                </a:extLst>
+              </a:tr>
+              <a:tr h="310000">
+                <a:tc>
+                  <a:txBody>
+                    <a:bodyPr/>
+                    <a:lstStyle/>
+                    <a:p>
+                      <a:r>
+                        <a:rPr lang="fr-FR" sz="1050" b="1" i="0" dirty="0">
+                          <a:solidFill>
+                            <a:srgbClr val="7446C9"/>
+                          </a:solidFill>
+                          <a:latin typeface="Consolas"/>
+                          <a:cs typeface="Consolas"/>
+                        </a:rPr>
+                        <a:t>3</a:t>
+                      </a:r>
+                    </a:p>
+                  </a:txBody>
+                  <a:tcPr marL="0" anchor="ctr">
+                    <a:lnL w="0">
+                      <a:noFill/>
+                    </a:lnL>
+                    <a:lnR w="0">
+                      <a:noFill/>
+                    </a:lnR>
+                    <a:lnT w="9525" cap="flat" cmpd="sng" algn="ctr">
+                      <a:solidFill>
+                        <a:srgbClr val="D5DADF"/>
+                      </a:solidFill>
+                      <a:prstDash val="solid"/>
+                      <a:round/>
+                      <a:headEnd type="none" w="med" len="med"/>
+                      <a:tailEnd type="none" w="med" len="med"/>
+                    </a:lnT>
+                    <a:lnB w="9525">
+                      <a:solidFill>
+                        <a:srgbClr val="D5DADF"/>
+                      </a:solidFill>
+                    </a:lnB>
+                    <a:noFill/>
+                  </a:tcPr>
+                </a:tc>
+                <a:tc>
+                  <a:txBody>
+                    <a:bodyPr/>
+                    <a:lstStyle/>
+                    <a:p>
+                      <a:r>
+                        <a:rPr lang="fr-FR" sz="1050" b="0" i="0" dirty="0">
+                          <a:solidFill>
+                            <a:srgbClr val="56616A"/>
+                          </a:solidFill>
+                          <a:latin typeface="Segoe UI"/>
+                          <a:cs typeface="Segoe UI"/>
+                        </a:rPr>
+                        <a:t>Ce mot est-il un verbe ? « prise » (VERB) : on garde. « nécessaire » (ADJ) : un état, on écarte.</a:t>
+                      </a:r>
+                    </a:p>
+                  </a:txBody>
+                  <a:tcPr marL="0" anchor="ctr">
+                    <a:lnL w="0">
+                      <a:noFill/>
+                    </a:lnL>
+                    <a:lnR w="0">
+                      <a:noFill/>
+                    </a:lnR>
+                    <a:lnT w="9525" cap="flat" cmpd="sng" algn="ctr">
+                      <a:solidFill>
+                        <a:srgbClr val="D5DADF"/>
+                      </a:solidFill>
+                      <a:prstDash val="solid"/>
+                      <a:round/>
+                      <a:headEnd type="none" w="med" len="med"/>
+                      <a:tailEnd type="none" w="med" len="med"/>
+                    </a:lnT>
+                    <a:lnB w="9525">
+                      <a:solidFill>
+                        <a:srgbClr val="D5DADF"/>
+                      </a:solidFill>
+                    </a:lnB>
+                    <a:noFill/>
+                  </a:tcPr>
+                </a:tc>
+                <a:extLst>
+                  <a:ext uri="{0D108BD9-81ED-4DB2-BD59-A6C34878D82A}">
+                    <a16:rowId xmlns:a16="http://schemas.microsoft.com/office/drawing/2014/main" val="10003"/>
+                  </a:ext>
+                </a:extLst>
+              </a:tr>
+              <a:tr h="310000">
+                <a:tc>
+                  <a:txBody>
+                    <a:bodyPr/>
+                    <a:lstStyle/>
+                    <a:p>
+                      <a:r>
+                        <a:rPr lang="fr-FR" sz="1050" b="1" i="0" dirty="0">
+                          <a:solidFill>
+                            <a:srgbClr val="7446C9"/>
+                          </a:solidFill>
+                          <a:latin typeface="Consolas"/>
+                          <a:cs typeface="Consolas"/>
+                        </a:rPr>
+                        <a:t>4</a:t>
+                      </a:r>
+                    </a:p>
+                  </a:txBody>
+                  <a:tcPr marL="0" anchor="ctr">
+                    <a:lnL w="0">
+                      <a:noFill/>
+                    </a:lnL>
+                    <a:lnR w="0">
+                      <a:noFill/>
+                    </a:lnR>
+                    <a:lnT w="9525" cap="flat" cmpd="sng" algn="ctr">
+                      <a:solidFill>
+                        <a:srgbClr val="D5DADF"/>
+                      </a:solidFill>
+                      <a:prstDash val="solid"/>
+                      <a:round/>
+                      <a:headEnd type="none" w="med" len="med"/>
+                      <a:tailEnd type="none" w="med" len="med"/>
+                    </a:lnT>
+                    <a:lnB w="9525">
+                      <a:solidFill>
+                        <a:srgbClr val="D5DADF"/>
+                      </a:solidFill>
+                    </a:lnB>
+                    <a:noFill/>
+                  </a:tcPr>
+                </a:tc>
+                <a:tc>
+                  <a:txBody>
+                    <a:bodyPr/>
+                    <a:lstStyle/>
+                    <a:p>
+                      <a:r>
+                        <a:rPr lang="fr-FR" sz="1050" b="0" i="0" dirty="0">
+                          <a:solidFill>
+                            <a:srgbClr val="56616A"/>
+                          </a:solidFill>
+                          <a:latin typeface="Segoe UI"/>
+                          <a:cs typeface="Segoe UI"/>
+                        </a:rPr>
+                        <a:t>« elle est allée » est un passé composé actif. Liste en base : corrigée depuis /listes/, sans code.</a:t>
+                      </a:r>
+                    </a:p>
+                  </a:txBody>
+                  <a:tcPr marL="0" anchor="ctr">
+                    <a:lnL w="0">
+                      <a:noFill/>
+                    </a:lnL>
+                    <a:lnR w="0">
+                      <a:noFill/>
+                    </a:lnR>
+                    <a:lnT w="9525" cap="flat" cmpd="sng" algn="ctr">
+                      <a:solidFill>
+                        <a:srgbClr val="D5DADF"/>
+                      </a:solidFill>
+                      <a:prstDash val="solid"/>
+                      <a:round/>
+                      <a:headEnd type="none" w="med" len="med"/>
+                      <a:tailEnd type="none" w="med" len="med"/>
+                    </a:lnT>
+                    <a:lnB w="9525">
+                      <a:solidFill>
+                        <a:srgbClr val="D5DADF"/>
+                      </a:solidFill>
+                    </a:lnB>
+                    <a:noFill/>
+                  </a:tcPr>
+                </a:tc>
+                <a:extLst>
+                  <a:ext uri="{0D108BD9-81ED-4DB2-BD59-A6C34878D82A}">
+                    <a16:rowId xmlns:a16="http://schemas.microsoft.com/office/drawing/2014/main" val="10004"/>
+                  </a:ext>
+                </a:extLst>
+              </a:tr>
+              <a:tr h="310000">
+                <a:tc>
+                  <a:txBody>
+                    <a:bodyPr/>
+                    <a:lstStyle/>
+                    <a:p>
+                      <a:r>
+                        <a:rPr lang="fr-FR" sz="1050" b="1" i="0" dirty="0">
+                          <a:solidFill>
+                            <a:srgbClr val="7446C9"/>
+                          </a:solidFill>
+                          <a:latin typeface="Consolas"/>
+                          <a:cs typeface="Consolas"/>
+                        </a:rPr>
+                        <a:t>5</a:t>
+                      </a:r>
+                    </a:p>
+                  </a:txBody>
+                  <a:tcPr marL="0" anchor="ctr">
+                    <a:lnL w="0">
+                      <a:noFill/>
+                    </a:lnL>
+                    <a:lnR w="0">
+                      <a:noFill/>
+                    </a:lnR>
+                    <a:lnT w="9525" cap="flat" cmpd="sng" algn="ctr">
+                      <a:solidFill>
+                        <a:srgbClr val="D5DADF"/>
+                      </a:solidFill>
+                      <a:prstDash val="solid"/>
+                      <a:round/>
+                      <a:headEnd type="none" w="med" len="med"/>
+                      <a:tailEnd type="none" w="med" len="med"/>
+                    </a:lnT>
+                    <a:lnB w="9525">
+                      <a:solidFill>
+                        <a:srgbClr val="D5DADF"/>
+                      </a:solidFill>
+                    </a:lnB>
+                    <a:noFill/>
+                  </a:tcPr>
+                </a:tc>
+                <a:tc>
+                  <a:txBody>
+                    <a:bodyPr/>
+                    <a:lstStyle/>
+                    <a:p>
+                      <a:r>
+                        <a:rPr lang="fr-FR" sz="1050" b="0" i="0" dirty="0">
+                          <a:solidFill>
+                            <a:srgbClr val="56616A"/>
+                          </a:solidFill>
+                          <a:latin typeface="Segoe UI"/>
+                          <a:cs typeface="Segoe UI"/>
+                        </a:rPr>
+                        <a:t>Principe P8, « qui fait quoi ». Avec « par le ministre », le lecteur sait qui agit : info. Sans agent : avertissement.</a:t>
+                      </a:r>
+                    </a:p>
+                  </a:txBody>
+                  <a:tcPr marL="0" anchor="ctr">
+                    <a:lnL w="0">
+                      <a:noFill/>
+                    </a:lnL>
+                    <a:lnR w="0">
+                      <a:noFill/>
+                    </a:lnR>
+                    <a:lnT w="9525" cap="flat" cmpd="sng" algn="ctr">
+                      <a:solidFill>
+                        <a:srgbClr val="D5DADF"/>
+                      </a:solidFill>
+                      <a:prstDash val="solid"/>
+                      <a:round/>
+                      <a:headEnd type="none" w="med" len="med"/>
+                      <a:tailEnd type="none" w="med" len="med"/>
+                    </a:lnT>
+                    <a:lnB w="9525">
+                      <a:solidFill>
+                        <a:srgbClr val="D5DADF"/>
+                      </a:solidFill>
+                    </a:lnB>
+                    <a:noFill/>
+                  </a:tcPr>
+                </a:tc>
+                <a:extLst>
+                  <a:ext uri="{0D108BD9-81ED-4DB2-BD59-A6C34878D82A}">
+                    <a16:rowId xmlns:a16="http://schemas.microsoft.com/office/drawing/2014/main" val="10005"/>
+                  </a:ext>
+                </a:extLst>
+              </a:tr>
+            </a:tbl>
+          </a:graphicData>
+        </a:graphic>
+      </p:graphicFrame>
+      <p:sp>
+        <p:nvSpPr>
+          <p:cNvPr id="18" name="Trait copule 18"/>
+          <p:cNvSpPr/>
+          <p:nvPr/>
+        </p:nvSpPr>
+        <p:spPr>
+          <a:xfrm>
+            <a:off x="8591550" y="1714500"/>
+            <a:ext cx="2914650" cy="19050"/>
+          </a:xfrm>
+          <a:prstGeom prst="rect">
+            <a:avLst/>
+          </a:prstGeom>
+          <a:solidFill>
+            <a:srgbClr val="13171B"/>
+          </a:solidFill>
+          <a:ln>
+            <a:noFill/>
+          </a:ln>
+          <a:effectLst/>
+        </p:spPr>
+        <p:style>
+          <a:lnRef idx="1">
+            <a:schemeClr val="accent1"/>
+          </a:lnRef>
+          <a:fillRef idx="3">
+            <a:schemeClr val="accent1"/>
+          </a:fillRef>
+          <a:effectRef idx="2">
+            <a:schemeClr val="accent1"/>
+          </a:effectRef>
+          <a:fontRef idx="minor">
+            <a:schemeClr val="lt1"/>
+          </a:fontRef>
+        </p:style>
+        <p:txBody>
+          <a:bodyPr wrap="square" lIns="0" tIns="0" rIns="0" bIns="0" rtlCol="0" anchor="ctr"/>
+          <a:lstStyle/>
+          <a:p>
+            <a:pPr algn="ctr"/>
+            <a:endParaRPr/>
+          </a:p>
+        </p:txBody>
+      </p:sp>
+      <p:sp>
+        <p:nvSpPr>
+          <p:cNvPr id="19" name="Titre copule 18"/>
           <p:cNvSpPr txBox="1"/>
           <p:nvPr/>
         </p:nvSpPr>
         <p:spPr>
           <a:xfrm>
-            <a:off x="8915400" y="1647825"/>
-            <a:ext cx="2590800" cy="857250"/>
+            <a:off x="8591550" y="1828800"/>
+            <a:ext cx="2914650" cy="222885"/>
           </a:xfrm>
           <a:prstGeom prst="rect">
             <a:avLst/>
@@ -17504,53 +17907,31 @@
                 <a:spcPts val="0"/>
               </a:spcBef>
               <a:spcAft>
-                <a:spcPts val="150"/>
-              </a:spcAft>
-            </a:pPr>
-            <a:r>
-              <a:rPr sz="1350" b="0" i="0">
-                <a:solidFill>
-                  <a:srgbClr val="13171B"/>
-                </a:solidFill>
-                <a:latin typeface="Segoe UI"/>
-              </a:rPr>
-              <a:t>Repérer l’auxiliaire</a:t>
-            </a:r>
-          </a:p>
-          <a:p>
-            <a:pPr>
-              <a:lnSpc>
-                <a:spcPct val="130000"/>
-              </a:lnSpc>
-              <a:spcBef>
-                <a:spcPts val="0"/>
-              </a:spcBef>
-              <a:spcAft>
-                <a:spcPts val="0"/>
-              </a:spcAft>
-            </a:pPr>
-            <a:r>
-              <a:rPr sz="1125" b="0" i="0">
+                <a:spcPts val="0"/>
+              </a:spcAft>
+            </a:pPr>
+            <a:r>
+              <a:rPr sz="975" b="1" i="0">
                 <a:solidFill>
                   <a:srgbClr val="56616A"/>
                 </a:solidFill>
                 <a:latin typeface="Segoe UI"/>
               </a:rPr>
-              <a:t>cop couvre le passif sans agent</a:t>
-            </a:r>
-          </a:p>
-        </p:txBody>
-      </p:sp>
-      <p:sp>
-        <p:nvSpPr>
-          <p:cNvPr id="8" name="TextBox 7"/>
+              <a:t>LA COPULE, C'EST QUOI ?</a:t>
+            </a:r>
+          </a:p>
+        </p:txBody>
+      </p:sp>
+      <p:sp>
+        <p:nvSpPr>
+          <p:cNvPr id="20" name="Texte copule 18"/>
           <p:cNvSpPr txBox="1"/>
           <p:nvPr/>
         </p:nvSpPr>
         <p:spPr>
           <a:xfrm>
-            <a:off x="8591550" y="2486025"/>
-            <a:ext cx="247650" cy="228600"/>
+            <a:off x="8591550" y="2076450"/>
+            <a:ext cx="2914650" cy="1238250"/>
           </a:xfrm>
           <a:prstGeom prst="rect">
             <a:avLst/>
@@ -17565,37 +17946,100 @@
           <a:p>
             <a:pPr>
               <a:lnSpc>
-                <a:spcPct val="135000"/>
-              </a:lnSpc>
-              <a:spcBef>
-                <a:spcPts val="0"/>
-              </a:spcBef>
-              <a:spcAft>
-                <a:spcPts val="0"/>
-              </a:spcAft>
-            </a:pPr>
-            <a:r>
-              <a:rPr sz="1350" b="1" i="0">
-                <a:solidFill>
-                  <a:srgbClr val="7446C9"/>
-                </a:solidFill>
-                <a:latin typeface="Consolas"/>
-              </a:rPr>
-              <a:t>2</a:t>
-            </a:r>
-          </a:p>
-        </p:txBody>
-      </p:sp>
-      <p:sp>
-        <p:nvSpPr>
-          <p:cNvPr id="9" name="TextBox 8"/>
+                <a:spcPct val="140000"/>
+              </a:lnSpc>
+              <a:spcBef>
+                <a:spcPts val="0"/>
+              </a:spcBef>
+              <a:spcAft>
+                <a:spcPts val="0"/>
+              </a:spcAft>
+            </a:pPr>
+            <a:r>
+              <a:rPr sz="1200" b="0" i="0">
+                <a:solidFill>
+                  <a:srgbClr val="56616A"/>
+                </a:solidFill>
+                <a:latin typeface="Segoe UI"/>
+              </a:rPr>
+              <a:t>Le verbe « être » qui relie un sujet à une qualité, sans action : « Le dossier </a:t>
+            </a:r>
+            <a:r>
+              <a:rPr sz="1200" b="1" i="0">
+                <a:solidFill>
+                  <a:srgbClr val="56616A"/>
+                </a:solidFill>
+                <a:latin typeface="Segoe UI"/>
+              </a:rPr>
+              <a:t>est</a:t>
+            </a:r>
+            <a:r>
+              <a:rPr sz="1200" b="0" i="0">
+                <a:solidFill>
+                  <a:srgbClr val="56616A"/>
+                </a:solidFill>
+                <a:latin typeface="Segoe UI"/>
+              </a:rPr>
+              <a:t> complet ». spaCy l'étiquette cop.</a:t>
+            </a:r>
+          </a:p>
+        </p:txBody>
+      </p:sp>
+      <p:sp>
+        <p:nvSpPr>
+          <p:cNvPr id="21" name="Trait copule 21"/>
+          <p:cNvSpPr/>
+          <p:nvPr/>
+        </p:nvSpPr>
+        <p:spPr>
+          <a:xfrm>
+            <a:off x="8591550" y="3365500"/>
+            <a:ext cx="2914650" cy="19050"/>
+          </a:xfrm>
+          <a:prstGeom prst="rect">
+            <a:avLst/>
+          </a:prstGeom>
+          <a:solidFill>
+            <a:srgbClr val="13171B"/>
+          </a:solidFill>
+          <a:ln>
+            <a:noFill/>
+          </a:ln>
+          <a:effectLst/>
+        </p:spPr>
+        <p:style>
+          <a:lnRef idx="1">
+            <a:schemeClr val="accent1"/>
+          </a:lnRef>
+          <a:fillRef idx="3">
+            <a:schemeClr val="accent1"/>
+          </a:fillRef>
+          <a:effectRef idx="2">
+            <a:schemeClr val="accent1"/>
+          </a:effectRef>
+          <a:fontRef idx="minor">
+            <a:schemeClr val="lt1"/>
+          </a:fontRef>
+        </p:style>
+        <p:txBody>
+          <a:bodyPr wrap="square" lIns="0" tIns="0" rIns="0" bIns="0" rtlCol="0" anchor="ctr"/>
+          <a:lstStyle/>
+          <a:p>
+            <a:pPr algn="ctr"/>
+            <a:endParaRPr/>
+          </a:p>
+        </p:txBody>
+      </p:sp>
+      <p:sp>
+        <p:nvSpPr>
+          <p:cNvPr id="22" name="Titre copule 21"/>
           <p:cNvSpPr txBox="1"/>
           <p:nvPr/>
         </p:nvSpPr>
         <p:spPr>
           <a:xfrm>
-            <a:off x="8915400" y="2466975"/>
-            <a:ext cx="2590800" cy="857250"/>
+            <a:off x="8591550" y="3479800"/>
+            <a:ext cx="2914650" cy="222885"/>
           </a:xfrm>
           <a:prstGeom prst="rect">
             <a:avLst/>
@@ -17616,31 +18060,31 @@
                 <a:spcPts val="0"/>
               </a:spcBef>
               <a:spcAft>
-                <a:spcPts val="150"/>
-              </a:spcAft>
-            </a:pPr>
-            <a:r>
-              <a:rPr sz="1350" b="0" i="0">
-                <a:solidFill>
-                  <a:srgbClr val="13171B"/>
-                </a:solidFill>
-                <a:latin typeface="Segoe UI"/>
-              </a:rPr>
-              <a:t>Remonter au participe</a:t>
-            </a:r>
-          </a:p>
-        </p:txBody>
-      </p:sp>
-      <p:sp>
-        <p:nvSpPr>
-          <p:cNvPr id="10" name="TextBox 9"/>
+                <a:spcPts val="0"/>
+              </a:spcAft>
+            </a:pPr>
+            <a:r>
+              <a:rPr sz="975" b="1" i="0">
+                <a:solidFill>
+                  <a:srgbClr val="56616A"/>
+                </a:solidFill>
+                <a:latin typeface="Segoe UI"/>
+              </a:rPr>
+              <a:t>POURQUOI LA RÈGLE L'ACCEPTE</a:t>
+            </a:r>
+          </a:p>
+        </p:txBody>
+      </p:sp>
+      <p:sp>
+        <p:nvSpPr>
+          <p:cNvPr id="23" name="Texte copule 21"/>
           <p:cNvSpPr txBox="1"/>
           <p:nvPr/>
         </p:nvSpPr>
         <p:spPr>
           <a:xfrm>
-            <a:off x="8591550" y="2924175"/>
-            <a:ext cx="247650" cy="228600"/>
+            <a:off x="8591550" y="3727450"/>
+            <a:ext cx="2914650" cy="1238250"/>
           </a:xfrm>
           <a:prstGeom prst="rect">
             <a:avLst/>
@@ -17655,37 +18099,100 @@
           <a:p>
             <a:pPr>
               <a:lnSpc>
-                <a:spcPct val="135000"/>
-              </a:lnSpc>
-              <a:spcBef>
-                <a:spcPts val="0"/>
-              </a:spcBef>
-              <a:spcAft>
-                <a:spcPts val="0"/>
-              </a:spcAft>
-            </a:pPr>
-            <a:r>
-              <a:rPr sz="1350" b="1" i="0">
-                <a:solidFill>
-                  <a:srgbClr val="7446C9"/>
-                </a:solidFill>
-                <a:latin typeface="Consolas"/>
-              </a:rPr>
-              <a:t>3</a:t>
-            </a:r>
-          </a:p>
-        </p:txBody>
-      </p:sp>
-      <p:sp>
-        <p:nvSpPr>
-          <p:cNvPr id="11" name="TextBox 10"/>
+                <a:spcPct val="140000"/>
+              </a:lnSpc>
+              <a:spcBef>
+                <a:spcPts val="0"/>
+              </a:spcBef>
+              <a:spcAft>
+                <a:spcPts val="0"/>
+              </a:spcAft>
+            </a:pPr>
+            <a:r>
+              <a:rPr sz="1200" b="0" i="0">
+                <a:solidFill>
+                  <a:srgbClr val="56616A"/>
+                </a:solidFill>
+                <a:latin typeface="Segoe UI"/>
+              </a:rPr>
+              <a:t>Sans agent, le modèle se trompe parfois : dans « La décision a </a:t>
+            </a:r>
+            <a:r>
+              <a:rPr sz="1200" b="1" i="0">
+                <a:solidFill>
+                  <a:srgbClr val="56616A"/>
+                </a:solidFill>
+                <a:latin typeface="Segoe UI"/>
+              </a:rPr>
+              <a:t>été</a:t>
+            </a:r>
+            <a:r>
+              <a:rPr sz="1200" b="0" i="0">
+                <a:solidFill>
+                  <a:srgbClr val="56616A"/>
+                </a:solidFill>
+                <a:latin typeface="Segoe UI"/>
+              </a:rPr>
+              <a:t> prise », il met cop au lieu de aux:pass.</a:t>
+            </a:r>
+          </a:p>
+        </p:txBody>
+      </p:sp>
+      <p:sp>
+        <p:nvSpPr>
+          <p:cNvPr id="24" name="Trait copule 24"/>
+          <p:cNvSpPr/>
+          <p:nvPr/>
+        </p:nvSpPr>
+        <p:spPr>
+          <a:xfrm>
+            <a:off x="8591550" y="5016500"/>
+            <a:ext cx="2914650" cy="19050"/>
+          </a:xfrm>
+          <a:prstGeom prst="rect">
+            <a:avLst/>
+          </a:prstGeom>
+          <a:solidFill>
+            <a:srgbClr val="13171B"/>
+          </a:solidFill>
+          <a:ln>
+            <a:noFill/>
+          </a:ln>
+          <a:effectLst/>
+        </p:spPr>
+        <p:style>
+          <a:lnRef idx="1">
+            <a:schemeClr val="accent1"/>
+          </a:lnRef>
+          <a:fillRef idx="3">
+            <a:schemeClr val="accent1"/>
+          </a:fillRef>
+          <a:effectRef idx="2">
+            <a:schemeClr val="accent1"/>
+          </a:effectRef>
+          <a:fontRef idx="minor">
+            <a:schemeClr val="lt1"/>
+          </a:fontRef>
+        </p:style>
+        <p:txBody>
+          <a:bodyPr wrap="square" lIns="0" tIns="0" rIns="0" bIns="0" rtlCol="0" anchor="ctr"/>
+          <a:lstStyle/>
+          <a:p>
+            <a:pPr algn="ctr"/>
+            <a:endParaRPr/>
+          </a:p>
+        </p:txBody>
+      </p:sp>
+      <p:sp>
+        <p:nvSpPr>
+          <p:cNvPr id="25" name="Titre copule 24"/>
           <p:cNvSpPr txBox="1"/>
           <p:nvPr/>
         </p:nvSpPr>
         <p:spPr>
           <a:xfrm>
-            <a:off x="8915400" y="2905125"/>
-            <a:ext cx="2590800" cy="857250"/>
+            <a:off x="8591550" y="5130800"/>
+            <a:ext cx="2914650" cy="222885"/>
           </a:xfrm>
           <a:prstGeom prst="rect">
             <a:avLst/>
@@ -17706,53 +18213,31 @@
                 <a:spcPts val="0"/>
               </a:spcBef>
               <a:spcAft>
-                <a:spcPts val="150"/>
-              </a:spcAft>
-            </a:pPr>
-            <a:r>
-              <a:rPr sz="1350" b="0" i="0">
-                <a:solidFill>
-                  <a:srgbClr val="13171B"/>
-                </a:solidFill>
-                <a:latin typeface="Segoe UI"/>
-              </a:rPr>
-              <a:t>Écarter les attributs</a:t>
-            </a:r>
-          </a:p>
-          <a:p>
-            <a:pPr>
-              <a:lnSpc>
-                <a:spcPct val="130000"/>
-              </a:lnSpc>
-              <a:spcBef>
-                <a:spcPts val="0"/>
-              </a:spcBef>
-              <a:spcAft>
-                <a:spcPts val="0"/>
-              </a:spcAft>
-            </a:pPr>
-            <a:r>
-              <a:rPr sz="1125" b="0" i="0">
+                <a:spcPts val="0"/>
+              </a:spcAft>
+            </a:pPr>
+            <a:r>
+              <a:rPr sz="975" b="1" i="0">
                 <a:solidFill>
                   <a:srgbClr val="56616A"/>
                 </a:solidFill>
                 <a:latin typeface="Segoe UI"/>
               </a:rPr>
-              <a:t>« est susceptible », « est nécessaire » : le mot n’est pas un VERB</a:t>
-            </a:r>
-          </a:p>
-        </p:txBody>
-      </p:sp>
-      <p:sp>
-        <p:nvSpPr>
-          <p:cNvPr id="12" name="TextBox 11"/>
+              <a:t>PUIS LA QUESTION 3 TRIE</a:t>
+            </a:r>
+          </a:p>
+        </p:txBody>
+      </p:sp>
+      <p:sp>
+        <p:nvSpPr>
+          <p:cNvPr id="26" name="Texte copule 24"/>
           <p:cNvSpPr txBox="1"/>
           <p:nvPr/>
         </p:nvSpPr>
         <p:spPr>
           <a:xfrm>
-            <a:off x="8591550" y="3743325"/>
-            <a:ext cx="247650" cy="228600"/>
+            <a:off x="8591550" y="5378450"/>
+            <a:ext cx="2914650" cy="1238250"/>
           </a:xfrm>
           <a:prstGeom prst="rect">
             <a:avLst/>
@@ -17767,247 +18252,23 @@
           <a:p>
             <a:pPr>
               <a:lnSpc>
-                <a:spcPct val="135000"/>
-              </a:lnSpc>
-              <a:spcBef>
-                <a:spcPts val="0"/>
-              </a:spcBef>
-              <a:spcAft>
-                <a:spcPts val="0"/>
-              </a:spcAft>
-            </a:pPr>
-            <a:r>
-              <a:rPr sz="1350" b="1" i="0">
-                <a:solidFill>
-                  <a:srgbClr val="7446C9"/>
-                </a:solidFill>
-                <a:latin typeface="Consolas"/>
-              </a:rPr>
-              <a:t>4</a:t>
-            </a:r>
-          </a:p>
-        </p:txBody>
-      </p:sp>
-      <p:sp>
-        <p:nvSpPr>
-          <p:cNvPr id="13" name="TextBox 12"/>
-          <p:cNvSpPr txBox="1"/>
-          <p:nvPr/>
-        </p:nvSpPr>
-        <p:spPr>
-          <a:xfrm>
-            <a:off x="8915400" y="3724275"/>
-            <a:ext cx="2590800" cy="857250"/>
-          </a:xfrm>
-          <a:prstGeom prst="rect">
-            <a:avLst/>
-          </a:prstGeom>
-          <a:noFill/>
-        </p:spPr>
-        <p:txBody>
-          <a:bodyPr wrap="square" lIns="0" tIns="0" rIns="0" bIns="0" anchor="t">
-            <a:spAutoFit/>
-          </a:bodyPr>
-          <a:lstStyle/>
-          <a:p>
-            <a:pPr>
-              <a:lnSpc>
-                <a:spcPct val="135000"/>
-              </a:lnSpc>
-              <a:spcBef>
-                <a:spcPts val="0"/>
-              </a:spcBef>
-              <a:spcAft>
-                <a:spcPts val="150"/>
-              </a:spcAft>
-            </a:pPr>
-            <a:r>
-              <a:rPr sz="1350" b="0" i="0">
-                <a:solidFill>
-                  <a:srgbClr val="13171B"/>
-                </a:solidFill>
-                <a:latin typeface="Segoe UI"/>
-              </a:rPr>
-              <a:t>Écarter « elle est allée »</a:t>
-            </a:r>
-          </a:p>
-          <a:p>
-            <a:pPr>
-              <a:lnSpc>
-                <a:spcPct val="130000"/>
-              </a:lnSpc>
-              <a:spcBef>
-                <a:spcPts val="0"/>
-              </a:spcBef>
-              <a:spcAft>
-                <a:spcPts val="0"/>
-              </a:spcAft>
-            </a:pPr>
-            <a:r>
-              <a:rPr sz="1125" b="0" i="0">
+                <a:spcPct val="140000"/>
+              </a:lnSpc>
+              <a:spcBef>
+                <a:spcPts val="0"/>
+              </a:spcBef>
+              <a:spcAft>
+                <a:spcPts val="0"/>
+              </a:spcAft>
+            </a:pPr>
+            <a:r>
+              <a:rPr sz="1200" b="0" i="0">
                 <a:solidFill>
                   <a:srgbClr val="56616A"/>
                 </a:solidFill>
                 <a:latin typeface="Segoe UI"/>
               </a:rPr>
-              <a:t>17 verbes, dans une liste de données par langue</a:t>
-            </a:r>
-          </a:p>
-        </p:txBody>
-      </p:sp>
-      <p:sp>
-        <p:nvSpPr>
-          <p:cNvPr id="14" name="TextBox 13"/>
-          <p:cNvSpPr txBox="1"/>
-          <p:nvPr/>
-        </p:nvSpPr>
-        <p:spPr>
-          <a:xfrm>
-            <a:off x="8591550" y="4562475"/>
-            <a:ext cx="247650" cy="228600"/>
-          </a:xfrm>
-          <a:prstGeom prst="rect">
-            <a:avLst/>
-          </a:prstGeom>
-          <a:noFill/>
-        </p:spPr>
-        <p:txBody>
-          <a:bodyPr wrap="square" lIns="0" tIns="0" rIns="0" bIns="0" anchor="t">
-            <a:spAutoFit/>
-          </a:bodyPr>
-          <a:lstStyle/>
-          <a:p>
-            <a:pPr>
-              <a:lnSpc>
-                <a:spcPct val="135000"/>
-              </a:lnSpc>
-              <a:spcBef>
-                <a:spcPts val="0"/>
-              </a:spcBef>
-              <a:spcAft>
-                <a:spcPts val="0"/>
-              </a:spcAft>
-            </a:pPr>
-            <a:r>
-              <a:rPr sz="1350" b="1" i="0">
-                <a:solidFill>
-                  <a:srgbClr val="7446C9"/>
-                </a:solidFill>
-                <a:latin typeface="Consolas"/>
-              </a:rPr>
-              <a:t>5</a:t>
-            </a:r>
-          </a:p>
-        </p:txBody>
-      </p:sp>
-      <p:sp>
-        <p:nvSpPr>
-          <p:cNvPr id="15" name="TextBox 14"/>
-          <p:cNvSpPr txBox="1"/>
-          <p:nvPr/>
-        </p:nvSpPr>
-        <p:spPr>
-          <a:xfrm>
-            <a:off x="8915400" y="4543425"/>
-            <a:ext cx="2590800" cy="857250"/>
-          </a:xfrm>
-          <a:prstGeom prst="rect">
-            <a:avLst/>
-          </a:prstGeom>
-          <a:noFill/>
-        </p:spPr>
-        <p:txBody>
-          <a:bodyPr wrap="square" lIns="0" tIns="0" rIns="0" bIns="0" anchor="t">
-            <a:spAutoFit/>
-          </a:bodyPr>
-          <a:lstStyle/>
-          <a:p>
-            <a:pPr>
-              <a:lnSpc>
-                <a:spcPct val="135000"/>
-              </a:lnSpc>
-              <a:spcBef>
-                <a:spcPts val="0"/>
-              </a:spcBef>
-              <a:spcAft>
-                <a:spcPts val="150"/>
-              </a:spcAft>
-            </a:pPr>
-            <a:r>
-              <a:rPr sz="1350" b="0" i="0">
-                <a:solidFill>
-                  <a:srgbClr val="13171B"/>
-                </a:solidFill>
-                <a:latin typeface="Segoe UI"/>
-              </a:rPr>
-              <a:t>Chercher l’agent</a:t>
-            </a:r>
-          </a:p>
-          <a:p>
-            <a:pPr>
-              <a:lnSpc>
-                <a:spcPct val="130000"/>
-              </a:lnSpc>
-              <a:spcBef>
-                <a:spcPts val="0"/>
-              </a:spcBef>
-              <a:spcAft>
-                <a:spcPts val="0"/>
-              </a:spcAft>
-            </a:pPr>
-            <a:r>
-              <a:rPr sz="1125" b="0" i="0">
-                <a:solidFill>
-                  <a:srgbClr val="56616A"/>
-                </a:solidFill>
-                <a:latin typeface="Segoe UI"/>
-              </a:rPr>
-              <a:t>absent → sévérité avertissement</a:t>
-            </a:r>
-          </a:p>
-        </p:txBody>
-      </p:sp>
-      <p:sp>
-        <p:nvSpPr>
-          <p:cNvPr id="16" name="TextBox 15"/>
-          <p:cNvSpPr txBox="1"/>
-          <p:nvPr/>
-        </p:nvSpPr>
-        <p:spPr>
-          <a:xfrm>
-            <a:off x="8591550" y="5476875"/>
-            <a:ext cx="2914650" cy="857250"/>
-          </a:xfrm>
-          <a:prstGeom prst="rect">
-            <a:avLst/>
-          </a:prstGeom>
-          <a:noFill/>
-        </p:spPr>
-        <p:txBody>
-          <a:bodyPr wrap="square" lIns="0" tIns="0" rIns="0" bIns="0" anchor="t">
-            <a:spAutoFit/>
-          </a:bodyPr>
-          <a:lstStyle/>
-          <a:p>
-            <a:pPr>
-              <a:lnSpc>
-                <a:spcPct val="140000"/>
-              </a:lnSpc>
-              <a:spcBef>
-                <a:spcPts val="0"/>
-              </a:spcBef>
-              <a:spcAft>
-                <a:spcPts val="0"/>
-              </a:spcAft>
-            </a:pPr>
-            <a:r>
-              <a:rPr sz="1125" b="0" i="0">
-                <a:solidFill>
-                  <a:srgbClr val="56616A"/>
-                </a:solidFill>
-                <a:latin typeface="Segoe UI"/>
-              </a:rPr>
-              <a:t>Extrait simplifié de app/services/rules/fr.py.</a:t>
+              <a:t>Après la copule, un adjectif (« complet ») est écarté. Un participe VERB (« prise ») reste : c'est un passif.</a:t>
             </a:r>
           </a:p>
         </p:txBody>
@@ -18572,7 +18833,7 @@
                           <a:latin typeface="Segoe UI"/>
                           <a:cs typeface="Segoe UI"/>
                         </a:rPr>
-                        <a:t xml:space="preserve"> ①</a:t>
+                        <a:t> ①</a:t>
                       </a:r>
                     </a:p>
                   </a:txBody>
@@ -18844,7 +19105,7 @@
                           <a:latin typeface="Segoe UI"/>
                           <a:cs typeface="Segoe UI"/>
                         </a:rPr>
-                        <a:t xml:space="preserve"> ③</a:t>
+                        <a:t> ③</a:t>
                       </a:r>
                     </a:p>
                   </a:txBody>
@@ -19325,6 +19586,7 @@
           <a:lstStyle/>
           <a:p>
             <a:pPr algn="ctr"/>
+            <a:endParaRPr/>
           </a:p>
         </p:txBody>
       </p:sp>
@@ -19345,7 +19607,7 @@
           <a:noFill/>
         </p:spPr>
         <p:txBody>
-          <a:bodyPr wrap="square" lIns="0" rIns="0" tIns="0" bIns="0">
+          <a:bodyPr wrap="square" lIns="0" tIns="0" rIns="0" bIns="0">
             <a:spAutoFit/>
           </a:bodyPr>
           <a:lstStyle/>
@@ -19369,7 +19631,7 @@
                 <a:latin typeface="Segoe UI"/>
                 <a:cs typeface="Segoe UI"/>
               </a:rPr>
-              <a:t xml:space="preserve">UNE HEURISTIQUE, ICI</a:t>
+              <a:t>UNE HEURISTIQUE, ICI</a:t>
             </a:r>
           </a:p>
           <a:p>
@@ -19392,7 +19654,7 @@
                 <a:latin typeface="Segoe UI"/>
                 <a:cs typeface="Segoe UI"/>
               </a:rPr>
-              <a:t xml:space="preserve">Une règle simple, écrite à la main, ajoutée après spaCy pour corriger ses erreurs connues.</a:t>
+              <a:t>Une règle simple, écrite à la main, ajoutée après spaCy pour corriger ses erreurs connues.</a:t>
             </a:r>
           </a:p>
           <a:p>
@@ -19415,7 +19677,7 @@
                 <a:latin typeface="Segoe UI"/>
                 <a:cs typeface="Segoe UI"/>
               </a:rPr>
-              <a:t xml:space="preserve">①  </a:t>
+              <a:t>①  </a:t>
             </a:r>
             <a:r>
               <a:rPr lang="fr-FR" sz="1350" b="1" i="0">
@@ -19425,7 +19687,7 @@
                 <a:latin typeface="Segoe UI"/>
                 <a:cs typeface="Segoe UI"/>
               </a:rPr>
-              <a:t xml:space="preserve">Accepter aussi cop</a:t>
+              <a:t>Accepter aussi cop</a:t>
             </a:r>
           </a:p>
           <a:p>
@@ -19448,7 +19710,7 @@
                 <a:latin typeface="Segoe UI"/>
                 <a:cs typeface="Segoe UI"/>
               </a:rPr>
-              <a:t xml:space="preserve">Copule</a:t>
+              <a:t>Copule</a:t>
             </a:r>
             <a:r>
               <a:rPr lang="fr-FR" sz="1125" b="0" i="0">
@@ -19458,7 +19720,7 @@
                 <a:latin typeface="Segoe UI"/>
                 <a:cs typeface="Segoe UI"/>
               </a:rPr>
-              <a:t xml:space="preserve"> : le verbe « être » qui relie un sujet à un attribut (« il est malade »). Sans agent, spaCy lit « été » ainsi, plus comme aux:pass : on accepte les deux.</a:t>
+              <a:t> : le verbe « être » qui relie un sujet à un attribut (« il est malade »). Sans agent, spaCy lit « été » ainsi, plus comme aux:pass : on accepte les deux.</a:t>
             </a:r>
           </a:p>
           <a:p>
@@ -19481,7 +19743,7 @@
                 <a:latin typeface="Segoe UI"/>
                 <a:cs typeface="Segoe UI"/>
               </a:rPr>
-              <a:t xml:space="preserve">②  </a:t>
+              <a:t>②  </a:t>
             </a:r>
             <a:r>
               <a:rPr lang="fr-FR" sz="1350" b="1" i="0">
@@ -19491,7 +19753,7 @@
                 <a:latin typeface="Segoe UI"/>
                 <a:cs typeface="Segoe UI"/>
               </a:rPr>
-              <a:t xml:space="preserve">Exiger un participe VERB</a:t>
+              <a:t>Exiger un participe VERB</a:t>
             </a:r>
           </a:p>
           <a:p>
@@ -19514,7 +19776,7 @@
                 <a:latin typeface="Segoe UI"/>
                 <a:cs typeface="Segoe UI"/>
               </a:rPr>
-              <a:t xml:space="preserve">Écarte les adjectifs : « est susceptible », « est nécessaire » ne sont plus des passifs.</a:t>
+              <a:t>Écarte les adjectifs : « est susceptible », « est nécessaire » ne sont plus des passifs.</a:t>
             </a:r>
           </a:p>
           <a:p>
@@ -19537,7 +19799,7 @@
                 <a:latin typeface="Segoe UI"/>
                 <a:cs typeface="Segoe UI"/>
               </a:rPr>
-              <a:t xml:space="preserve">③  </a:t>
+              <a:t>③  </a:t>
             </a:r>
             <a:r>
               <a:rPr lang="fr-FR" sz="1350" b="1" i="0">
@@ -19547,7 +19809,7 @@
                 <a:latin typeface="Segoe UI"/>
                 <a:cs typeface="Segoe UI"/>
               </a:rPr>
-              <a:t xml:space="preserve">Exclure les verbes avec être</a:t>
+              <a:t>Exclure les verbes avec être</a:t>
             </a:r>
           </a:p>
           <a:p>
@@ -19570,7 +19832,7 @@
                 <a:latin typeface="Segoe UI"/>
                 <a:cs typeface="Segoe UI"/>
               </a:rPr>
-              <a:t xml:space="preserve">Le lemme est comparé à 17 verbes (aller, venir…) : « Elle est allée » n’est plus signalée.</a:t>
+              <a:t>Le lemme est comparé à 17 verbes (aller, venir…) : « Elle est allée » n’est plus signalée.</a:t>
             </a:r>
           </a:p>
           <a:p>
@@ -19593,7 +19855,7 @@
                 <a:latin typeface="Segoe UI"/>
                 <a:cs typeface="Segoe UI"/>
               </a:rPr>
-              <a:t xml:space="preserve">sm = md : le modèle moyen de spaCy ne change aucun résultat.</a:t>
+              <a:t>sm = md : le modèle moyen de spaCy ne change aucun résultat.</a:t>
             </a:r>
           </a:p>
         </p:txBody>
@@ -19615,7 +19877,7 @@
           <a:noFill/>
         </p:spPr>
         <p:txBody>
-          <a:bodyPr wrap="square" lIns="0" rIns="0" tIns="0" bIns="0">
+          <a:bodyPr wrap="square" lIns="0" tIns="0" rIns="0" bIns="0">
             <a:spAutoFit/>
           </a:bodyPr>
           <a:lstStyle/>
@@ -19639,7 +19901,7 @@
                 <a:latin typeface="Segoe UI"/>
                 <a:cs typeface="Segoe UI"/>
               </a:rPr>
-              <a:t xml:space="preserve">Dépendances seules</a:t>
+              <a:t>Dépendances seules</a:t>
             </a:r>
             <a:r>
               <a:rPr lang="fr-FR" sz="1200" b="0" i="0">
@@ -19649,7 +19911,7 @@
                 <a:latin typeface="Segoe UI"/>
                 <a:cs typeface="Segoe UI"/>
               </a:rPr>
-              <a:t xml:space="preserve"> : on signale dès que spaCy étiquette aux:pass ou nsubj:pass, sans autre vérification.</a:t>
+              <a:t> : on signale dès que spaCy étiquette aux:pass ou nsubj:pass, sans autre vérification.</a:t>
             </a:r>
           </a:p>
           <a:p>
@@ -19672,7 +19934,7 @@
                 <a:latin typeface="Segoe UI"/>
                 <a:cs typeface="Segoe UI"/>
               </a:rPr>
-              <a:t xml:space="preserve">Règle actuelle</a:t>
+              <a:t>Règle actuelle</a:t>
             </a:r>
             <a:r>
               <a:rPr lang="fr-FR" sz="1200" b="0" i="0">
@@ -19682,7 +19944,7 @@
                 <a:latin typeface="Segoe UI"/>
                 <a:cs typeface="Segoe UI"/>
               </a:rPr>
-              <a:t xml:space="preserve"> : la même analyse, corrigée par les trois heuristiques </a:t>
+              <a:t> : la même analyse, corrigée par les trois heuristiques </a:t>
             </a:r>
             <a:r>
               <a:rPr lang="fr-FR" sz="1200" b="1" i="0">
@@ -19692,7 +19954,7 @@
                 <a:latin typeface="Segoe UI"/>
                 <a:cs typeface="Segoe UI"/>
               </a:rPr>
-              <a:t xml:space="preserve">① ② ③</a:t>
+              <a:t>① ② ③</a:t>
             </a:r>
             <a:r>
               <a:rPr lang="fr-FR" sz="1200" b="0" i="0">
@@ -19702,7 +19964,7 @@
                 <a:latin typeface="Segoe UI"/>
                 <a:cs typeface="Segoe UI"/>
               </a:rPr>
-              <a:t xml:space="preserve"> à droite.</a:t>
+              <a:t> à droite.</a:t>
             </a:r>
           </a:p>
         </p:txBody>
@@ -20949,7 +21211,7 @@
                 <a:latin typeface="Segoe UI"/>
                 <a:cs typeface="Segoe UI"/>
               </a:rPr>
-              <a:t xml:space="preserve">— </a:t>
+              <a:t>— </a:t>
             </a:r>
             <a:r>
               <a:rPr lang="fr-FR" sz="1500" b="0" i="0">
@@ -20959,7 +21221,7 @@
                 <a:latin typeface="Segoe UI"/>
                 <a:cs typeface="Segoe UI"/>
               </a:rPr>
-              <a:t xml:space="preserve">Texte collé ou fichier</a:t>
+              <a:t>Texte collé ou fichier</a:t>
             </a:r>
           </a:p>
           <a:p>
@@ -20982,7 +21244,7 @@
                 <a:latin typeface="Segoe UI"/>
                 <a:cs typeface="Segoe UI"/>
               </a:rPr>
-              <a:t xml:space="preserve">.txt · .md · .docx · .odt</a:t>
+              <a:t>.txt · .md · .docx · .odt</a:t>
             </a:r>
           </a:p>
           <a:p>
@@ -21005,7 +21267,7 @@
                 <a:latin typeface="Segoe UI"/>
                 <a:cs typeface="Segoe UI"/>
               </a:rPr>
-              <a:t xml:space="preserve">— </a:t>
+              <a:t>— </a:t>
             </a:r>
             <a:r>
               <a:rPr lang="fr-FR" sz="1500" b="0" i="0">
@@ -21015,7 +21277,7 @@
                 <a:latin typeface="Segoe UI"/>
                 <a:cs typeface="Segoe UI"/>
               </a:rPr>
-              <a:t xml:space="preserve">Trois règles</a:t>
+              <a:t>Trois règles</a:t>
             </a:r>
           </a:p>
           <a:p>
@@ -21038,7 +21300,7 @@
                 <a:latin typeface="Segoe UI"/>
                 <a:cs typeface="Segoe UI"/>
               </a:rPr>
-              <a:t xml:space="preserve">longueur, connecteurs lourds, passif</a:t>
+              <a:t>longueur, connecteurs lourds, passif</a:t>
             </a:r>
           </a:p>
           <a:p>
@@ -21061,7 +21323,7 @@
                 <a:latin typeface="Segoe UI"/>
                 <a:cs typeface="Segoe UI"/>
               </a:rPr>
-              <a:t xml:space="preserve">— </a:t>
+              <a:t>— </a:t>
             </a:r>
             <a:r>
               <a:rPr lang="fr-FR" sz="1500" b="0" i="0">
@@ -21071,7 +21333,7 @@
                 <a:latin typeface="Segoe UI"/>
                 <a:cs typeface="Segoe UI"/>
               </a:rPr>
-              <a:t xml:space="preserve">Surlignage relié aux fiches</a:t>
+              <a:t>Surlignage relié aux fiches</a:t>
             </a:r>
           </a:p>
           <a:p>
@@ -21094,7 +21356,7 @@
                 <a:latin typeface="Segoe UI"/>
                 <a:cs typeface="Segoe UI"/>
               </a:rPr>
-              <a:t xml:space="preserve">— </a:t>
+              <a:t>— </a:t>
             </a:r>
             <a:r>
               <a:rPr lang="fr-FR" sz="1500" b="0" i="0">
@@ -21104,7 +21366,7 @@
                 <a:latin typeface="Segoe UI"/>
                 <a:cs typeface="Segoe UI"/>
               </a:rPr>
-              <a:t xml:space="preserve">Validation serveur</a:t>
+              <a:t>Validation serveur</a:t>
             </a:r>
           </a:p>
           <a:p>
@@ -21127,7 +21389,7 @@
                 <a:latin typeface="Segoe UI"/>
                 <a:cs typeface="Segoe UI"/>
               </a:rPr>
-              <a:t xml:space="preserve">vide, trop long, format refusé, illisible</a:t>
+              <a:t>vide, trop long, format refusé, illisible</a:t>
             </a:r>
           </a:p>
           <a:p>
@@ -21150,7 +21412,7 @@
                 <a:latin typeface="Segoe UI"/>
                 <a:cs typeface="Segoe UI"/>
               </a:rPr>
-              <a:t xml:space="preserve">— </a:t>
+              <a:t>— </a:t>
             </a:r>
             <a:r>
               <a:rPr lang="fr-FR" sz="1500" b="0" i="0">
@@ -21160,7 +21422,7 @@
                 <a:latin typeface="Segoe UI"/>
                 <a:cs typeface="Segoe UI"/>
               </a:rPr>
-              <a:t xml:space="preserve">Listes de mots modifiables</a:t>
+              <a:t>Listes de mots modifiables</a:t>
             </a:r>
           </a:p>
           <a:p>
@@ -21183,7 +21445,7 @@
                 <a:latin typeface="Segoe UI"/>
                 <a:cs typeface="Segoe UI"/>
               </a:rPr>
-              <a:t xml:space="preserve">— </a:t>
+              <a:t>— </a:t>
             </a:r>
             <a:r>
               <a:rPr lang="fr-FR" sz="1500" b="0" i="0">
@@ -21193,7 +21455,7 @@
                 <a:latin typeface="Segoe UI"/>
                 <a:cs typeface="Segoe UI"/>
               </a:rPr>
-              <a:t xml:space="preserve">Analyses enregistrées sous un nom</a:t>
+              <a:t>Analyses enregistrées sous un nom</a:t>
             </a:r>
           </a:p>
         </p:txBody>
@@ -21297,7 +21559,7 @@
         <p:spPr>
           <a:xfrm>
             <a:off x="4419600" y="2400300"/>
-            <a:ext cx="3352800" cy="3048000"/>
+            <a:ext cx="3352800" cy="2159758"/>
           </a:xfrm>
           <a:prstGeom prst="rect">
             <a:avLst/>
@@ -21329,7 +21591,7 @@
                 <a:latin typeface="Segoe UI"/>
                 <a:cs typeface="Segoe UI"/>
               </a:rPr>
-              <a:t xml:space="preserve">— </a:t>
+              <a:t>— </a:t>
             </a:r>
             <a:r>
               <a:rPr lang="fr-FR" sz="1500" b="0" i="0">
@@ -21339,7 +21601,7 @@
                 <a:latin typeface="Segoe UI"/>
                 <a:cs typeface="Segoe UI"/>
               </a:rPr>
-              <a:t xml:space="preserve">Règles nominalisations et jargon</a:t>
+              <a:t>Règles nominalisations et jargon</a:t>
             </a:r>
           </a:p>
           <a:p>
@@ -21362,7 +21624,7 @@
                 <a:latin typeface="Segoe UI"/>
                 <a:cs typeface="Segoe UI"/>
               </a:rPr>
-              <a:t xml:space="preserve">principes 6 et 9</a:t>
+              <a:t>principes 6 et 9</a:t>
             </a:r>
           </a:p>
           <a:p>
@@ -21385,7 +21647,7 @@
                 <a:latin typeface="Segoe UI"/>
                 <a:cs typeface="Segoe UI"/>
               </a:rPr>
-              <a:t xml:space="preserve">— </a:t>
+              <a:t>— </a:t>
             </a:r>
             <a:r>
               <a:rPr lang="fr-FR" sz="1500" b="0" i="0">
@@ -21395,7 +21657,7 @@
                 <a:latin typeface="Segoe UI"/>
                 <a:cs typeface="Segoe UI"/>
               </a:rPr>
-              <a:t xml:space="preserve">Anglais</a:t>
+              <a:t>Anglais</a:t>
             </a:r>
           </a:p>
           <a:p>
@@ -21418,7 +21680,7 @@
                 <a:latin typeface="Segoe UI"/>
                 <a:cs typeface="Segoe UI"/>
               </a:rPr>
-              <a:t xml:space="preserve">une ligne dans REGLES, des seuils, un lexique</a:t>
+              <a:t>une ligne dans REGLES, des seuils, un lexique</a:t>
             </a:r>
           </a:p>
           <a:p>
@@ -21441,7 +21703,7 @@
                 <a:latin typeface="Segoe UI"/>
                 <a:cs typeface="Segoe UI"/>
               </a:rPr>
-              <a:t xml:space="preserve">— </a:t>
+              <a:t>— </a:t>
             </a:r>
             <a:r>
               <a:rPr lang="fr-FR" sz="1500" b="0" i="0">
@@ -21451,7 +21713,7 @@
                 <a:latin typeface="Segoe UI"/>
                 <a:cs typeface="Segoe UI"/>
               </a:rPr>
-              <a:t xml:space="preserve">Export et comparaison de versions</a:t>
+              <a:t>Export et comparaison de versions</a:t>
             </a:r>
           </a:p>
           <a:p>
@@ -21474,7 +21736,7 @@
                 <a:latin typeface="Segoe UI"/>
                 <a:cs typeface="Segoe UI"/>
               </a:rPr>
-              <a:t xml:space="preserve">— </a:t>
+              <a:t>— </a:t>
             </a:r>
             <a:r>
               <a:rPr lang="fr-FR" sz="1500" b="0" i="0">
@@ -21484,7 +21746,7 @@
                 <a:latin typeface="Segoe UI"/>
                 <a:cs typeface="Segoe UI"/>
               </a:rPr>
-              <a:t xml:space="preserve">CSRF et authentification</a:t>
+              <a:t>Connexion et droits d'accès</a:t>
             </a:r>
           </a:p>
           <a:p>
@@ -21507,7 +21769,7 @@
                 <a:latin typeface="Segoe UI"/>
                 <a:cs typeface="Segoe UI"/>
               </a:rPr>
-              <a:t xml:space="preserve">inutiles en local, mono-utilisateur</a:t>
+              <a:t>inutiles en local : un seul utilisateur, sur son poste</a:t>
             </a:r>
           </a:p>
         </p:txBody>
@@ -21825,6 +22087,7 @@
           <a:lstStyle/>
           <a:p>
             <a:pPr algn="ctr"/>
+            <a:endParaRPr/>
           </a:p>
         </p:txBody>
       </p:sp>
@@ -21845,7 +22108,7 @@
           <a:noFill/>
         </p:spPr>
         <p:txBody>
-          <a:bodyPr wrap="square" lIns="0" rIns="0" tIns="0" bIns="0">
+          <a:bodyPr wrap="square" lIns="0" tIns="0" rIns="0" bIns="0">
             <a:spAutoFit/>
           </a:bodyPr>
           <a:lstStyle/>
@@ -21869,7 +22132,7 @@
                 <a:latin typeface="Segoe UI"/>
                 <a:cs typeface="Segoe UI"/>
               </a:rPr>
-              <a:t xml:space="preserve">Trois semaines</a:t>
+              <a:t>Trois semaines</a:t>
             </a:r>
             <a:r>
               <a:rPr lang="fr-FR" sz="1350" b="0" i="0">
@@ -21879,7 +22142,7 @@
                 <a:latin typeface="Segoe UI"/>
                 <a:cs typeface="Segoe UI"/>
               </a:rPr>
-              <a:t xml:space="preserve">  ·  fonctionnalités gelées le 23/09  ·  </a:t>
+              <a:t>  ·  fonctionnalités gelées le 23/09  ·  </a:t>
             </a:r>
             <a:r>
               <a:rPr lang="fr-FR" sz="1350" b="1" i="0">
@@ -21889,7 +22152,7 @@
                 <a:latin typeface="Segoe UI"/>
                 <a:cs typeface="Segoe UI"/>
               </a:rPr>
-              <a:t xml:space="preserve">48 tests</a:t>
+              <a:t>48 tests</a:t>
             </a:r>
             <a:r>
               <a:rPr lang="fr-FR" sz="1350" b="0" i="0">
@@ -21899,7 +22162,7 @@
                 <a:latin typeface="Segoe UI"/>
                 <a:cs typeface="Segoe UI"/>
               </a:rPr>
-              <a:t xml:space="preserve"> en 3 secondes  ·  passif </a:t>
+              <a:t> en 3 secondes  ·  passif </a:t>
             </a:r>
             <a:r>
               <a:rPr lang="fr-FR" sz="1350" b="1" i="0">
@@ -21909,7 +22172,7 @@
                 <a:latin typeface="Segoe UI"/>
                 <a:cs typeface="Segoe UI"/>
               </a:rPr>
-              <a:t xml:space="preserve">4/6</a:t>
+              <a:t>4/6</a:t>
             </a:r>
             <a:r>
               <a:rPr lang="fr-FR" sz="1350" b="0" i="0">
@@ -21919,7 +22182,7 @@
                 <a:latin typeface="Segoe UI"/>
                 <a:cs typeface="Segoe UI"/>
               </a:rPr>
-              <a:t xml:space="preserve"> sur les phrases de référence</a:t>
+              <a:t> sur les phrases de référence</a:t>
             </a:r>
           </a:p>
         </p:txBody>
@@ -21991,6 +22254,1134 @@
               </a:spcAft>
             </a:pPr>
             <a:r>
+              <a:rPr lang="fr-FR" sz="975" b="1" i="0" dirty="0">
+                <a:solidFill>
+                  <a:srgbClr val="56616A"/>
+                </a:solidFill>
+                <a:latin typeface="Segoe UI"/>
+                <a:cs typeface="Segoe UI"/>
+              </a:rPr>
+              <a:t>LA SUITE · LES LANGUES DE L'UE</a:t>
+            </a:r>
+          </a:p>
+        </p:txBody>
+      </p:sp>
+      <p:sp>
+        <p:nvSpPr>
+          <p:cNvPr id="3" name="TextBox 2"/>
+          <p:cNvSpPr txBox="1"/>
+          <p:nvPr/>
+        </p:nvSpPr>
+        <p:spPr>
+          <a:xfrm>
+            <a:off x="685800" y="876300"/>
+            <a:ext cx="10820400" cy="1139190"/>
+          </a:xfrm>
+          <a:prstGeom prst="rect">
+            <a:avLst/>
+          </a:prstGeom>
+          <a:noFill/>
+        </p:spPr>
+        <p:txBody>
+          <a:bodyPr wrap="square" lIns="0" tIns="0" rIns="0" bIns="0" anchor="t">
+            <a:spAutoFit/>
+          </a:bodyPr>
+          <a:lstStyle/>
+          <a:p>
+            <a:pPr>
+              <a:lnSpc>
+                <a:spcPct val="108000"/>
+              </a:lnSpc>
+              <a:spcBef>
+                <a:spcPts val="0"/>
+              </a:spcBef>
+              <a:spcAft>
+                <a:spcPts val="0"/>
+              </a:spcAft>
+            </a:pPr>
+            <a:r>
+              <a:rPr lang="fr-FR" sz="3450" b="1" i="0" dirty="0">
+                <a:solidFill>
+                  <a:srgbClr val="13171B"/>
+                </a:solidFill>
+                <a:latin typeface="Segoe UI"/>
+                <a:cs typeface="Segoe UI"/>
+              </a:rPr>
+              <a:t>Pensé pour les 24 langues de l'UE</a:t>
+            </a:r>
+          </a:p>
+        </p:txBody>
+      </p:sp>
+      <p:sp>
+        <p:nvSpPr>
+          <p:cNvPr id="4" name="Rectangle 3"/>
+          <p:cNvSpPr/>
+          <p:nvPr/>
+        </p:nvSpPr>
+        <p:spPr>
+          <a:xfrm>
+            <a:off x="685800" y="1809750"/>
+            <a:ext cx="3352800" cy="19050"/>
+          </a:xfrm>
+          <a:prstGeom prst="rect">
+            <a:avLst/>
+          </a:prstGeom>
+          <a:solidFill>
+            <a:srgbClr val="13171B"/>
+          </a:solidFill>
+          <a:ln>
+            <a:noFill/>
+          </a:ln>
+          <a:effectLst/>
+        </p:spPr>
+        <p:style>
+          <a:lnRef idx="1">
+            <a:schemeClr val="accent1"/>
+          </a:lnRef>
+          <a:fillRef idx="3">
+            <a:schemeClr val="accent1"/>
+          </a:fillRef>
+          <a:effectRef idx="2">
+            <a:schemeClr val="accent1"/>
+          </a:effectRef>
+          <a:fontRef idx="minor">
+            <a:schemeClr val="lt1"/>
+          </a:fontRef>
+        </p:style>
+        <p:txBody>
+          <a:bodyPr wrap="square" lIns="0" tIns="0" rIns="0" bIns="0" rtlCol="0" anchor="ctr"/>
+          <a:lstStyle/>
+          <a:p>
+            <a:pPr algn="ctr"/>
+            <a:endParaRPr/>
+          </a:p>
+        </p:txBody>
+      </p:sp>
+      <p:sp>
+        <p:nvSpPr>
+          <p:cNvPr id="5" name="TextBox 4"/>
+          <p:cNvSpPr txBox="1"/>
+          <p:nvPr/>
+        </p:nvSpPr>
+        <p:spPr>
+          <a:xfrm>
+            <a:off x="685800" y="1943100"/>
+            <a:ext cx="3352800" cy="381000"/>
+          </a:xfrm>
+          <a:prstGeom prst="rect">
+            <a:avLst/>
+          </a:prstGeom>
+          <a:noFill/>
+        </p:spPr>
+        <p:txBody>
+          <a:bodyPr wrap="square" lIns="0" tIns="0" rIns="0" bIns="0" anchor="t">
+            <a:spAutoFit/>
+          </a:bodyPr>
+          <a:lstStyle/>
+          <a:p>
+            <a:pPr>
+              <a:lnSpc>
+                <a:spcPct val="135000"/>
+              </a:lnSpc>
+              <a:spcBef>
+                <a:spcPts val="0"/>
+              </a:spcBef>
+              <a:spcAft>
+                <a:spcPts val="0"/>
+              </a:spcAft>
+            </a:pPr>
+            <a:r>
+              <a:rPr lang="fr-FR" sz="1650" b="1" i="0" dirty="0">
+                <a:solidFill>
+                  <a:srgbClr val="13171B"/>
+                </a:solidFill>
+                <a:latin typeface="Segoe UI"/>
+                <a:cs typeface="Segoe UI"/>
+              </a:rPr>
+              <a:t>Pourquoi</a:t>
+            </a:r>
+          </a:p>
+        </p:txBody>
+      </p:sp>
+      <p:sp>
+        <p:nvSpPr>
+          <p:cNvPr id="6" name="TextBox 5"/>
+          <p:cNvSpPr txBox="1"/>
+          <p:nvPr/>
+        </p:nvSpPr>
+        <p:spPr>
+          <a:xfrm>
+            <a:off x="685800" y="2400300"/>
+            <a:ext cx="3352800" cy="3048000"/>
+          </a:xfrm>
+          <a:prstGeom prst="rect">
+            <a:avLst/>
+          </a:prstGeom>
+          <a:noFill/>
+        </p:spPr>
+        <p:txBody>
+          <a:bodyPr wrap="square" lIns="0" tIns="0" rIns="0" bIns="0" anchor="t">
+            <a:spAutoFit/>
+          </a:bodyPr>
+          <a:lstStyle/>
+          <a:p>
+            <a:pPr>
+              <a:lnSpc>
+                <a:spcPct val="130000"/>
+              </a:lnSpc>
+              <a:spcBef>
+                <a:spcPts val="0"/>
+              </a:spcBef>
+              <a:spcAft>
+                <a:spcPts val="150"/>
+              </a:spcAft>
+            </a:pPr>
+            <a:r>
+              <a:rPr lang="fr-FR" sz="1500" b="0" i="0" dirty="0">
+                <a:solidFill>
+                  <a:srgbClr val="56616A"/>
+                </a:solidFill>
+                <a:latin typeface="Segoe UI"/>
+                <a:cs typeface="Segoe UI"/>
+              </a:rPr>
+              <a:t>— </a:t>
+            </a:r>
+            <a:r>
+              <a:rPr lang="fr-FR" sz="1500" b="0" i="0" dirty="0">
+                <a:solidFill>
+                  <a:srgbClr val="13171B"/>
+                </a:solidFill>
+                <a:latin typeface="Segoe UI"/>
+                <a:cs typeface="Segoe UI"/>
+              </a:rPr>
+              <a:t>Un référentiel en 24 langues</a:t>
+            </a:r>
+          </a:p>
+          <a:p>
+            <a:pPr>
+              <a:lnSpc>
+                <a:spcPct val="130000"/>
+              </a:lnSpc>
+              <a:spcBef>
+                <a:spcPts val="0"/>
+              </a:spcBef>
+              <a:spcAft>
+                <a:spcPts val="750"/>
+              </a:spcAft>
+            </a:pPr>
+            <a:r>
+              <a:rPr lang="fr-FR" sz="1125" b="0" i="0" dirty="0">
+                <a:solidFill>
+                  <a:srgbClr val="56616A"/>
+                </a:solidFill>
+                <a:latin typeface="Segoe UI"/>
+                <a:cs typeface="Segoe UI"/>
+              </a:rPr>
+              <a:t>« Rédiger clairement » est publié dans toutes les langues officielles</a:t>
+            </a:r>
+          </a:p>
+          <a:p>
+            <a:pPr>
+              <a:lnSpc>
+                <a:spcPct val="130000"/>
+              </a:lnSpc>
+              <a:spcBef>
+                <a:spcPts val="0"/>
+              </a:spcBef>
+              <a:spcAft>
+                <a:spcPts val="150"/>
+              </a:spcAft>
+            </a:pPr>
+            <a:r>
+              <a:rPr lang="fr-FR" sz="1500" b="0" i="0" dirty="0">
+                <a:solidFill>
+                  <a:srgbClr val="56616A"/>
+                </a:solidFill>
+                <a:latin typeface="Segoe UI"/>
+                <a:cs typeface="Segoe UI"/>
+              </a:rPr>
+              <a:t>— </a:t>
+            </a:r>
+            <a:r>
+              <a:rPr lang="fr-FR" sz="1500" b="0" i="0" dirty="0">
+                <a:solidFill>
+                  <a:srgbClr val="13171B"/>
+                </a:solidFill>
+                <a:latin typeface="Segoe UI"/>
+                <a:cs typeface="Segoe UI"/>
+              </a:rPr>
+              <a:t>Un texte, 24 versions</a:t>
+            </a:r>
+          </a:p>
+          <a:p>
+            <a:pPr>
+              <a:lnSpc>
+                <a:spcPct val="130000"/>
+              </a:lnSpc>
+              <a:spcBef>
+                <a:spcPts val="0"/>
+              </a:spcBef>
+              <a:spcAft>
+                <a:spcPts val="750"/>
+              </a:spcAft>
+            </a:pPr>
+            <a:r>
+              <a:rPr lang="fr-FR" sz="1125" b="0" i="0" dirty="0">
+                <a:solidFill>
+                  <a:srgbClr val="56616A"/>
+                </a:solidFill>
+                <a:latin typeface="Segoe UI"/>
+                <a:cs typeface="Segoe UI"/>
+              </a:rPr>
+              <a:t>au Parlement européen, chaque texte est traduit dans toutes les langues</a:t>
+            </a:r>
+          </a:p>
+          <a:p>
+            <a:pPr>
+              <a:lnSpc>
+                <a:spcPct val="130000"/>
+              </a:lnSpc>
+              <a:spcBef>
+                <a:spcPts val="0"/>
+              </a:spcBef>
+              <a:spcAft>
+                <a:spcPts val="150"/>
+              </a:spcAft>
+            </a:pPr>
+            <a:r>
+              <a:rPr lang="fr-FR" sz="1500" b="0" i="0" dirty="0">
+                <a:solidFill>
+                  <a:srgbClr val="56616A"/>
+                </a:solidFill>
+                <a:latin typeface="Segoe UI"/>
+                <a:cs typeface="Segoe UI"/>
+              </a:rPr>
+              <a:t>— </a:t>
+            </a:r>
+            <a:r>
+              <a:rPr lang="fr-FR" sz="1500" b="0" i="0" dirty="0">
+                <a:solidFill>
+                  <a:srgbClr val="13171B"/>
+                </a:solidFill>
+                <a:latin typeface="Segoe UI"/>
+                <a:cs typeface="Segoe UI"/>
+              </a:rPr>
+              <a:t>Clair à la source, clair partout</a:t>
+            </a:r>
+          </a:p>
+          <a:p>
+            <a:pPr>
+              <a:lnSpc>
+                <a:spcPct val="130000"/>
+              </a:lnSpc>
+              <a:spcBef>
+                <a:spcPts val="0"/>
+              </a:spcBef>
+              <a:spcAft>
+                <a:spcPts val="750"/>
+              </a:spcAft>
+            </a:pPr>
+            <a:r>
+              <a:rPr lang="fr-FR" sz="1125" b="0" i="0" dirty="0">
+                <a:solidFill>
+                  <a:srgbClr val="56616A"/>
+                </a:solidFill>
+                <a:latin typeface="Segoe UI"/>
+                <a:cs typeface="Segoe UI"/>
+              </a:rPr>
+              <a:t>une phrase claire se traduit mieux dans les 23 autres langues</a:t>
+            </a:r>
+          </a:p>
+        </p:txBody>
+      </p:sp>
+      <p:sp>
+        <p:nvSpPr>
+          <p:cNvPr id="7" name="Rectangle 6"/>
+          <p:cNvSpPr/>
+          <p:nvPr/>
+        </p:nvSpPr>
+        <p:spPr>
+          <a:xfrm>
+            <a:off x="4419600" y="1809750"/>
+            <a:ext cx="3352800" cy="19050"/>
+          </a:xfrm>
+          <a:prstGeom prst="rect">
+            <a:avLst/>
+          </a:prstGeom>
+          <a:solidFill>
+            <a:srgbClr val="13171B"/>
+          </a:solidFill>
+          <a:ln>
+            <a:noFill/>
+          </a:ln>
+          <a:effectLst/>
+        </p:spPr>
+        <p:style>
+          <a:lnRef idx="1">
+            <a:schemeClr val="accent1"/>
+          </a:lnRef>
+          <a:fillRef idx="3">
+            <a:schemeClr val="accent1"/>
+          </a:fillRef>
+          <a:effectRef idx="2">
+            <a:schemeClr val="accent1"/>
+          </a:effectRef>
+          <a:fontRef idx="minor">
+            <a:schemeClr val="lt1"/>
+          </a:fontRef>
+        </p:style>
+        <p:txBody>
+          <a:bodyPr wrap="square" lIns="0" tIns="0" rIns="0" bIns="0" rtlCol="0" anchor="ctr"/>
+          <a:lstStyle/>
+          <a:p>
+            <a:pPr algn="ctr"/>
+            <a:endParaRPr/>
+          </a:p>
+        </p:txBody>
+      </p:sp>
+      <p:sp>
+        <p:nvSpPr>
+          <p:cNvPr id="8" name="TextBox 7"/>
+          <p:cNvSpPr txBox="1"/>
+          <p:nvPr/>
+        </p:nvSpPr>
+        <p:spPr>
+          <a:xfrm>
+            <a:off x="4419600" y="1943100"/>
+            <a:ext cx="3352800" cy="381000"/>
+          </a:xfrm>
+          <a:prstGeom prst="rect">
+            <a:avLst/>
+          </a:prstGeom>
+          <a:noFill/>
+        </p:spPr>
+        <p:txBody>
+          <a:bodyPr wrap="square" lIns="0" tIns="0" rIns="0" bIns="0" anchor="t">
+            <a:spAutoFit/>
+          </a:bodyPr>
+          <a:lstStyle/>
+          <a:p>
+            <a:pPr>
+              <a:lnSpc>
+                <a:spcPct val="135000"/>
+              </a:lnSpc>
+              <a:spcBef>
+                <a:spcPts val="0"/>
+              </a:spcBef>
+              <a:spcAft>
+                <a:spcPts val="0"/>
+              </a:spcAft>
+            </a:pPr>
+            <a:r>
+              <a:rPr lang="fr-FR" sz="1650" b="1" i="0" dirty="0">
+                <a:solidFill>
+                  <a:srgbClr val="1D7852"/>
+                </a:solidFill>
+                <a:latin typeface="Segoe UI"/>
+                <a:cs typeface="Segoe UI"/>
+              </a:rPr>
+              <a:t>Déjà prêt dans le code</a:t>
+            </a:r>
+          </a:p>
+        </p:txBody>
+      </p:sp>
+      <p:sp>
+        <p:nvSpPr>
+          <p:cNvPr id="9" name="TextBox 8"/>
+          <p:cNvSpPr txBox="1"/>
+          <p:nvPr/>
+        </p:nvSpPr>
+        <p:spPr>
+          <a:xfrm>
+            <a:off x="4419600" y="2400300"/>
+            <a:ext cx="3352800" cy="3048000"/>
+          </a:xfrm>
+          <a:prstGeom prst="rect">
+            <a:avLst/>
+          </a:prstGeom>
+          <a:noFill/>
+        </p:spPr>
+        <p:txBody>
+          <a:bodyPr wrap="square" lIns="0" tIns="0" rIns="0" bIns="0" anchor="t">
+            <a:spAutoFit/>
+          </a:bodyPr>
+          <a:lstStyle/>
+          <a:p>
+            <a:pPr>
+              <a:lnSpc>
+                <a:spcPct val="130000"/>
+              </a:lnSpc>
+              <a:spcBef>
+                <a:spcPts val="0"/>
+              </a:spcBef>
+              <a:spcAft>
+                <a:spcPts val="150"/>
+              </a:spcAft>
+            </a:pPr>
+            <a:r>
+              <a:rPr lang="fr-FR" sz="1500" b="0" i="0" dirty="0">
+                <a:solidFill>
+                  <a:srgbClr val="56616A"/>
+                </a:solidFill>
+                <a:latin typeface="Segoe UI"/>
+                <a:cs typeface="Segoe UI"/>
+              </a:rPr>
+              <a:t>— </a:t>
+            </a:r>
+            <a:r>
+              <a:rPr lang="fr-FR" sz="1500" b="0" i="0" dirty="0">
+                <a:solidFill>
+                  <a:srgbClr val="13171B"/>
+                </a:solidFill>
+                <a:latin typeface="Segoe UI"/>
+                <a:cs typeface="Segoe UI"/>
+              </a:rPr>
+              <a:t>Seuils par langue</a:t>
+            </a:r>
+          </a:p>
+          <a:p>
+            <a:pPr>
+              <a:lnSpc>
+                <a:spcPct val="130000"/>
+              </a:lnSpc>
+              <a:spcBef>
+                <a:spcPts val="0"/>
+              </a:spcBef>
+              <a:spcAft>
+                <a:spcPts val="750"/>
+              </a:spcAft>
+            </a:pPr>
+            <a:r>
+              <a:rPr lang="fr-FR" sz="1125" b="0" i="0" dirty="0">
+                <a:solidFill>
+                  <a:srgbClr val="56616A"/>
+                </a:solidFill>
+                <a:latin typeface="Segoe UI"/>
+                <a:cs typeface="Segoe UI"/>
+              </a:rPr>
+              <a:t>25 mots en français, 21 en anglais : une ligne de données</a:t>
+            </a:r>
+          </a:p>
+          <a:p>
+            <a:pPr>
+              <a:lnSpc>
+                <a:spcPct val="130000"/>
+              </a:lnSpc>
+              <a:spcBef>
+                <a:spcPts val="0"/>
+              </a:spcBef>
+              <a:spcAft>
+                <a:spcPts val="150"/>
+              </a:spcAft>
+            </a:pPr>
+            <a:r>
+              <a:rPr lang="fr-FR" sz="1500" b="0" i="0" dirty="0">
+                <a:solidFill>
+                  <a:srgbClr val="56616A"/>
+                </a:solidFill>
+                <a:latin typeface="Segoe UI"/>
+                <a:cs typeface="Segoe UI"/>
+              </a:rPr>
+              <a:t>— </a:t>
+            </a:r>
+            <a:r>
+              <a:rPr lang="fr-FR" sz="1500" b="0" i="0" dirty="0">
+                <a:solidFill>
+                  <a:srgbClr val="13171B"/>
+                </a:solidFill>
+                <a:latin typeface="Segoe UI"/>
+                <a:cs typeface="Segoe UI"/>
+              </a:rPr>
+              <a:t>Listes de mots en base, par langue</a:t>
+            </a:r>
+          </a:p>
+          <a:p>
+            <a:pPr>
+              <a:lnSpc>
+                <a:spcPct val="130000"/>
+              </a:lnSpc>
+              <a:spcBef>
+                <a:spcPts val="0"/>
+              </a:spcBef>
+              <a:spcAft>
+                <a:spcPts val="750"/>
+              </a:spcAft>
+            </a:pPr>
+            <a:r>
+              <a:rPr lang="fr-FR" sz="1125" b="0" i="0" dirty="0">
+                <a:solidFill>
+                  <a:srgbClr val="56616A"/>
+                </a:solidFill>
+                <a:latin typeface="Segoe UI"/>
+                <a:cs typeface="Segoe UI"/>
+              </a:rPr>
+              <a:t>une langue de plus = des données, pas du code</a:t>
+            </a:r>
+          </a:p>
+          <a:p>
+            <a:pPr>
+              <a:lnSpc>
+                <a:spcPct val="130000"/>
+              </a:lnSpc>
+              <a:spcBef>
+                <a:spcPts val="0"/>
+              </a:spcBef>
+              <a:spcAft>
+                <a:spcPts val="150"/>
+              </a:spcAft>
+            </a:pPr>
+            <a:r>
+              <a:rPr lang="fr-FR" sz="1500" b="0" i="0" dirty="0">
+                <a:solidFill>
+                  <a:srgbClr val="56616A"/>
+                </a:solidFill>
+                <a:latin typeface="Segoe UI"/>
+                <a:cs typeface="Segoe UI"/>
+              </a:rPr>
+              <a:t>— </a:t>
+            </a:r>
+            <a:r>
+              <a:rPr lang="fr-FR" sz="1500" b="0" i="0" dirty="0">
+                <a:solidFill>
+                  <a:srgbClr val="13171B"/>
+                </a:solidFill>
+                <a:latin typeface="Segoe UI"/>
+                <a:cs typeface="Segoe UI"/>
+              </a:rPr>
+              <a:t>Règles filtrées par langue</a:t>
+            </a:r>
+          </a:p>
+          <a:p>
+            <a:pPr>
+              <a:lnSpc>
+                <a:spcPct val="130000"/>
+              </a:lnSpc>
+              <a:spcBef>
+                <a:spcPts val="0"/>
+              </a:spcBef>
+              <a:spcAft>
+                <a:spcPts val="750"/>
+              </a:spcAft>
+            </a:pPr>
+            <a:r>
+              <a:rPr lang="fr-FR" sz="1125" b="0" i="0" dirty="0">
+                <a:solidFill>
+                  <a:srgbClr val="56616A"/>
+                </a:solidFill>
+                <a:latin typeface="Segoe UI"/>
+                <a:cs typeface="Segoe UI"/>
+              </a:rPr>
+              <a:t>une langue non couverte ne fait jamais planter l'analyse</a:t>
+            </a:r>
+          </a:p>
+          <a:p>
+            <a:pPr>
+              <a:lnSpc>
+                <a:spcPct val="130000"/>
+              </a:lnSpc>
+              <a:spcBef>
+                <a:spcPts val="0"/>
+              </a:spcBef>
+              <a:spcAft>
+                <a:spcPts val="150"/>
+              </a:spcAft>
+            </a:pPr>
+            <a:r>
+              <a:rPr lang="fr-FR" sz="1500" b="0" i="0" dirty="0">
+                <a:solidFill>
+                  <a:srgbClr val="56616A"/>
+                </a:solidFill>
+                <a:latin typeface="Segoe UI"/>
+                <a:cs typeface="Segoe UI"/>
+              </a:rPr>
+              <a:t>— </a:t>
+            </a:r>
+            <a:r>
+              <a:rPr lang="fr-FR" sz="1500" b="0" i="0" dirty="0">
+                <a:solidFill>
+                  <a:srgbClr val="13171B"/>
+                </a:solidFill>
+                <a:latin typeface="Segoe UI"/>
+                <a:cs typeface="Segoe UI"/>
+              </a:rPr>
+              <a:t>spaCy dans un seul module</a:t>
+            </a:r>
+          </a:p>
+          <a:p>
+            <a:pPr>
+              <a:lnSpc>
+                <a:spcPct val="130000"/>
+              </a:lnSpc>
+              <a:spcBef>
+                <a:spcPts val="0"/>
+              </a:spcBef>
+              <a:spcAft>
+                <a:spcPts val="750"/>
+              </a:spcAft>
+            </a:pPr>
+            <a:r>
+              <a:rPr lang="fr-FR" sz="1125" b="0" i="0" dirty="0">
+                <a:solidFill>
+                  <a:srgbClr val="56616A"/>
+                </a:solidFill>
+                <a:latin typeface="Segoe UI"/>
+                <a:cs typeface="Segoe UI"/>
+              </a:rPr>
+              <a:t>changer de modèle ne touche qu'un fichier</a:t>
+            </a:r>
+          </a:p>
+        </p:txBody>
+      </p:sp>
+      <p:sp>
+        <p:nvSpPr>
+          <p:cNvPr id="10" name="Rectangle 9"/>
+          <p:cNvSpPr/>
+          <p:nvPr/>
+        </p:nvSpPr>
+        <p:spPr>
+          <a:xfrm>
+            <a:off x="8153400" y="1809750"/>
+            <a:ext cx="3352800" cy="19050"/>
+          </a:xfrm>
+          <a:prstGeom prst="rect">
+            <a:avLst/>
+          </a:prstGeom>
+          <a:solidFill>
+            <a:srgbClr val="13171B"/>
+          </a:solidFill>
+          <a:ln>
+            <a:noFill/>
+          </a:ln>
+          <a:effectLst/>
+        </p:spPr>
+        <p:style>
+          <a:lnRef idx="1">
+            <a:schemeClr val="accent1"/>
+          </a:lnRef>
+          <a:fillRef idx="3">
+            <a:schemeClr val="accent1"/>
+          </a:fillRef>
+          <a:effectRef idx="2">
+            <a:schemeClr val="accent1"/>
+          </a:effectRef>
+          <a:fontRef idx="minor">
+            <a:schemeClr val="lt1"/>
+          </a:fontRef>
+        </p:style>
+        <p:txBody>
+          <a:bodyPr wrap="square" lIns="0" tIns="0" rIns="0" bIns="0" rtlCol="0" anchor="ctr"/>
+          <a:lstStyle/>
+          <a:p>
+            <a:pPr algn="ctr"/>
+            <a:endParaRPr/>
+          </a:p>
+        </p:txBody>
+      </p:sp>
+      <p:sp>
+        <p:nvSpPr>
+          <p:cNvPr id="11" name="TextBox 10"/>
+          <p:cNvSpPr txBox="1"/>
+          <p:nvPr/>
+        </p:nvSpPr>
+        <p:spPr>
+          <a:xfrm>
+            <a:off x="8153400" y="1943100"/>
+            <a:ext cx="3352800" cy="381000"/>
+          </a:xfrm>
+          <a:prstGeom prst="rect">
+            <a:avLst/>
+          </a:prstGeom>
+          <a:noFill/>
+        </p:spPr>
+        <p:txBody>
+          <a:bodyPr wrap="square" lIns="0" tIns="0" rIns="0" bIns="0" anchor="t">
+            <a:spAutoFit/>
+          </a:bodyPr>
+          <a:lstStyle/>
+          <a:p>
+            <a:pPr>
+              <a:lnSpc>
+                <a:spcPct val="135000"/>
+              </a:lnSpc>
+              <a:spcBef>
+                <a:spcPts val="0"/>
+              </a:spcBef>
+              <a:spcAft>
+                <a:spcPts val="0"/>
+              </a:spcAft>
+            </a:pPr>
+            <a:r>
+              <a:rPr lang="fr-FR" sz="1650" b="1" i="0" dirty="0">
+                <a:solidFill>
+                  <a:srgbClr val="13171B"/>
+                </a:solidFill>
+                <a:latin typeface="Segoe UI"/>
+                <a:cs typeface="Segoe UI"/>
+              </a:rPr>
+              <a:t>Reste à faire</a:t>
+            </a:r>
+          </a:p>
+        </p:txBody>
+      </p:sp>
+      <p:sp>
+        <p:nvSpPr>
+          <p:cNvPr id="12" name="TextBox 11"/>
+          <p:cNvSpPr txBox="1"/>
+          <p:nvPr/>
+        </p:nvSpPr>
+        <p:spPr>
+          <a:xfrm>
+            <a:off x="8153400" y="2400300"/>
+            <a:ext cx="3352800" cy="3048000"/>
+          </a:xfrm>
+          <a:prstGeom prst="rect">
+            <a:avLst/>
+          </a:prstGeom>
+          <a:noFill/>
+        </p:spPr>
+        <p:txBody>
+          <a:bodyPr wrap="square" lIns="0" tIns="0" rIns="0" bIns="0" anchor="t">
+            <a:spAutoFit/>
+          </a:bodyPr>
+          <a:lstStyle/>
+          <a:p>
+            <a:pPr>
+              <a:lnSpc>
+                <a:spcPct val="130000"/>
+              </a:lnSpc>
+              <a:spcBef>
+                <a:spcPts val="0"/>
+              </a:spcBef>
+              <a:spcAft>
+                <a:spcPts val="150"/>
+              </a:spcAft>
+            </a:pPr>
+            <a:r>
+              <a:rPr lang="fr-FR" sz="1500" b="0" i="0" dirty="0">
+                <a:solidFill>
+                  <a:srgbClr val="56616A"/>
+                </a:solidFill>
+                <a:latin typeface="Segoe UI"/>
+                <a:cs typeface="Segoe UI"/>
+              </a:rPr>
+              <a:t>— </a:t>
+            </a:r>
+            <a:r>
+              <a:rPr lang="fr-FR" sz="1500" b="0" i="0" dirty="0">
+                <a:solidFill>
+                  <a:srgbClr val="13171B"/>
+                </a:solidFill>
+                <a:latin typeface="Segoe UI"/>
+                <a:cs typeface="Segoe UI"/>
+              </a:rPr>
+              <a:t>L'anglais d'abord</a:t>
+            </a:r>
+          </a:p>
+          <a:p>
+            <a:pPr>
+              <a:lnSpc>
+                <a:spcPct val="130000"/>
+              </a:lnSpc>
+              <a:spcBef>
+                <a:spcPts val="0"/>
+              </a:spcBef>
+              <a:spcAft>
+                <a:spcPts val="750"/>
+              </a:spcAft>
+            </a:pPr>
+            <a:r>
+              <a:rPr lang="fr-FR" sz="1125" b="0" i="0" dirty="0">
+                <a:solidFill>
+                  <a:srgbClr val="56616A"/>
+                </a:solidFill>
+                <a:latin typeface="Segoe UI"/>
+                <a:cs typeface="Segoe UI"/>
+              </a:rPr>
+              <a:t>une ligne dans REGLES, des seuils, un lexique</a:t>
+            </a:r>
+          </a:p>
+          <a:p>
+            <a:pPr>
+              <a:lnSpc>
+                <a:spcPct val="130000"/>
+              </a:lnSpc>
+              <a:spcBef>
+                <a:spcPts val="0"/>
+              </a:spcBef>
+              <a:spcAft>
+                <a:spcPts val="150"/>
+              </a:spcAft>
+            </a:pPr>
+            <a:r>
+              <a:rPr lang="fr-FR" sz="1500" b="0" i="0" dirty="0">
+                <a:solidFill>
+                  <a:srgbClr val="56616A"/>
+                </a:solidFill>
+                <a:latin typeface="Segoe UI"/>
+                <a:cs typeface="Segoe UI"/>
+              </a:rPr>
+              <a:t>— </a:t>
+            </a:r>
+            <a:r>
+              <a:rPr lang="fr-FR" sz="1500" b="0" i="0" dirty="0">
+                <a:solidFill>
+                  <a:srgbClr val="13171B"/>
+                </a:solidFill>
+                <a:latin typeface="Segoe UI"/>
+                <a:cs typeface="Segoe UI"/>
+              </a:rPr>
+              <a:t>Un modèle spaCy par langue</a:t>
+            </a:r>
+          </a:p>
+          <a:p>
+            <a:pPr>
+              <a:lnSpc>
+                <a:spcPct val="130000"/>
+              </a:lnSpc>
+              <a:spcBef>
+                <a:spcPts val="0"/>
+              </a:spcBef>
+              <a:spcAft>
+                <a:spcPts val="750"/>
+              </a:spcAft>
+            </a:pPr>
+            <a:r>
+              <a:rPr lang="fr-FR" sz="1125" b="0" i="0" dirty="0">
+                <a:solidFill>
+                  <a:srgbClr val="56616A"/>
+                </a:solidFill>
+                <a:latin typeface="Segoe UI"/>
+                <a:cs typeface="Segoe UI"/>
+              </a:rPr>
+              <a:t>il n'en existe pas pour toutes : ni maltais, ni irlandais</a:t>
+            </a:r>
+          </a:p>
+          <a:p>
+            <a:pPr>
+              <a:lnSpc>
+                <a:spcPct val="130000"/>
+              </a:lnSpc>
+              <a:spcBef>
+                <a:spcPts val="0"/>
+              </a:spcBef>
+              <a:spcAft>
+                <a:spcPts val="150"/>
+              </a:spcAft>
+            </a:pPr>
+            <a:r>
+              <a:rPr lang="fr-FR" sz="1500" b="0" i="0" dirty="0">
+                <a:solidFill>
+                  <a:srgbClr val="56616A"/>
+                </a:solidFill>
+                <a:latin typeface="Segoe UI"/>
+                <a:cs typeface="Segoe UI"/>
+              </a:rPr>
+              <a:t>— </a:t>
+            </a:r>
+            <a:r>
+              <a:rPr lang="fr-FR" sz="1500" b="0" i="0" dirty="0">
+                <a:solidFill>
+                  <a:srgbClr val="13171B"/>
+                </a:solidFill>
+                <a:latin typeface="Segoe UI"/>
+                <a:cs typeface="Segoe UI"/>
+              </a:rPr>
+              <a:t>Des lexiques par des linguistes</a:t>
+            </a:r>
+          </a:p>
+          <a:p>
+            <a:pPr>
+              <a:lnSpc>
+                <a:spcPct val="130000"/>
+              </a:lnSpc>
+              <a:spcBef>
+                <a:spcPts val="0"/>
+              </a:spcBef>
+              <a:spcAft>
+                <a:spcPts val="750"/>
+              </a:spcAft>
+            </a:pPr>
+            <a:r>
+              <a:rPr lang="fr-FR" sz="1125" b="0" i="0" dirty="0">
+                <a:solidFill>
+                  <a:srgbClr val="56616A"/>
+                </a:solidFill>
+                <a:latin typeface="Segoe UI"/>
+                <a:cs typeface="Segoe UI"/>
+              </a:rPr>
+              <a:t>chaque langue a ses propres lourdeurs administratives</a:t>
+            </a:r>
+          </a:p>
+        </p:txBody>
+      </p:sp>
+      <p:sp>
+        <p:nvSpPr>
+          <p:cNvPr id="13" name="Rectangle 12"/>
+          <p:cNvSpPr/>
+          <p:nvPr/>
+        </p:nvSpPr>
+        <p:spPr>
+          <a:xfrm>
+            <a:off x="685800" y="5806440"/>
+            <a:ext cx="10817352" cy="18288"/>
+          </a:xfrm>
+          <a:prstGeom prst="rect">
+            <a:avLst/>
+          </a:prstGeom>
+          <a:solidFill>
+            <a:srgbClr val="13171B"/>
+          </a:solidFill>
+          <a:ln>
+            <a:noFill/>
+          </a:ln>
+          <a:effectLst/>
+        </p:spPr>
+        <p:style>
+          <a:lnRef idx="1">
+            <a:schemeClr val="accent1"/>
+          </a:lnRef>
+          <a:fillRef idx="3">
+            <a:schemeClr val="accent1"/>
+          </a:fillRef>
+          <a:effectRef idx="2">
+            <a:schemeClr val="accent1"/>
+          </a:effectRef>
+          <a:fontRef idx="minor">
+            <a:schemeClr val="lt1"/>
+          </a:fontRef>
+        </p:style>
+        <p:txBody>
+          <a:bodyPr rtlCol="0" anchor="ctr"/>
+          <a:lstStyle/>
+          <a:p>
+            <a:pPr algn="ctr"/>
+            <a:endParaRPr/>
+          </a:p>
+        </p:txBody>
+      </p:sp>
+      <p:sp>
+        <p:nvSpPr>
+          <p:cNvPr id="14" name="TextBox 13"/>
+          <p:cNvSpPr txBox="1"/>
+          <p:nvPr/>
+        </p:nvSpPr>
+        <p:spPr>
+          <a:xfrm>
+            <a:off x="685800" y="5943600"/>
+            <a:ext cx="10817352" cy="365760"/>
+          </a:xfrm>
+          <a:prstGeom prst="rect">
+            <a:avLst/>
+          </a:prstGeom>
+          <a:noFill/>
+        </p:spPr>
+        <p:txBody>
+          <a:bodyPr wrap="square" lIns="0" tIns="0" rIns="0" bIns="0">
+            <a:spAutoFit/>
+          </a:bodyPr>
+          <a:lstStyle/>
+          <a:p>
+            <a:pPr>
+              <a:lnSpc>
+                <a:spcPct val="120000"/>
+              </a:lnSpc>
+              <a:spcBef>
+                <a:spcPts val="0"/>
+              </a:spcBef>
+              <a:spcAft>
+                <a:spcPts val="0"/>
+              </a:spcAft>
+            </a:pPr>
+            <a:r>
+              <a:rPr lang="fr-FR" sz="1350" b="1" i="0" dirty="0">
+                <a:solidFill>
+                  <a:srgbClr val="13171B"/>
+                </a:solidFill>
+                <a:latin typeface="Segoe UI"/>
+                <a:cs typeface="Segoe UI"/>
+              </a:rPr>
+              <a:t>Livré : le français</a:t>
+            </a:r>
+            <a:r>
+              <a:rPr lang="fr-FR" sz="1350" b="0" i="0" dirty="0">
+                <a:solidFill>
+                  <a:srgbClr val="56616A"/>
+                </a:solidFill>
+                <a:latin typeface="Segoe UI"/>
+                <a:cs typeface="Segoe UI"/>
+              </a:rPr>
+              <a:t>  ·  le moteur ne suppose aucune langue : c'est le Document qui porte la sienne</a:t>
+            </a:r>
+          </a:p>
+        </p:txBody>
+      </p:sp>
+    </p:spTree>
+  </p:cSld>
+  <p:clrMapOvr>
+    <a:masterClrMapping/>
+  </p:clrMapOvr>
+</p:sld>
+</file>
+
+<file path=ppt/slides/slide22.xml><?xml version="1.0" encoding="utf-8"?>
+<p:sld xmlns:a="http://schemas.openxmlformats.org/drawingml/2006/main" xmlns:r="http://schemas.openxmlformats.org/officeDocument/2006/relationships" xmlns:p="http://schemas.openxmlformats.org/presentationml/2006/main">
+  <p:cSld>
+    <p:bg>
+      <p:bgPr>
+        <a:solidFill>
+          <a:srgbClr val="FBFCFC"/>
+        </a:solidFill>
+        <a:effectLst/>
+      </p:bgPr>
+    </p:bg>
+    <p:spTree>
+      <p:nvGrpSpPr>
+        <p:cNvPr id="1" name=""/>
+        <p:cNvGrpSpPr/>
+        <p:nvPr/>
+      </p:nvGrpSpPr>
+      <p:grpSpPr>
+        <a:xfrm>
+          <a:off x="0" y="0"/>
+          <a:ext cx="0" cy="0"/>
+          <a:chOff x="0" y="0"/>
+          <a:chExt cx="0" cy="0"/>
+        </a:xfrm>
+      </p:grpSpPr>
+      <p:sp>
+        <p:nvSpPr>
+          <p:cNvPr id="2" name="TextBox 1"/>
+          <p:cNvSpPr txBox="1"/>
+          <p:nvPr/>
+        </p:nvSpPr>
+        <p:spPr>
+          <a:xfrm>
+            <a:off x="685800" y="323850"/>
+            <a:ext cx="10820400" cy="247650"/>
+          </a:xfrm>
+          <a:prstGeom prst="rect">
+            <a:avLst/>
+          </a:prstGeom>
+          <a:noFill/>
+        </p:spPr>
+        <p:txBody>
+          <a:bodyPr wrap="square" lIns="0" tIns="0" rIns="0" bIns="0" anchor="t">
+            <a:spAutoFit/>
+          </a:bodyPr>
+          <a:lstStyle/>
+          <a:p>
+            <a:pPr>
+              <a:lnSpc>
+                <a:spcPct val="135000"/>
+              </a:lnSpc>
+              <a:spcBef>
+                <a:spcPts val="0"/>
+              </a:spcBef>
+              <a:spcAft>
+                <a:spcPts val="0"/>
+              </a:spcAft>
+            </a:pPr>
+            <a:r>
               <a:rPr sz="975" b="1" i="0">
                 <a:solidFill>
                   <a:srgbClr val="56616A"/>
@@ -22348,6 +23739,154 @@
               </a:solidFill>
               <a:latin typeface="Segoe UI"/>
             </a:endParaRPr>
+          </a:p>
+        </p:txBody>
+      </p:sp>
+      <p:sp>
+        <p:nvSpPr>
+          <p:cNvPr id="8" name="Titre guide"/>
+          <p:cNvSpPr txBox="1"/>
+          <p:nvPr/>
+        </p:nvSpPr>
+        <p:spPr>
+          <a:xfrm>
+            <a:off x="685800" y="5372100"/>
+            <a:ext cx="10820400" cy="222885"/>
+          </a:xfrm>
+          <a:prstGeom prst="rect">
+            <a:avLst/>
+          </a:prstGeom>
+          <a:noFill/>
+        </p:spPr>
+        <p:txBody>
+          <a:bodyPr wrap="square" lIns="0" tIns="0" rIns="0" bIns="0" anchor="t">
+            <a:spAutoFit/>
+          </a:bodyPr>
+          <a:lstStyle/>
+          <a:p>
+            <a:pPr>
+              <a:lnSpc>
+                <a:spcPct val="135000"/>
+              </a:lnSpc>
+              <a:spcBef>
+                <a:spcPts val="0"/>
+              </a:spcBef>
+              <a:spcAft>
+                <a:spcPts val="0"/>
+              </a:spcAft>
+            </a:pPr>
+            <a:r>
+              <a:rPr sz="975" b="1" i="0">
+                <a:solidFill>
+                  <a:srgbClr val="56616A"/>
+                </a:solidFill>
+                <a:latin typeface="Segoe UI"/>
+              </a:rPr>
+              <a:t>LES DIX PRINCIPES, À LA SOURCE</a:t>
+            </a:r>
+          </a:p>
+        </p:txBody>
+      </p:sp>
+      <p:sp>
+        <p:nvSpPr>
+          <p:cNvPr id="9" name="Lien guide"/>
+          <p:cNvSpPr txBox="1"/>
+          <p:nvPr/>
+        </p:nvSpPr>
+        <p:spPr>
+          <a:xfrm>
+            <a:off x="685800" y="5638800"/>
+            <a:ext cx="10820400" cy="500000"/>
+          </a:xfrm>
+          <a:prstGeom prst="rect">
+            <a:avLst/>
+          </a:prstGeom>
+          <a:noFill/>
+        </p:spPr>
+        <p:txBody>
+          <a:bodyPr wrap="square" lIns="0" tIns="0" rIns="0" bIns="0" anchor="t">
+            <a:spAutoFit/>
+          </a:bodyPr>
+          <a:lstStyle/>
+          <a:p>
+            <a:pPr>
+              <a:lnSpc>
+                <a:spcPct val="130000"/>
+              </a:lnSpc>
+              <a:spcBef>
+                <a:spcPts val="0"/>
+              </a:spcBef>
+              <a:spcAft>
+                <a:spcPts val="0"/>
+              </a:spcAft>
+            </a:pPr>
+            <a:r>
+              <a:rPr lang="fr-FR" sz="1350" b="0" i="0" dirty="0">
+                <a:solidFill>
+                  <a:srgbClr val="56616A"/>
+                </a:solidFill>
+                <a:latin typeface="Segoe UI"/>
+                <a:cs typeface="Segoe UI"/>
+              </a:rPr>
+              <a:t>Commission européenne, DG Traduction, </a:t>
+            </a:r>
+            <a:r>
+              <a:rPr lang="fr-FR" sz="1350" b="1" i="0" dirty="0">
+                <a:solidFill>
+                  <a:srgbClr val="13171B"/>
+                </a:solidFill>
+                <a:latin typeface="Segoe UI"/>
+                <a:cs typeface="Segoe UI"/>
+                <a:hlinkClick r:id="rId3">
+                  <a:extLst>
+                    <a:ext uri="{A12FA001-AC4F-418D-AE19-62706E023703}">
+                      <ahyp:hlinkClr xmlns:ahyp="http://schemas.microsoft.com/office/drawing/2018/hyperlinkcolor" val="tx"/>
+                    </a:ext>
+                  </a:extLst>
+                </a:hlinkClick>
+              </a:rPr>
+              <a:t>« Rédiger clairement »</a:t>
+            </a:r>
+            <a:r>
+              <a:rPr lang="fr-FR" sz="1350" b="0" i="0" dirty="0">
+                <a:solidFill>
+                  <a:srgbClr val="56616A"/>
+                </a:solidFill>
+                <a:latin typeface="Segoe UI"/>
+                <a:cs typeface="Segoe UI"/>
+              </a:rPr>
+              <a:t>, 2015 — disponible dans les 24 langues officielles.</a:t>
+            </a:r>
+          </a:p>
+          <a:p>
+            <a:pPr>
+              <a:lnSpc>
+                <a:spcPct val="130000"/>
+              </a:lnSpc>
+              <a:spcBef>
+                <a:spcPts val="0"/>
+              </a:spcBef>
+              <a:spcAft>
+                <a:spcPts val="0"/>
+              </a:spcAft>
+            </a:pPr>
+            <a:r>
+              <a:rPr lang="fr-FR" sz="1125" b="0" i="0" dirty="0">
+                <a:solidFill>
+                  <a:srgbClr val="7446C9"/>
+                </a:solidFill>
+                <a:latin typeface="Segoe UI"/>
+                <a:cs typeface="Segoe UI"/>
+                <a:hlinkClick r:id="rId3">
+                  <a:extLst>
+                    <a:ext uri="{A12FA001-AC4F-418D-AE19-62706E023703}">
+                      <ahyp:hlinkClr xmlns:ahyp="http://schemas.microsoft.com/office/drawing/2018/hyperlinkcolor" val="tx"/>
+                    </a:ext>
+                  </a:extLst>
+                </a:hlinkClick>
+              </a:rPr>
+              <a:t>https://op.europa.eu/fr/publication-detail/-/publication/725b7eb0-d92e-11e5-8fea-01aa75ed71a1</a:t>
+            </a:r>
           </a:p>
         </p:txBody>
       </p:sp>
@@ -24538,7 +26077,7 @@
           <a:noFill/>
         </p:spPr>
         <p:txBody>
-          <a:bodyPr wrap="square" lIns="0" rIns="0" tIns="0" bIns="0">
+          <a:bodyPr wrap="square" lIns="0" tIns="0" rIns="0" bIns="0">
             <a:spAutoFit/>
           </a:bodyPr>
           <a:lstStyle/>
@@ -24562,7 +26101,7 @@
                 <a:latin typeface="Segoe UI"/>
                 <a:cs typeface="Segoe UI"/>
               </a:rPr>
-              <a:t xml:space="preserve">Une phrase de plus de 25 mots est signalée, avec sa longueur.</a:t>
+              <a:t>Une phrase de plus de 25 mots est signalée, avec sa longueur.</a:t>
             </a:r>
           </a:p>
         </p:txBody>
@@ -24584,7 +26123,7 @@
           <a:noFill/>
         </p:spPr>
         <p:txBody>
-          <a:bodyPr wrap="square" lIns="0" rIns="0" tIns="0" bIns="0">
+          <a:bodyPr wrap="square" lIns="0" tIns="0" rIns="0" bIns="0">
             <a:spAutoFit/>
           </a:bodyPr>
           <a:lstStyle/>
@@ -24608,7 +26147,7 @@
                 <a:latin typeface="Segoe UI"/>
                 <a:cs typeface="Segoe UI"/>
               </a:rPr>
-              <a:t xml:space="preserve">16 locutions administratives, chacune avec son équivalent simple.</a:t>
+              <a:t>16 locutions administratives, chacune avec son équivalent simple.</a:t>
             </a:r>
           </a:p>
         </p:txBody>
@@ -24630,7 +26169,7 @@
           <a:noFill/>
         </p:spPr>
         <p:txBody>
-          <a:bodyPr wrap="square" lIns="0" rIns="0" tIns="0" bIns="0">
+          <a:bodyPr wrap="square" lIns="0" tIns="0" rIns="0" bIns="0">
             <a:spAutoFit/>
           </a:bodyPr>
           <a:lstStyle/>
@@ -24654,7 +26193,7 @@
                 <a:latin typeface="Segoe UI"/>
                 <a:cs typeface="Segoe UI"/>
               </a:rPr>
-              <a:t xml:space="preserve">Un passif sans agent cache qui décide : il est signalé plus fort.</a:t>
+              <a:t>Un passif sans agent cache qui décide : il est signalé plus fort.</a:t>
             </a:r>
           </a:p>
         </p:txBody>
@@ -24676,7 +26215,7 @@
           <a:noFill/>
         </p:spPr>
         <p:txBody>
-          <a:bodyPr wrap="square" lIns="0" rIns="0" tIns="0" bIns="0">
+          <a:bodyPr wrap="square" lIns="0" tIns="0" rIns="0" bIns="0">
             <a:spAutoFit/>
           </a:bodyPr>
           <a:lstStyle/>
@@ -24700,7 +26239,7 @@
                 <a:latin typeface="Segoe UI"/>
                 <a:cs typeface="Segoe UI"/>
               </a:rPr>
-              <a:t xml:space="preserve">Chaque signalement affiche son principe : </a:t>
+              <a:t>Chaque signalement affiche son principe : </a:t>
             </a:r>
             <a:r>
               <a:rPr lang="fr-FR" sz="1500" b="1" i="0">
@@ -24710,7 +26249,7 @@
                 <a:latin typeface="Segoe UI"/>
                 <a:cs typeface="Segoe UI"/>
               </a:rPr>
-              <a:t xml:space="preserve">« P8 — préciser qui fait quoi »</a:t>
+              <a:t>« P8 — préciser qui fait quoi »</a:t>
             </a:r>
             <a:r>
               <a:rPr lang="fr-FR" sz="1500" b="0" i="0">
@@ -24720,7 +26259,7 @@
                 <a:latin typeface="Segoe UI"/>
                 <a:cs typeface="Segoe UI"/>
               </a:rPr>
-              <a:t xml:space="preserve">. Les sept autres principes : diapo suivante.</a:t>
+              <a:t>. Les sept autres principes : diapo suivante.</a:t>
             </a:r>
           </a:p>
         </p:txBody>
@@ -25966,7 +27505,7 @@
           <a:noFill/>
         </p:spPr>
         <p:txBody>
-          <a:bodyPr wrap="square" lIns="0" rIns="0" tIns="0" bIns="0">
+          <a:bodyPr wrap="square" lIns="0" tIns="0" rIns="0" bIns="0">
             <a:spAutoFit/>
           </a:bodyPr>
           <a:lstStyle/>
@@ -25990,7 +27529,7 @@
                 <a:latin typeface="Segoe UI"/>
                 <a:cs typeface="Segoe UI"/>
               </a:rPr>
-              <a:t xml:space="preserve">PISTES D’EXTENSION</a:t>
+              <a:t>PISTES D’EXTENSION</a:t>
             </a:r>
             <a:r>
               <a:rPr lang="fr-FR" sz="975" b="0" i="0">
@@ -26000,7 +27539,7 @@
                 <a:latin typeface="Segoe UI"/>
                 <a:cs typeface="Segoe UI"/>
               </a:rPr>
-              <a:t xml:space="preserve">   détectables, pas encore livrées</a:t>
+              <a:t>   détectables, pas encore livrées</a:t>
             </a:r>
           </a:p>
         </p:txBody>
@@ -26022,7 +27561,7 @@
           <a:noFill/>
         </p:spPr>
         <p:txBody>
-          <a:bodyPr wrap="square" lIns="0" rIns="0" tIns="0" bIns="0">
+          <a:bodyPr wrap="square" lIns="0" tIns="0" rIns="0" bIns="0">
             <a:spAutoFit/>
           </a:bodyPr>
           <a:lstStyle/>
@@ -26046,7 +27585,7 @@
                 <a:latin typeface="Segoe UI"/>
                 <a:cs typeface="Segoe UI"/>
               </a:rPr>
-              <a:t xml:space="preserve">Ils laissent une trace mesurable : un nom en « -tion » à la place d’un verbe, un sigle jamais développé.</a:t>
+              <a:t>Ils laissent une trace mesurable : un nom en « -tion » à la place d’un verbe, un sigle jamais développé.</a:t>
             </a:r>
           </a:p>
           <a:p>
@@ -26069,7 +27608,7 @@
                 <a:latin typeface="Segoe UI"/>
                 <a:cs typeface="Segoe UI"/>
               </a:rPr>
-              <a:t xml:space="preserve">Même moteur : une classe de règle et une ligne dans REGLES.</a:t>
+              <a:t>Même moteur : une classe de règle et une ligne dans REGLES.</a:t>
             </a:r>
           </a:p>
         </p:txBody>
@@ -26091,7 +27630,7 @@
           <a:noFill/>
         </p:spPr>
         <p:txBody>
-          <a:bodyPr wrap="square" lIns="0" rIns="0" tIns="0" bIns="0">
+          <a:bodyPr wrap="square" lIns="0" tIns="0" rIns="0" bIns="0">
             <a:spAutoFit/>
           </a:bodyPr>
           <a:lstStyle/>
@@ -26115,7 +27654,7 @@
                 <a:latin typeface="Segoe UI"/>
                 <a:cs typeface="Segoe UI"/>
               </a:rPr>
-              <a:t xml:space="preserve">JUGEMENT DU RÉDACTEUR</a:t>
+              <a:t>JUGEMENT DU RÉDACTEUR</a:t>
             </a:r>
             <a:r>
               <a:rPr lang="fr-FR" sz="975" b="0" i="0">
@@ -26125,7 +27664,7 @@
                 <a:latin typeface="Segoe UI"/>
                 <a:cs typeface="Segoe UI"/>
               </a:rPr>
-              <a:t xml:space="preserve">   hors de portée d’une machine</a:t>
+              <a:t>   hors de portée d’une machine</a:t>
             </a:r>
           </a:p>
         </p:txBody>
@@ -26803,7 +28342,7 @@
                 <a:latin typeface="Consolas"/>
                 <a:cs typeface="Consolas"/>
               </a:rPr>
-              <a:t xml:space="preserve">1</a:t>
+              <a:t>1</a:t>
             </a:r>
           </a:p>
         </p:txBody>
@@ -26849,7 +28388,7 @@
                 <a:latin typeface="Segoe UI"/>
                 <a:cs typeface="Segoe UI"/>
               </a:rPr>
-              <a:t xml:space="preserve">Analyser</a:t>
+              <a:t>Analyser</a:t>
             </a:r>
           </a:p>
           <a:p>
@@ -26872,7 +28411,7 @@
                 <a:latin typeface="Segoe UI"/>
                 <a:cs typeface="Segoe UI"/>
               </a:rPr>
-              <a:t xml:space="preserve">deux paragraphes : les trois règles se déclenchent</a:t>
+              <a:t>deux paragraphes : les trois règles se déclenchent</a:t>
             </a:r>
           </a:p>
         </p:txBody>
@@ -26963,7 +28502,7 @@
                 <a:latin typeface="Consolas"/>
                 <a:cs typeface="Consolas"/>
               </a:rPr>
-              <a:t xml:space="preserve">2</a:t>
+              <a:t>2</a:t>
             </a:r>
           </a:p>
         </p:txBody>
@@ -27009,7 +28548,7 @@
                 <a:latin typeface="Segoe UI"/>
                 <a:cs typeface="Segoe UI"/>
               </a:rPr>
-              <a:t xml:space="preserve">Cliquer un surlignage</a:t>
+              <a:t>Cliquer un surlignage</a:t>
             </a:r>
           </a:p>
           <a:p>
@@ -27032,7 +28571,7 @@
                 <a:latin typeface="Segoe UI"/>
                 <a:cs typeface="Segoe UI"/>
               </a:rPr>
-              <a:t xml:space="preserve">la fiche s’ouvre, avec son principe</a:t>
+              <a:t>la fiche s’ouvre, avec son principe</a:t>
             </a:r>
           </a:p>
         </p:txBody>
@@ -27123,7 +28662,7 @@
                 <a:latin typeface="Consolas"/>
                 <a:cs typeface="Consolas"/>
               </a:rPr>
-              <a:t xml:space="preserve">3</a:t>
+              <a:t>3</a:t>
             </a:r>
           </a:p>
         </p:txBody>
@@ -27169,7 +28708,7 @@
                 <a:latin typeface="Segoe UI"/>
                 <a:cs typeface="Segoe UI"/>
               </a:rPr>
-              <a:t xml:space="preserve">Listes de mots</a:t>
+              <a:t>Listes de mots</a:t>
             </a:r>
           </a:p>
           <a:p>
@@ -27192,7 +28731,7 @@
                 <a:latin typeface="Segoe UI"/>
                 <a:cs typeface="Segoe UI"/>
               </a:rPr>
-              <a:t xml:space="preserve">ajouter « à cet égard », relancer : signalé</a:t>
+              <a:t>ajouter « à cet égard », relancer : signalé</a:t>
             </a:r>
           </a:p>
         </p:txBody>
@@ -27283,7 +28822,7 @@
                 <a:latin typeface="Consolas"/>
                 <a:cs typeface="Consolas"/>
               </a:rPr>
-              <a:t xml:space="preserve">4</a:t>
+              <a:t>4</a:t>
             </a:r>
           </a:p>
         </p:txBody>
@@ -27329,7 +28868,7 @@
                 <a:latin typeface="Segoe UI"/>
                 <a:cs typeface="Segoe UI"/>
               </a:rPr>
-              <a:t xml:space="preserve">Enregistrer</a:t>
+              <a:t>Enregistrer</a:t>
             </a:r>
           </a:p>
           <a:p>
@@ -27352,7 +28891,7 @@
                 <a:latin typeface="Segoe UI"/>
                 <a:cs typeface="Segoe UI"/>
               </a:rPr>
-              <a:t xml:space="preserve">sous un nom, puis relire : surlignage identique</a:t>
+              <a:t>sous un nom, puis relire : surlignage identique</a:t>
             </a:r>
           </a:p>
         </p:txBody>
@@ -27366,7 +28905,7 @@
           <p:nvPr/>
         </p:nvPicPr>
         <p:blipFill>
-          <a:blip r:embed="rId2"/>
+          <a:blip r:embed="rId3"/>
           <a:stretch>
             <a:fillRect/>
           </a:stretch>
@@ -27422,6 +28961,7 @@
           <a:lstStyle/>
           <a:p>
             <a:pPr algn="ctr"/>
+            <a:endParaRPr/>
           </a:p>
         </p:txBody>
       </p:sp>
@@ -27442,7 +28982,7 @@
           <a:noFill/>
         </p:spPr>
         <p:txBody>
-          <a:bodyPr wrap="square" lIns="0" rIns="0" tIns="0" bIns="0">
+          <a:bodyPr wrap="square" lIns="0" tIns="0" rIns="0" bIns="0">
             <a:spAutoFit/>
           </a:bodyPr>
           <a:lstStyle/>
@@ -27466,7 +29006,7 @@
                 <a:latin typeface="Segoe UI"/>
                 <a:cs typeface="Segoe UI"/>
               </a:rPr>
-              <a:t xml:space="preserve">AVANT DE COMMENCER</a:t>
+              <a:t>AVANT DE COMMENCER</a:t>
             </a:r>
           </a:p>
           <a:p>
@@ -27489,7 +29029,7 @@
                 <a:latin typeface="Consolas"/>
                 <a:cs typeface="Consolas"/>
               </a:rPr>
-              <a:t xml:space="preserve">flask run</a:t>
+              <a:t>flask run</a:t>
             </a:r>
             <a:r>
               <a:rPr lang="fr-FR" sz="1200" b="0" i="0">
@@ -27499,7 +29039,7 @@
                 <a:latin typeface="Segoe UI"/>
                 <a:cs typeface="Segoe UI"/>
               </a:rPr>
-              <a:t xml:space="preserve">, puis une analyse à blanc : spaCy se charge en deux secondes.</a:t>
+              <a:t>, puis une analyse à blanc : spaCy se charge en deux secondes.</a:t>
             </a:r>
           </a:p>
         </p:txBody>
@@ -27545,6 +29085,7 @@
           <a:lstStyle/>
           <a:p>
             <a:pPr algn="ctr"/>
+            <a:endParaRPr/>
           </a:p>
         </p:txBody>
       </p:sp>
@@ -27565,7 +29106,7 @@
           <a:noFill/>
         </p:spPr>
         <p:txBody>
-          <a:bodyPr wrap="square" lIns="0" rIns="0" tIns="0" bIns="0">
+          <a:bodyPr wrap="square" lIns="0" tIns="0" rIns="0" bIns="0">
             <a:spAutoFit/>
           </a:bodyPr>
           <a:lstStyle/>
@@ -27589,7 +29130,7 @@
                 <a:latin typeface="Segoe UI"/>
                 <a:cs typeface="Segoe UI"/>
               </a:rPr>
-              <a:t xml:space="preserve">PLAN B</a:t>
+              <a:t>PLAN B</a:t>
             </a:r>
           </a:p>
           <a:p>
@@ -27612,7 +29153,7 @@
                 <a:latin typeface="Segoe UI"/>
                 <a:cs typeface="Segoe UI"/>
               </a:rPr>
-              <a:t xml:space="preserve">Cette capture, puis </a:t>
+              <a:t>Cette capture, puis </a:t>
             </a:r>
             <a:r>
               <a:rPr lang="fr-FR" sz="1200" b="0" i="0">
@@ -27622,7 +29163,7 @@
                 <a:latin typeface="Consolas"/>
                 <a:cs typeface="Consolas"/>
               </a:rPr>
-              <a:t xml:space="preserve">pytest</a:t>
+              <a:t>pytest</a:t>
             </a:r>
             <a:r>
               <a:rPr lang="fr-FR" sz="1200" b="0" i="0">
@@ -27632,7 +29173,7 @@
                 <a:latin typeface="Segoe UI"/>
                 <a:cs typeface="Segoe UI"/>
               </a:rPr>
-              <a:t xml:space="preserve"> en direct : 48 tests en trois secondes.</a:t>
+              <a:t> en direct : 48 tests en trois secondes.</a:t>
             </a:r>
           </a:p>
         </p:txBody>
@@ -27723,7 +29264,7 @@
                 <a:latin typeface="Consolas"/>
                 <a:cs typeface="Consolas"/>
               </a:rPr>
-              <a:t xml:space="preserve">5</a:t>
+              <a:t>5</a:t>
             </a:r>
           </a:p>
         </p:txBody>
@@ -27769,7 +29310,7 @@
                 <a:latin typeface="Segoe UI"/>
                 <a:cs typeface="Segoe UI"/>
               </a:rPr>
-              <a:t xml:space="preserve">Importer</a:t>
+              <a:t>Importer</a:t>
             </a:r>
           </a:p>
           <a:p>
@@ -27792,7 +29333,7 @@
                 <a:latin typeface="Segoe UI"/>
                 <a:cs typeface="Segoe UI"/>
               </a:rPr>
-              <a:t xml:space="preserve">notification.docx, puis un .pdf : refus expliqué</a:t>
+              <a:t>notification.docx, puis un .pdf : refus expliqué</a:t>
             </a:r>
           </a:p>
         </p:txBody>
@@ -27930,7 +29471,7 @@
         </p:nvGraphicFramePr>
         <p:xfrm>
           <a:off x="685800" y="1666875"/>
-          <a:ext cx="10820400" cy="3981450"/>
+          <a:ext cx="10820400" cy="4062159"/>
         </p:xfrm>
         <a:graphic>
           <a:graphicData uri="http://schemas.openxmlformats.org/drawingml/2006/table">
